--- a/Projects/Presentation/pre.pptx
+++ b/Projects/Presentation/pre.pptx
@@ -118,6 +118,11 @@
       </a:defRPr>
     </a:lvl9pPr>
   </p:defaultTextStyle>
+  <p:extLst>
+    <p:ext uri="{EFAFB233-063F-42B5-8137-9DF3F51BA10A}">
+      <p15:sldGuideLst xmlns:p15="http://schemas.microsoft.com/office/powerpoint/2012/main"/>
+    </p:ext>
+  </p:extLst>
 </p:presentation>
 </file>
 
@@ -203,7 +208,7 @@
           <a:p>
             <a:fld id="{72E62CA7-4445-4FDA-B87B-0BC24AD6C8D8}" type="datetimeFigureOut">
               <a:rPr lang="zh-CN" altLang="en-US" smtClean="0"/>
-              <a:t>2026/5/29</a:t>
+              <a:t>2026/5/30</a:t>
             </a:fld>
             <a:endParaRPr lang="zh-CN" altLang="en-US"/>
           </a:p>
@@ -499,8 +504,8 @@
         </p:nvSpPr>
         <p:spPr/>
       </p:sp>
-      <mc:AlternateContent xmlns:mc="http://schemas.openxmlformats.org/markup-compatibility/2006">
-        <mc:Choice xmlns:a14="http://schemas.microsoft.com/office/drawing/2010/main" Requires="a14">
+      <mc:AlternateContent xmlns:mc="http://schemas.openxmlformats.org/markup-compatibility/2006" xmlns:a14="http://schemas.microsoft.com/office/drawing/2010/main">
+        <mc:Choice Requires="a14">
           <p:sp>
             <p:nvSpPr>
               <p:cNvPr id="3" name="备注占位符 2"/>
@@ -547,11 +552,11 @@
                     <m:sSub>
                       <m:sSubPr>
                         <m:ctrlPr>
-                          <a:rPr lang="zh-CN" altLang="en-US" sz="1200" kern="1200">
+                          <a:rPr lang="zh-CN" altLang="en-US" sz="1200" i="1" kern="1200">
                             <a:solidFill>
                               <a:schemeClr val="tx1"/>
                             </a:solidFill>
-                            <a:latin typeface="+mn-lt"/>
+                            <a:latin typeface="Cambria Math" panose="02040503050406030204" pitchFamily="18" charset="0"/>
                             <a:ea typeface="+mn-ea"/>
                             <a:cs typeface="+mn-cs"/>
                           </a:rPr>
@@ -563,7 +568,7 @@
                             <a:solidFill>
                               <a:schemeClr val="tx1"/>
                             </a:solidFill>
-                            <a:latin typeface="+mn-lt"/>
+                            <a:latin typeface="Cambria Math" panose="02040503050406030204" pitchFamily="18" charset="0"/>
                             <a:ea typeface="+mn-ea"/>
                             <a:cs typeface="+mn-cs"/>
                           </a:rPr>
@@ -576,7 +581,7 @@
                             <a:solidFill>
                               <a:schemeClr val="tx1"/>
                             </a:solidFill>
-                            <a:latin typeface="+mn-lt"/>
+                            <a:latin typeface="Cambria Math" panose="02040503050406030204" pitchFamily="18" charset="0"/>
                             <a:ea typeface="+mn-ea"/>
                             <a:cs typeface="+mn-cs"/>
                           </a:rPr>
@@ -605,7 +610,7 @@
             </p:txBody>
           </p:sp>
         </mc:Choice>
-        <mc:Fallback>
+        <mc:Fallback xmlns="">
           <p:sp>
             <p:nvSpPr>
               <p:cNvPr id="3" name="备注占位符 2"/>
@@ -759,7 +764,7 @@
           <a:lstStyle/>
           <a:p>
             <a:r>
-              <a:rPr lang="zh-CN" altLang="zh-CN" sz="1200" b="0" i="0" kern="1200" dirty="0">
+              <a:rPr lang="zh-CN" altLang="en-US" sz="1200" b="0" i="0" kern="1200" dirty="0">
                 <a:solidFill>
                   <a:schemeClr val="tx1"/>
                 </a:solidFill>
@@ -768,10 +773,10 @@
                 <a:ea typeface="+mn-ea"/>
                 <a:cs typeface="+mn-cs"/>
               </a:rPr>
-              <a:t>当 HCN1 基因发生功能丧失突变，我们前一张幻灯片里的那个完美调谐器就彻底损毁了。神经元再也无法在 Theta 波段产生共振，也就是说，它丧失了对低频信号的</a:t>
-            </a:r>
-            <a:r>
-              <a:rPr lang="zh-CN" altLang="en-US" sz="1200" b="0" i="0" kern="1200" dirty="0">
+              <a:t>这两张图很类似</a:t>
+            </a:r>
+            <a:r>
+              <a:rPr lang="en-US" altLang="zh-CN" sz="1200" b="0" i="0" kern="1200" dirty="0">
                 <a:solidFill>
                   <a:schemeClr val="tx1"/>
                 </a:solidFill>
@@ -780,10 +785,10 @@
                 <a:ea typeface="+mn-ea"/>
                 <a:cs typeface="+mn-cs"/>
               </a:rPr>
-              <a:t>提取</a:t>
-            </a:r>
-            <a:r>
-              <a:rPr lang="zh-CN" altLang="zh-CN" sz="1200" b="0" i="0" kern="1200" dirty="0">
+              <a:t>slide4</a:t>
+            </a:r>
+            <a:r>
+              <a:rPr lang="zh-CN" altLang="en-US" sz="1200" b="0" i="0" kern="1200" dirty="0">
                 <a:solidFill>
                   <a:schemeClr val="tx1"/>
                 </a:solidFill>
@@ -792,8 +797,218 @@
                 <a:ea typeface="+mn-ea"/>
                 <a:cs typeface="+mn-cs"/>
               </a:rPr>
-              <a:t>能力和对高频噪声的减震作用这直接导致了早发性婴儿癫痫脑病。患儿在出生后不久就出现难治性发作，并且脑电图上呈现出毫无正常节律的紊乱暴发。这里，我们从通道机制到临床症状看到了完整的因果链条</a:t>
-            </a:r>
+              <a:t>的两张图。</a:t>
+            </a:r>
+            <a:endParaRPr lang="en-US" altLang="zh-CN" sz="1200" b="0" i="0" kern="1200" dirty="0">
+              <a:solidFill>
+                <a:schemeClr val="tx1"/>
+              </a:solidFill>
+              <a:effectLst/>
+              <a:latin typeface="+mn-lt"/>
+              <a:ea typeface="+mn-ea"/>
+              <a:cs typeface="+mn-cs"/>
+            </a:endParaRPr>
+          </a:p>
+          <a:p>
+            <a:r>
+              <a:rPr lang="zh-CN" altLang="zh-CN" sz="1200" b="0" i="0" kern="1200" dirty="0">
+                <a:solidFill>
+                  <a:schemeClr val="tx1"/>
+                </a:solidFill>
+                <a:effectLst/>
+                <a:latin typeface="+mn-lt"/>
+                <a:ea typeface="+mn-ea"/>
+                <a:cs typeface="+mn-cs"/>
+              </a:rPr>
+              <a:t>科学家提取了患病婴儿的 HCN1 突变基因（如图中的 M153I，代表第 153 位的蛋氨酸突变为了异亮氨酸），并把它导入到**体外培养的细胞（如 CHO 细胞或 HEK293 细胞）**中表达。</a:t>
+            </a:r>
+            <a:r>
+              <a:rPr lang="zh-CN" altLang="en-US" sz="1200" b="0" i="0" kern="1200" dirty="0">
+                <a:solidFill>
+                  <a:schemeClr val="tx1"/>
+                </a:solidFill>
+                <a:effectLst/>
+                <a:latin typeface="+mn-lt"/>
+                <a:ea typeface="+mn-ea"/>
+                <a:cs typeface="+mn-cs"/>
+              </a:rPr>
+              <a:t>两张图片</a:t>
+            </a:r>
+            <a:r>
+              <a:rPr lang="zh-CN" altLang="zh-CN" sz="1200" b="0" i="0" kern="1200" dirty="0">
+                <a:solidFill>
+                  <a:schemeClr val="tx1"/>
+                </a:solidFill>
+                <a:effectLst/>
+                <a:latin typeface="+mn-lt"/>
+                <a:ea typeface="+mn-ea"/>
+                <a:cs typeface="+mn-cs"/>
+              </a:rPr>
+              <a:t>来自体外细胞的</a:t>
+            </a:r>
+            <a:r>
+              <a:rPr lang="zh-CN" altLang="zh-CN" sz="1200" b="1" i="0" kern="1200" dirty="0">
+                <a:solidFill>
+                  <a:schemeClr val="tx1"/>
+                </a:solidFill>
+                <a:effectLst/>
+                <a:latin typeface="+mn-lt"/>
+                <a:ea typeface="+mn-ea"/>
+                <a:cs typeface="+mn-cs"/>
+              </a:rPr>
+              <a:t>膜片钳实验</a:t>
+            </a:r>
+            <a:r>
+              <a:rPr lang="zh-CN" altLang="zh-CN" sz="1200" b="0" i="0" kern="1200" dirty="0">
+                <a:solidFill>
+                  <a:schemeClr val="tx1"/>
+                </a:solidFill>
+                <a:effectLst/>
+                <a:latin typeface="+mn-lt"/>
+                <a:ea typeface="+mn-ea"/>
+                <a:cs typeface="+mn-cs"/>
+              </a:rPr>
+              <a:t>记录，对比了正常人（黑线）和患病婴儿的 HCN1 通道特性。</a:t>
+            </a:r>
+            <a:r>
+              <a:rPr lang="zh-CN" altLang="en-US" dirty="0"/>
+              <a:t>比较明显的是橙红色的，它的激活电压变得很大，约向右平移了</a:t>
+            </a:r>
+            <a:r>
+              <a:rPr lang="en-US" altLang="zh-CN" dirty="0"/>
+              <a:t>40mV</a:t>
+            </a:r>
+            <a:r>
+              <a:rPr lang="zh-CN" altLang="en-US" dirty="0"/>
+              <a:t>，</a:t>
+            </a:r>
+            <a:r>
+              <a:rPr lang="zh-CN" altLang="zh-CN" sz="1200" b="0" i="0" kern="1200" dirty="0">
+                <a:solidFill>
+                  <a:schemeClr val="tx1"/>
+                </a:solidFill>
+                <a:effectLst/>
+                <a:latin typeface="+mn-lt"/>
+                <a:ea typeface="+mn-ea"/>
+                <a:cs typeface="+mn-cs"/>
+              </a:rPr>
+              <a:t>在 -75mV 时，突变通道已经处于接近 100% 开启的</a:t>
+            </a:r>
+            <a:r>
+              <a:rPr lang="zh-CN" altLang="zh-CN" sz="1200" b="1" i="0" kern="1200" dirty="0">
+                <a:solidFill>
+                  <a:schemeClr val="tx1"/>
+                </a:solidFill>
+                <a:effectLst/>
+                <a:latin typeface="+mn-lt"/>
+                <a:ea typeface="+mn-ea"/>
+                <a:cs typeface="+mn-cs"/>
+              </a:rPr>
+              <a:t>饱和死区（红线顶部）</a:t>
+            </a:r>
+            <a:r>
+              <a:rPr lang="zh-CN" altLang="en-US" sz="1200" b="0" i="0" kern="1200" dirty="0">
+                <a:solidFill>
+                  <a:schemeClr val="tx1"/>
+                </a:solidFill>
+                <a:effectLst/>
+                <a:latin typeface="+mn-lt"/>
+                <a:ea typeface="+mn-ea"/>
+                <a:cs typeface="+mn-cs"/>
+              </a:rPr>
+              <a:t>，</a:t>
+            </a:r>
+            <a:r>
+              <a:rPr lang="zh-CN" altLang="zh-CN" sz="1200" b="0" i="0" kern="1200" dirty="0">
+                <a:solidFill>
+                  <a:schemeClr val="tx1"/>
+                </a:solidFill>
+                <a:effectLst/>
+                <a:latin typeface="+mn-lt"/>
+                <a:ea typeface="+mn-ea"/>
+                <a:cs typeface="+mn-cs"/>
+              </a:rPr>
+              <a:t>斜率变成了零，动态调谐能力彻底丧失</a:t>
+            </a:r>
+            <a:r>
+              <a:rPr lang="zh-CN" altLang="en-US" sz="1200" b="0" i="0" kern="1200" dirty="0">
+                <a:solidFill>
+                  <a:schemeClr val="tx1"/>
+                </a:solidFill>
+                <a:effectLst/>
+                <a:latin typeface="+mn-lt"/>
+                <a:ea typeface="+mn-ea"/>
+                <a:cs typeface="+mn-cs"/>
+              </a:rPr>
+              <a:t>。</a:t>
+            </a:r>
+            <a:r>
+              <a:rPr lang="zh-CN" altLang="en-US" dirty="0"/>
+              <a:t>同时它的激活时间常数也显著低于正常组，</a:t>
+            </a:r>
+            <a:r>
+              <a:rPr lang="zh-CN" altLang="zh-CN" sz="1200" b="0" i="0" kern="1200" dirty="0">
+                <a:solidFill>
+                  <a:schemeClr val="tx1"/>
+                </a:solidFill>
+                <a:effectLst/>
+                <a:latin typeface="+mn-lt"/>
+                <a:ea typeface="+mn-ea"/>
+                <a:cs typeface="+mn-cs"/>
+              </a:rPr>
+              <a:t>它失去了正常通道‘缓慢负反馈’的减震特性。</a:t>
+            </a:r>
+            <a:r>
+              <a:rPr lang="zh-CN" altLang="zh-CN" sz="1200" b="1" i="0" kern="1200" dirty="0">
+                <a:solidFill>
+                  <a:schemeClr val="tx1"/>
+                </a:solidFill>
+                <a:effectLst/>
+                <a:latin typeface="+mn-lt"/>
+                <a:ea typeface="+mn-ea"/>
+                <a:cs typeface="+mn-cs"/>
+              </a:rPr>
+              <a:t>总结来说：</a:t>
+            </a:r>
+            <a:r>
+              <a:rPr lang="zh-CN" altLang="zh-CN" sz="1200" b="0" i="0" kern="1200" dirty="0">
+                <a:solidFill>
+                  <a:schemeClr val="tx1"/>
+                </a:solidFill>
+                <a:effectLst/>
+                <a:latin typeface="+mn-lt"/>
+                <a:ea typeface="+mn-ea"/>
+                <a:cs typeface="+mn-cs"/>
+              </a:rPr>
+              <a:t> 这种突变既让通道失去了敏感的‘频率调谐能力’，又产生了巨大的持续漏电流，导致神经元极度兴奋</a:t>
+            </a:r>
+            <a:r>
+              <a:rPr lang="zh-CN" altLang="en-US" sz="1200" b="0" i="0" kern="1200" dirty="0">
+                <a:solidFill>
+                  <a:schemeClr val="tx1"/>
+                </a:solidFill>
+                <a:effectLst/>
+                <a:latin typeface="+mn-lt"/>
+                <a:ea typeface="+mn-ea"/>
+                <a:cs typeface="+mn-cs"/>
+              </a:rPr>
+              <a:t>，</a:t>
+            </a:r>
+            <a:r>
+              <a:rPr lang="zh-CN" altLang="zh-CN" sz="1200" b="0" i="0" kern="1200" dirty="0">
+                <a:solidFill>
+                  <a:schemeClr val="tx1"/>
+                </a:solidFill>
+                <a:effectLst/>
+                <a:latin typeface="+mn-lt"/>
+                <a:ea typeface="+mn-ea"/>
+                <a:cs typeface="+mn-cs"/>
+              </a:rPr>
+              <a:t>这就是导致婴儿爆发严重癫痫的底层细胞级机制。</a:t>
+            </a:r>
+            <a:endParaRPr lang="zh-CN" altLang="en-US" dirty="0"/>
+          </a:p>
+          <a:p>
             <a:endParaRPr lang="zh-CN" altLang="en-US" dirty="0"/>
           </a:p>
         </p:txBody>
@@ -2022,8 +2237,8 @@
         </p:nvSpPr>
         <p:spPr/>
       </p:sp>
-      <mc:AlternateContent xmlns:mc="http://schemas.openxmlformats.org/markup-compatibility/2006">
-        <mc:Choice xmlns:a14="http://schemas.microsoft.com/office/drawing/2010/main" Requires="a14">
+      <mc:AlternateContent xmlns:mc="http://schemas.openxmlformats.org/markup-compatibility/2006" xmlns:a14="http://schemas.microsoft.com/office/drawing/2010/main">
+        <mc:Choice Requires="a14">
           <p:sp>
             <p:nvSpPr>
               <p:cNvPr id="3" name="备注占位符 2"/>
@@ -2103,11 +2318,11 @@
                     <m:sSup>
                       <m:sSupPr>
                         <m:ctrlPr>
-                          <a:rPr lang="zh-CN" altLang="en-US" sz="1200" kern="1200">
+                          <a:rPr lang="zh-CN" altLang="en-US" sz="1200" i="1" kern="1200">
                             <a:solidFill>
                               <a:schemeClr val="tx1"/>
                             </a:solidFill>
-                            <a:latin typeface="+mn-lt"/>
+                            <a:latin typeface="Cambria Math" panose="02040503050406030204" pitchFamily="18" charset="0"/>
                             <a:ea typeface="+mn-ea"/>
                             <a:cs typeface="+mn-cs"/>
                           </a:rPr>
@@ -2119,7 +2334,7 @@
                             <a:solidFill>
                               <a:schemeClr val="tx1"/>
                             </a:solidFill>
-                            <a:latin typeface="+mn-lt"/>
+                            <a:latin typeface="Cambria Math" panose="02040503050406030204" pitchFamily="18" charset="0"/>
                             <a:ea typeface="+mn-ea"/>
                             <a:cs typeface="+mn-cs"/>
                           </a:rPr>
@@ -2132,7 +2347,7 @@
                             <a:solidFill>
                               <a:schemeClr val="tx1"/>
                             </a:solidFill>
-                            <a:latin typeface="+mn-lt"/>
+                            <a:latin typeface="Cambria Math" panose="02040503050406030204" pitchFamily="18" charset="0"/>
                             <a:ea typeface="+mn-ea"/>
                             <a:cs typeface="+mn-cs"/>
                           </a:rPr>
@@ -2194,11 +2409,11 @@
                     <m:sSup>
                       <m:sSupPr>
                         <m:ctrlPr>
-                          <a:rPr lang="zh-CN" altLang="en-US" sz="1200" kern="1200">
+                          <a:rPr lang="zh-CN" altLang="en-US" sz="1200" i="1" kern="1200">
                             <a:solidFill>
                               <a:schemeClr val="tx1"/>
                             </a:solidFill>
-                            <a:latin typeface="+mn-lt"/>
+                            <a:latin typeface="Cambria Math" panose="02040503050406030204" pitchFamily="18" charset="0"/>
                             <a:ea typeface="+mn-ea"/>
                             <a:cs typeface="+mn-cs"/>
                           </a:rPr>
@@ -2210,7 +2425,7 @@
                             <a:solidFill>
                               <a:schemeClr val="tx1"/>
                             </a:solidFill>
-                            <a:latin typeface="+mn-lt"/>
+                            <a:latin typeface="Cambria Math" panose="02040503050406030204" pitchFamily="18" charset="0"/>
                             <a:ea typeface="+mn-ea"/>
                             <a:cs typeface="+mn-cs"/>
                           </a:rPr>
@@ -2223,7 +2438,7 @@
                             <a:solidFill>
                               <a:schemeClr val="tx1"/>
                             </a:solidFill>
-                            <a:latin typeface="+mn-lt"/>
+                            <a:latin typeface="Cambria Math" panose="02040503050406030204" pitchFamily="18" charset="0"/>
                             <a:ea typeface="+mn-ea"/>
                             <a:cs typeface="+mn-cs"/>
                           </a:rPr>
@@ -2336,7 +2551,7 @@
             </p:txBody>
           </p:sp>
         </mc:Choice>
-        <mc:Fallback>
+        <mc:Fallback xmlns="">
           <p:sp>
             <p:nvSpPr>
               <p:cNvPr id="3" name="备注占位符 2"/>
@@ -3005,7 +3220,7 @@
           <a:p>
             <a:fld id="{73DEAA0B-170A-4D33-B5AB-2BB9271AD51B}" type="datetimeFigureOut">
               <a:rPr lang="zh-CN" altLang="en-US" smtClean="0"/>
-              <a:t>2026/5/29</a:t>
+              <a:t>2026/5/30</a:t>
             </a:fld>
             <a:endParaRPr lang="zh-CN" altLang="en-US"/>
           </a:p>
@@ -3203,7 +3418,7 @@
           <a:p>
             <a:fld id="{73DEAA0B-170A-4D33-B5AB-2BB9271AD51B}" type="datetimeFigureOut">
               <a:rPr lang="zh-CN" altLang="en-US" smtClean="0"/>
-              <a:t>2026/5/29</a:t>
+              <a:t>2026/5/30</a:t>
             </a:fld>
             <a:endParaRPr lang="zh-CN" altLang="en-US"/>
           </a:p>
@@ -3411,7 +3626,7 @@
           <a:p>
             <a:fld id="{73DEAA0B-170A-4D33-B5AB-2BB9271AD51B}" type="datetimeFigureOut">
               <a:rPr lang="zh-CN" altLang="en-US" smtClean="0"/>
-              <a:t>2026/5/29</a:t>
+              <a:t>2026/5/30</a:t>
             </a:fld>
             <a:endParaRPr lang="zh-CN" altLang="en-US"/>
           </a:p>
@@ -3609,7 +3824,7 @@
           <a:p>
             <a:fld id="{73DEAA0B-170A-4D33-B5AB-2BB9271AD51B}" type="datetimeFigureOut">
               <a:rPr lang="zh-CN" altLang="en-US" smtClean="0"/>
-              <a:t>2026/5/29</a:t>
+              <a:t>2026/5/30</a:t>
             </a:fld>
             <a:endParaRPr lang="zh-CN" altLang="en-US"/>
           </a:p>
@@ -3884,7 +4099,7 @@
           <a:p>
             <a:fld id="{73DEAA0B-170A-4D33-B5AB-2BB9271AD51B}" type="datetimeFigureOut">
               <a:rPr lang="zh-CN" altLang="en-US" smtClean="0"/>
-              <a:t>2026/5/29</a:t>
+              <a:t>2026/5/30</a:t>
             </a:fld>
             <a:endParaRPr lang="zh-CN" altLang="en-US"/>
           </a:p>
@@ -4149,7 +4364,7 @@
           <a:p>
             <a:fld id="{73DEAA0B-170A-4D33-B5AB-2BB9271AD51B}" type="datetimeFigureOut">
               <a:rPr lang="zh-CN" altLang="en-US" smtClean="0"/>
-              <a:t>2026/5/29</a:t>
+              <a:t>2026/5/30</a:t>
             </a:fld>
             <a:endParaRPr lang="zh-CN" altLang="en-US"/>
           </a:p>
@@ -4561,7 +4776,7 @@
           <a:p>
             <a:fld id="{73DEAA0B-170A-4D33-B5AB-2BB9271AD51B}" type="datetimeFigureOut">
               <a:rPr lang="zh-CN" altLang="en-US" smtClean="0"/>
-              <a:t>2026/5/29</a:t>
+              <a:t>2026/5/30</a:t>
             </a:fld>
             <a:endParaRPr lang="zh-CN" altLang="en-US"/>
           </a:p>
@@ -4702,7 +4917,7 @@
           <a:p>
             <a:fld id="{73DEAA0B-170A-4D33-B5AB-2BB9271AD51B}" type="datetimeFigureOut">
               <a:rPr lang="zh-CN" altLang="en-US" smtClean="0"/>
-              <a:t>2026/5/29</a:t>
+              <a:t>2026/5/30</a:t>
             </a:fld>
             <a:endParaRPr lang="zh-CN" altLang="en-US"/>
           </a:p>
@@ -4815,7 +5030,7 @@
           <a:p>
             <a:fld id="{73DEAA0B-170A-4D33-B5AB-2BB9271AD51B}" type="datetimeFigureOut">
               <a:rPr lang="zh-CN" altLang="en-US" smtClean="0"/>
-              <a:t>2026/5/29</a:t>
+              <a:t>2026/5/30</a:t>
             </a:fld>
             <a:endParaRPr lang="zh-CN" altLang="en-US"/>
           </a:p>
@@ -5126,7 +5341,7 @@
           <a:p>
             <a:fld id="{73DEAA0B-170A-4D33-B5AB-2BB9271AD51B}" type="datetimeFigureOut">
               <a:rPr lang="zh-CN" altLang="en-US" smtClean="0"/>
-              <a:t>2026/5/29</a:t>
+              <a:t>2026/5/30</a:t>
             </a:fld>
             <a:endParaRPr lang="zh-CN" altLang="en-US"/>
           </a:p>
@@ -5414,7 +5629,7 @@
           <a:p>
             <a:fld id="{73DEAA0B-170A-4D33-B5AB-2BB9271AD51B}" type="datetimeFigureOut">
               <a:rPr lang="zh-CN" altLang="en-US" smtClean="0"/>
-              <a:t>2026/5/29</a:t>
+              <a:t>2026/5/30</a:t>
             </a:fld>
             <a:endParaRPr lang="zh-CN" altLang="en-US"/>
           </a:p>
@@ -5655,7 +5870,7 @@
           <a:p>
             <a:fld id="{73DEAA0B-170A-4D33-B5AB-2BB9271AD51B}" type="datetimeFigureOut">
               <a:rPr lang="zh-CN" altLang="en-US" smtClean="0"/>
-              <a:t>2026/5/29</a:t>
+              <a:t>2026/5/30</a:t>
             </a:fld>
             <a:endParaRPr lang="zh-CN" altLang="en-US"/>
           </a:p>
@@ -6294,7 +6509,12 @@
             <p:ph type="title"/>
           </p:nvPr>
         </p:nvSpPr>
-        <p:spPr/>
+        <p:spPr>
+          <a:xfrm>
+            <a:off x="757381" y="60325"/>
+            <a:ext cx="10515600" cy="1325563"/>
+          </a:xfrm>
+        </p:spPr>
         <p:txBody>
           <a:bodyPr/>
           <a:lstStyle/>
@@ -6325,7 +6545,7 @@
         </p:nvSpPr>
         <p:spPr>
           <a:xfrm>
-            <a:off x="736600" y="1789340"/>
+            <a:off x="674254" y="1184997"/>
             <a:ext cx="10515600" cy="4351338"/>
           </a:xfrm>
         </p:spPr>
@@ -6349,24 +6569,6 @@
           </a:p>
           <a:p>
             <a:r>
-              <a:rPr lang="zh-CN" altLang="zh-CN" dirty="0"/>
-              <a:t>HCN1 新生突变 → 通道功能丧失 → Ih 电流消失</a:t>
-            </a:r>
-          </a:p>
-          <a:p>
-            <a:r>
-              <a:rPr lang="zh-CN" altLang="zh-CN" dirty="0"/>
-              <a:t>神经元丧失 Theta 共振峰，频率过滤能力被破坏</a:t>
-            </a:r>
-          </a:p>
-          <a:p>
-            <a:r>
-              <a:rPr lang="zh-CN" altLang="zh-CN" dirty="0"/>
-              <a:t>临床：出生不久即起病，难治性癫痫+严重发育迟滞</a:t>
-            </a:r>
-          </a:p>
-          <a:p>
-            <a:r>
               <a:rPr lang="zh-CN" altLang="zh-CN" b="1" dirty="0"/>
               <a:t>脑电图：</a:t>
             </a:r>
@@ -6381,6 +6583,124 @@
             <a:r>
               <a:rPr lang="zh-CN" altLang="zh-CN" dirty="0"/>
               <a:t>大量棘‑慢复合波爆发</a:t>
+            </a:r>
+            <a:endParaRPr lang="zh-CN" altLang="en-US" dirty="0"/>
+          </a:p>
+        </p:txBody>
+      </p:sp>
+      <p:pic>
+        <p:nvPicPr>
+          <p:cNvPr id="5" name="图片 4">
+            <a:extLst>
+              <a:ext uri="{FF2B5EF4-FFF2-40B4-BE49-F238E27FC236}">
+                <a16:creationId xmlns:a16="http://schemas.microsoft.com/office/drawing/2014/main" id="{76A61578-C176-CA6C-DD37-7563778FCBFA}"/>
+              </a:ext>
+            </a:extLst>
+          </p:cNvPr>
+          <p:cNvPicPr>
+            <a:picLocks noChangeAspect="1"/>
+          </p:cNvPicPr>
+          <p:nvPr/>
+        </p:nvPicPr>
+        <p:blipFill>
+          <a:blip r:embed="rId3"/>
+          <a:stretch>
+            <a:fillRect/>
+          </a:stretch>
+        </p:blipFill>
+        <p:spPr>
+          <a:xfrm>
+            <a:off x="1002146" y="2510560"/>
+            <a:ext cx="4560454" cy="3688850"/>
+          </a:xfrm>
+          <a:prstGeom prst="rect">
+            <a:avLst/>
+          </a:prstGeom>
+        </p:spPr>
+      </p:pic>
+      <p:pic>
+        <p:nvPicPr>
+          <p:cNvPr id="6" name="内容占位符 4">
+            <a:extLst>
+              <a:ext uri="{FF2B5EF4-FFF2-40B4-BE49-F238E27FC236}">
+                <a16:creationId xmlns:a16="http://schemas.microsoft.com/office/drawing/2014/main" id="{427BB2D9-74DE-BD54-DC19-E2D6E9E2D430}"/>
+              </a:ext>
+            </a:extLst>
+          </p:cNvPr>
+          <p:cNvPicPr>
+            <a:picLocks noChangeAspect="1"/>
+          </p:cNvPicPr>
+          <p:nvPr/>
+        </p:nvPicPr>
+        <p:blipFill>
+          <a:blip r:embed="rId4">
+            <a:extLst>
+              <a:ext uri="{28A0092B-C50C-407E-A947-70E740481C1C}">
+                <a14:useLocalDpi xmlns:a14="http://schemas.microsoft.com/office/drawing/2010/main" val="0"/>
+              </a:ext>
+            </a:extLst>
+          </a:blip>
+          <a:stretch>
+            <a:fillRect/>
+          </a:stretch>
+        </p:blipFill>
+        <p:spPr>
+          <a:xfrm>
+            <a:off x="6206837" y="2325877"/>
+            <a:ext cx="4915586" cy="4058216"/>
+          </a:xfrm>
+          <a:prstGeom prst="rect">
+            <a:avLst/>
+          </a:prstGeom>
+        </p:spPr>
+      </p:pic>
+      <p:sp>
+        <p:nvSpPr>
+          <p:cNvPr id="8" name="文本框 7">
+            <a:extLst>
+              <a:ext uri="{FF2B5EF4-FFF2-40B4-BE49-F238E27FC236}">
+                <a16:creationId xmlns:a16="http://schemas.microsoft.com/office/drawing/2014/main" id="{48A8B8F0-B92E-FF31-F084-8B5FF50E3426}"/>
+              </a:ext>
+            </a:extLst>
+          </p:cNvPr>
+          <p:cNvSpPr txBox="1"/>
+          <p:nvPr/>
+        </p:nvSpPr>
+        <p:spPr>
+          <a:xfrm>
+            <a:off x="1235528" y="6211669"/>
+            <a:ext cx="9720943" cy="646331"/>
+          </a:xfrm>
+          <a:prstGeom prst="rect">
+            <a:avLst/>
+          </a:prstGeom>
+          <a:noFill/>
+        </p:spPr>
+        <p:txBody>
+          <a:bodyPr wrap="square" rtlCol="0">
+            <a:spAutoFit/>
+          </a:bodyPr>
+          <a:lstStyle/>
+          <a:p>
+            <a:r>
+              <a:rPr lang="zh-CN" altLang="zh-CN" b="1" dirty="0"/>
+              <a:t>Marini et al. (2018)</a:t>
+            </a:r>
+            <a:r>
+              <a:rPr lang="zh-CN" altLang="zh-CN" dirty="0"/>
+              <a:t> </a:t>
+            </a:r>
+            <a:r>
+              <a:rPr lang="zh-CN" altLang="zh-CN" i="1" dirty="0"/>
+              <a:t>HCN1 mutation spectrum: from neonatal epileptic encephalopathy to benign generalized epilepsy and beyond.</a:t>
+            </a:r>
+            <a:r>
+              <a:rPr lang="zh-CN" altLang="zh-CN" dirty="0"/>
+              <a:t> </a:t>
+            </a:r>
+            <a:r>
+              <a:rPr lang="zh-CN" altLang="zh-CN" b="1" dirty="0"/>
+              <a:t>Brain</a:t>
             </a:r>
             <a:endParaRPr lang="zh-CN" altLang="en-US" dirty="0"/>
           </a:p>

--- a/Projects/Presentation/pre.pptx
+++ b/Projects/Presentation/pre.pptx
@@ -5,21 +5,24 @@
     <p:sldMasterId id="2147483648" r:id="rId1"/>
   </p:sldMasterIdLst>
   <p:notesMasterIdLst>
-    <p:notesMasterId r:id="rId14"/>
+    <p:notesMasterId r:id="rId17"/>
   </p:notesMasterIdLst>
   <p:sldIdLst>
     <p:sldId id="256" r:id="rId2"/>
     <p:sldId id="257" r:id="rId3"/>
     <p:sldId id="258" r:id="rId4"/>
-    <p:sldId id="259" r:id="rId5"/>
-    <p:sldId id="260" r:id="rId6"/>
-    <p:sldId id="261" r:id="rId7"/>
-    <p:sldId id="262" r:id="rId8"/>
-    <p:sldId id="263" r:id="rId9"/>
-    <p:sldId id="264" r:id="rId10"/>
-    <p:sldId id="265" r:id="rId11"/>
-    <p:sldId id="266" r:id="rId12"/>
-    <p:sldId id="267" r:id="rId13"/>
+    <p:sldId id="268" r:id="rId5"/>
+    <p:sldId id="259" r:id="rId6"/>
+    <p:sldId id="260" r:id="rId7"/>
+    <p:sldId id="265" r:id="rId8"/>
+    <p:sldId id="261" r:id="rId9"/>
+    <p:sldId id="262" r:id="rId10"/>
+    <p:sldId id="269" r:id="rId11"/>
+    <p:sldId id="270" r:id="rId12"/>
+    <p:sldId id="263" r:id="rId13"/>
+    <p:sldId id="264" r:id="rId14"/>
+    <p:sldId id="266" r:id="rId15"/>
+    <p:sldId id="267" r:id="rId16"/>
   </p:sldIdLst>
   <p:sldSz cx="12192000" cy="6858000"/>
   <p:notesSz cx="6858000" cy="9144000"/>
@@ -208,7 +211,7 @@
           <a:p>
             <a:fld id="{72E62CA7-4445-4FDA-B87B-0BC24AD6C8D8}" type="datetimeFigureOut">
               <a:rPr lang="zh-CN" altLang="en-US" smtClean="0"/>
-              <a:t>2026/5/30</a:t>
+              <a:t>2026/6/2</a:t>
             </a:fld>
             <a:endParaRPr lang="zh-CN" altLang="en-US"/>
           </a:p>
@@ -504,193 +507,14 @@
         </p:nvSpPr>
         <p:spPr/>
       </p:sp>
-      <mc:AlternateContent xmlns:mc="http://schemas.openxmlformats.org/markup-compatibility/2006" xmlns:a14="http://schemas.microsoft.com/office/drawing/2010/main">
-        <mc:Choice Requires="a14">
-          <p:sp>
-            <p:nvSpPr>
-              <p:cNvPr id="3" name="备注占位符 2"/>
-              <p:cNvSpPr>
-                <a:spLocks noGrp="1"/>
-              </p:cNvSpPr>
-              <p:nvPr>
-                <p:ph type="body" idx="1"/>
-              </p:nvPr>
-            </p:nvSpPr>
-            <p:spPr/>
-            <p:txBody>
-              <a:bodyPr/>
-              <a:lstStyle/>
-              <a:p>
-                <a:r>
-                  <a:rPr lang="zh-CN" altLang="zh-CN" sz="1200" b="0" i="0" kern="1200" dirty="0">
-                    <a:solidFill>
-                      <a:schemeClr val="tx1"/>
-                    </a:solidFill>
-                    <a:effectLst/>
-                    <a:latin typeface="+mn-lt"/>
-                    <a:ea typeface="+mn-ea"/>
-                    <a:cs typeface="+mn-cs"/>
-                  </a:rPr>
-                  <a:t>传统观点认为，神经元细胞膜是一个被动的 RC 积分器。</a:t>
-                </a:r>
-              </a:p>
-              <a:p>
-                <a:r>
-                  <a:rPr lang="zh-CN" altLang="zh-CN" sz="1200" b="0" i="0" kern="1200" dirty="0">
-                    <a:solidFill>
-                      <a:schemeClr val="tx1"/>
-                    </a:solidFill>
-                    <a:effectLst/>
-                    <a:latin typeface="+mn-lt"/>
-                    <a:ea typeface="+mn-ea"/>
-                    <a:cs typeface="+mn-cs"/>
-                  </a:rPr>
-                  <a:t>膜电容 (</a:t>
-                </a:r>
-                <a14:m>
-                  <m:oMath xmlns:m="http://schemas.openxmlformats.org/officeDocument/2006/math">
-                    <m:sSub>
-                      <m:sSubPr>
-                        <m:ctrlPr>
-                          <a:rPr lang="zh-CN" altLang="en-US" sz="1200" i="1" kern="1200">
-                            <a:solidFill>
-                              <a:schemeClr val="tx1"/>
-                            </a:solidFill>
-                            <a:latin typeface="Cambria Math" panose="02040503050406030204" pitchFamily="18" charset="0"/>
-                            <a:ea typeface="+mn-ea"/>
-                            <a:cs typeface="+mn-cs"/>
-                          </a:rPr>
-                        </m:ctrlPr>
-                      </m:sSubPr>
-                      <m:e>
-                        <m:r>
-                          <a:rPr lang="zh-CN" altLang="en-US" sz="1200" i="1" kern="1200">
-                            <a:solidFill>
-                              <a:schemeClr val="tx1"/>
-                            </a:solidFill>
-                            <a:latin typeface="Cambria Math" panose="02040503050406030204" pitchFamily="18" charset="0"/>
-                            <a:ea typeface="+mn-ea"/>
-                            <a:cs typeface="+mn-cs"/>
-                          </a:rPr>
-                          <m:t>𝐶</m:t>
-                        </m:r>
-                      </m:e>
-                      <m:sub>
-                        <m:r>
-                          <a:rPr lang="zh-CN" altLang="en-US" sz="1200" i="1" kern="1200">
-                            <a:solidFill>
-                              <a:schemeClr val="tx1"/>
-                            </a:solidFill>
-                            <a:latin typeface="Cambria Math" panose="02040503050406030204" pitchFamily="18" charset="0"/>
-                            <a:ea typeface="+mn-ea"/>
-                            <a:cs typeface="+mn-cs"/>
-                          </a:rPr>
-                          <m:t>𝑚</m:t>
-                        </m:r>
-                      </m:sub>
-                    </m:sSub>
-                  </m:oMath>
-                </a14:m>
-                <a:r>
-                  <a:rPr lang="zh-CN" altLang="zh-CN" sz="1200" b="0" i="0" kern="1200" dirty="0">
-                    <a:solidFill>
-                      <a:schemeClr val="tx1"/>
-                    </a:solidFill>
-                    <a:effectLst/>
-                    <a:latin typeface="+mn-lt"/>
-                    <a:ea typeface="+mn-ea"/>
-                    <a:cs typeface="+mn-cs"/>
-                  </a:rPr>
-                  <a:t>) 会吸收/过滤掉高频的快速突触输入。</a:t>
-                </a:r>
-              </a:p>
-              <a:p>
-                <a:endParaRPr lang="zh-CN" altLang="en-US" dirty="0"/>
-              </a:p>
-            </p:txBody>
-          </p:sp>
-        </mc:Choice>
-        <mc:Fallback xmlns="">
-          <p:sp>
-            <p:nvSpPr>
-              <p:cNvPr id="3" name="备注占位符 2"/>
-              <p:cNvSpPr>
-                <a:spLocks noGrp="1"/>
-              </p:cNvSpPr>
-              <p:nvPr>
-                <p:ph type="body" idx="1"/>
-              </p:nvPr>
-            </p:nvSpPr>
-            <p:spPr/>
-            <p:txBody>
-              <a:bodyPr/>
-              <a:lstStyle/>
-              <a:p>
-                <a:r>
-                  <a:rPr lang="zh-CN" altLang="zh-CN" sz="1200" b="0" i="0" kern="1200" dirty="0">
-                    <a:solidFill>
-                      <a:schemeClr val="tx1"/>
-                    </a:solidFill>
-                    <a:effectLst/>
-                    <a:latin typeface="+mn-lt"/>
-                    <a:ea typeface="+mn-ea"/>
-                    <a:cs typeface="+mn-cs"/>
-                  </a:rPr>
-                  <a:t>传统观点认为，神经元细胞膜是一个被动的 RC 积分器。</a:t>
-                </a:r>
-              </a:p>
-              <a:p>
-                <a:r>
-                  <a:rPr lang="zh-CN" altLang="zh-CN" sz="1200" b="0" i="0" kern="1200" dirty="0">
-                    <a:solidFill>
-                      <a:schemeClr val="tx1"/>
-                    </a:solidFill>
-                    <a:effectLst/>
-                    <a:latin typeface="+mn-lt"/>
-                    <a:ea typeface="+mn-ea"/>
-                    <a:cs typeface="+mn-cs"/>
-                  </a:rPr>
-                  <a:t>膜电容 (</a:t>
-                </a:r>
-                <a:r>
-                  <a:rPr lang="zh-CN" altLang="en-US" sz="1200" i="0" kern="1200">
-                    <a:solidFill>
-                      <a:schemeClr val="tx1"/>
-                    </a:solidFill>
-                    <a:latin typeface="+mn-lt"/>
-                    <a:ea typeface="+mn-ea"/>
-                    <a:cs typeface="+mn-cs"/>
-                  </a:rPr>
-                  <a:t>𝐶_𝑚</a:t>
-                </a:r>
-                <a:r>
-                  <a:rPr lang="zh-CN" altLang="zh-CN" sz="1200" b="0" i="0" kern="1200" dirty="0">
-                    <a:solidFill>
-                      <a:schemeClr val="tx1"/>
-                    </a:solidFill>
-                    <a:effectLst/>
-                    <a:latin typeface="+mn-lt"/>
-                    <a:ea typeface="+mn-ea"/>
-                    <a:cs typeface="+mn-cs"/>
-                  </a:rPr>
-                  <a:t>) 会吸收/过滤掉高频的快速突触输入。</a:t>
-                </a:r>
-              </a:p>
-              <a:p>
-                <a:endParaRPr lang="zh-CN" altLang="en-US" dirty="0"/>
-              </a:p>
-            </p:txBody>
-          </p:sp>
-        </mc:Fallback>
-      </mc:AlternateContent>
-      <p:sp>
-        <p:nvSpPr>
-          <p:cNvPr id="4" name="灯片编号占位符 3"/>
-          <p:cNvSpPr>
-            <a:spLocks noGrp="1"/>
-          </p:cNvSpPr>
-          <p:nvPr>
-            <p:ph type="sldNum" sz="quarter" idx="5"/>
+      <p:sp>
+        <p:nvSpPr>
+          <p:cNvPr id="3" name="备注占位符 2"/>
+          <p:cNvSpPr>
+            <a:spLocks noGrp="1"/>
+          </p:cNvSpPr>
+          <p:nvPr>
+            <p:ph type="body" idx="1"/>
           </p:nvPr>
         </p:nvSpPr>
         <p:spPr/>
@@ -698,9 +522,28 @@
           <a:bodyPr/>
           <a:lstStyle/>
           <a:p>
+            <a:endParaRPr lang="zh-CN" altLang="en-US" dirty="0"/>
+          </a:p>
+        </p:txBody>
+      </p:sp>
+      <p:sp>
+        <p:nvSpPr>
+          <p:cNvPr id="4" name="灯片编号占位符 3"/>
+          <p:cNvSpPr>
+            <a:spLocks noGrp="1"/>
+          </p:cNvSpPr>
+          <p:nvPr>
+            <p:ph type="sldNum" sz="quarter" idx="5"/>
+          </p:nvPr>
+        </p:nvSpPr>
+        <p:spPr/>
+        <p:txBody>
+          <a:bodyPr/>
+          <a:lstStyle/>
+          <a:p>
             <a:fld id="{46D80658-9F01-48E8-A529-84FBF04BFF31}" type="slidenum">
               <a:rPr lang="zh-CN" altLang="en-US" smtClean="0"/>
-              <a:t>2</a:t>
+              <a:t>1</a:t>
             </a:fld>
             <a:endParaRPr lang="zh-CN" altLang="en-US"/>
           </a:p>
@@ -709,7 +552,7 @@
     </p:spTree>
     <p:extLst>
       <p:ext uri="{BB962C8B-B14F-4D97-AF65-F5344CB8AC3E}">
-        <p14:creationId xmlns:p14="http://schemas.microsoft.com/office/powerpoint/2010/main" val="3376055711"/>
+        <p14:creationId xmlns:p14="http://schemas.microsoft.com/office/powerpoint/2010/main" val="2951823814"/>
       </p:ext>
     </p:extLst>
   </p:cSld>
@@ -720,6 +563,198 @@
 </file>
 
 <file path=ppt/notesSlides/notesSlide10.xml><?xml version="1.0" encoding="utf-8"?>
+<p:notes xmlns:a="http://schemas.openxmlformats.org/drawingml/2006/main" xmlns:r="http://schemas.openxmlformats.org/officeDocument/2006/relationships" xmlns:p="http://schemas.openxmlformats.org/presentationml/2006/main">
+  <p:cSld>
+    <p:spTree>
+      <p:nvGrpSpPr>
+        <p:cNvPr id="1" name="">
+          <a:extLst>
+            <a:ext uri="{FF2B5EF4-FFF2-40B4-BE49-F238E27FC236}">
+              <a16:creationId xmlns:a16="http://schemas.microsoft.com/office/drawing/2014/main" id="{158824CB-1A70-45C9-D47D-5751ED944050}"/>
+            </a:ext>
+          </a:extLst>
+        </p:cNvPr>
+        <p:cNvGrpSpPr/>
+        <p:nvPr/>
+      </p:nvGrpSpPr>
+      <p:grpSpPr>
+        <a:xfrm>
+          <a:off x="0" y="0"/>
+          <a:ext cx="0" cy="0"/>
+          <a:chOff x="0" y="0"/>
+          <a:chExt cx="0" cy="0"/>
+        </a:xfrm>
+      </p:grpSpPr>
+      <p:sp>
+        <p:nvSpPr>
+          <p:cNvPr id="2" name="幻灯片图像占位符 1">
+            <a:extLst>
+              <a:ext uri="{FF2B5EF4-FFF2-40B4-BE49-F238E27FC236}">
+                <a16:creationId xmlns:a16="http://schemas.microsoft.com/office/drawing/2014/main" id="{6FD56C3F-1651-8565-EB48-D8D78B281E1F}"/>
+              </a:ext>
+            </a:extLst>
+          </p:cNvPr>
+          <p:cNvSpPr>
+            <a:spLocks noGrp="1" noRot="1" noChangeAspect="1"/>
+          </p:cNvSpPr>
+          <p:nvPr>
+            <p:ph type="sldImg"/>
+          </p:nvPr>
+        </p:nvSpPr>
+        <p:spPr/>
+      </p:sp>
+      <p:sp>
+        <p:nvSpPr>
+          <p:cNvPr id="3" name="备注占位符 2">
+            <a:extLst>
+              <a:ext uri="{FF2B5EF4-FFF2-40B4-BE49-F238E27FC236}">
+                <a16:creationId xmlns:a16="http://schemas.microsoft.com/office/drawing/2014/main" id="{7C21F52B-656D-BA5F-698F-470F92AF3707}"/>
+              </a:ext>
+            </a:extLst>
+          </p:cNvPr>
+          <p:cNvSpPr>
+            <a:spLocks noGrp="1"/>
+          </p:cNvSpPr>
+          <p:nvPr>
+            <p:ph type="body" idx="1"/>
+          </p:nvPr>
+        </p:nvSpPr>
+        <p:spPr/>
+        <p:txBody>
+          <a:bodyPr/>
+          <a:lstStyle/>
+          <a:p>
+            <a:r>
+              <a:rPr lang="zh-CN" altLang="zh-CN" sz="1200" b="0" i="0" kern="1200" dirty="0">
+                <a:solidFill>
+                  <a:schemeClr val="tx1"/>
+                </a:solidFill>
+                <a:effectLst/>
+                <a:latin typeface="+mn-lt"/>
+                <a:ea typeface="+mn-ea"/>
+                <a:cs typeface="+mn-cs"/>
+              </a:rPr>
+              <a:t>对于 RC 电容下凹的衰减曲线，这种算法会不可避免地捕捉到一个 0.036 的数学曲率伪影</a:t>
+            </a:r>
+            <a:r>
+              <a:rPr lang="zh-CN" altLang="en-US" sz="1200" b="0" i="0" kern="1200" dirty="0">
+                <a:solidFill>
+                  <a:schemeClr val="tx1"/>
+                </a:solidFill>
+                <a:effectLst/>
+                <a:latin typeface="+mn-lt"/>
+                <a:ea typeface="+mn-ea"/>
+                <a:cs typeface="+mn-cs"/>
+              </a:rPr>
+              <a:t>。</a:t>
+            </a:r>
+            <a:r>
+              <a:rPr lang="zh-CN" altLang="zh-CN" sz="1200" b="0" i="0" kern="1200" dirty="0">
+                <a:solidFill>
+                  <a:schemeClr val="tx1"/>
+                </a:solidFill>
+                <a:effectLst/>
+                <a:latin typeface="+mn-lt"/>
+                <a:ea typeface="+mn-ea"/>
+                <a:cs typeface="+mn-cs"/>
+              </a:rPr>
+              <a:t>HCN 通道加入后跃升至 0.062，是将共振能力</a:t>
+            </a:r>
+            <a:r>
+              <a:rPr lang="zh-CN" altLang="zh-CN" sz="1200" b="1" i="0" kern="1200" dirty="0">
+                <a:solidFill>
+                  <a:schemeClr val="tx1"/>
+                </a:solidFill>
+                <a:effectLst/>
+                <a:latin typeface="+mn-lt"/>
+                <a:ea typeface="+mn-ea"/>
+                <a:cs typeface="+mn-cs"/>
+              </a:rPr>
+              <a:t>绝对翻倍</a:t>
+            </a:r>
+            <a:r>
+              <a:rPr lang="zh-CN" altLang="zh-CN" sz="1200" b="0" i="0" kern="1200" dirty="0">
+                <a:solidFill>
+                  <a:schemeClr val="tx1"/>
+                </a:solidFill>
+                <a:effectLst/>
+                <a:latin typeface="+mn-lt"/>
+                <a:ea typeface="+mn-ea"/>
+                <a:cs typeface="+mn-cs"/>
+              </a:rPr>
+              <a:t>的真实生物学效应。配合非线性的动作电位阈值，这微小的亚阈值放大足以决定神经元是否</a:t>
+            </a:r>
+            <a:r>
+              <a:rPr lang="en-US" altLang="zh-CN" sz="1200" b="0" i="0" kern="1200" dirty="0">
+                <a:solidFill>
+                  <a:schemeClr val="tx1"/>
+                </a:solidFill>
+                <a:effectLst/>
+                <a:latin typeface="+mn-lt"/>
+                <a:ea typeface="+mn-ea"/>
+                <a:cs typeface="+mn-cs"/>
+              </a:rPr>
+              <a:t>fire</a:t>
+            </a:r>
+            <a:r>
+              <a:rPr lang="zh-CN" altLang="en-US" sz="1200" b="0" i="0" kern="1200" dirty="0">
+                <a:solidFill>
+                  <a:schemeClr val="tx1"/>
+                </a:solidFill>
+                <a:effectLst/>
+                <a:latin typeface="+mn-lt"/>
+                <a:ea typeface="+mn-ea"/>
+                <a:cs typeface="+mn-cs"/>
+              </a:rPr>
+              <a:t>。</a:t>
+            </a:r>
+            <a:endParaRPr lang="zh-CN" altLang="en-US" dirty="0"/>
+          </a:p>
+        </p:txBody>
+      </p:sp>
+      <p:sp>
+        <p:nvSpPr>
+          <p:cNvPr id="4" name="灯片编号占位符 3">
+            <a:extLst>
+              <a:ext uri="{FF2B5EF4-FFF2-40B4-BE49-F238E27FC236}">
+                <a16:creationId xmlns:a16="http://schemas.microsoft.com/office/drawing/2014/main" id="{2B008DC8-032D-7035-9BB1-1AD3525834C0}"/>
+              </a:ext>
+            </a:extLst>
+          </p:cNvPr>
+          <p:cNvSpPr>
+            <a:spLocks noGrp="1"/>
+          </p:cNvSpPr>
+          <p:nvPr>
+            <p:ph type="sldNum" sz="quarter" idx="5"/>
+          </p:nvPr>
+        </p:nvSpPr>
+        <p:spPr/>
+        <p:txBody>
+          <a:bodyPr/>
+          <a:lstStyle/>
+          <a:p>
+            <a:fld id="{46D80658-9F01-48E8-A529-84FBF04BFF31}" type="slidenum">
+              <a:rPr lang="zh-CN" altLang="en-US" smtClean="0"/>
+              <a:t>11</a:t>
+            </a:fld>
+            <a:endParaRPr lang="zh-CN" altLang="en-US"/>
+          </a:p>
+        </p:txBody>
+      </p:sp>
+    </p:spTree>
+    <p:extLst>
+      <p:ext uri="{BB962C8B-B14F-4D97-AF65-F5344CB8AC3E}">
+        <p14:creationId xmlns:p14="http://schemas.microsoft.com/office/powerpoint/2010/main" val="1812474687"/>
+      </p:ext>
+    </p:extLst>
+  </p:cSld>
+  <p:clrMapOvr>
+    <a:masterClrMapping/>
+  </p:clrMapOvr>
+</p:notes>
+</file>
+
+<file path=ppt/notesSlides/notesSlide11.xml><?xml version="1.0" encoding="utf-8"?>
 <p:notes xmlns:a="http://schemas.openxmlformats.org/drawingml/2006/main" xmlns:r="http://schemas.openxmlformats.org/officeDocument/2006/relationships" xmlns:p="http://schemas.openxmlformats.org/presentationml/2006/main">
   <p:cSld>
     <p:spTree>
@@ -764,252 +799,41 @@
           <a:lstStyle/>
           <a:p>
             <a:r>
-              <a:rPr lang="zh-CN" altLang="en-US" sz="1200" b="0" i="0" kern="1200" dirty="0">
-                <a:solidFill>
-                  <a:schemeClr val="tx1"/>
-                </a:solidFill>
-                <a:effectLst/>
-                <a:latin typeface="+mn-lt"/>
-                <a:ea typeface="+mn-ea"/>
-                <a:cs typeface="+mn-cs"/>
-              </a:rPr>
-              <a:t>这两张图很类似</a:t>
-            </a:r>
-            <a:r>
-              <a:rPr lang="en-US" altLang="zh-CN" sz="1200" b="0" i="0" kern="1200" dirty="0">
-                <a:solidFill>
-                  <a:schemeClr val="tx1"/>
-                </a:solidFill>
-                <a:effectLst/>
-                <a:latin typeface="+mn-lt"/>
-                <a:ea typeface="+mn-ea"/>
-                <a:cs typeface="+mn-cs"/>
-              </a:rPr>
-              <a:t>slide4</a:t>
-            </a:r>
-            <a:r>
-              <a:rPr lang="zh-CN" altLang="en-US" sz="1200" b="0" i="0" kern="1200" dirty="0">
-                <a:solidFill>
-                  <a:schemeClr val="tx1"/>
-                </a:solidFill>
-                <a:effectLst/>
-                <a:latin typeface="+mn-lt"/>
-                <a:ea typeface="+mn-ea"/>
-                <a:cs typeface="+mn-cs"/>
-              </a:rPr>
-              <a:t>的两张图。</a:t>
-            </a:r>
-            <a:endParaRPr lang="en-US" altLang="zh-CN" sz="1200" b="0" i="0" kern="1200" dirty="0">
-              <a:solidFill>
-                <a:schemeClr val="tx1"/>
-              </a:solidFill>
-              <a:effectLst/>
-              <a:latin typeface="+mn-lt"/>
-              <a:ea typeface="+mn-ea"/>
-              <a:cs typeface="+mn-cs"/>
-            </a:endParaRPr>
-          </a:p>
-          <a:p>
-            <a:r>
-              <a:rPr lang="zh-CN" altLang="zh-CN" sz="1200" b="0" i="0" kern="1200" dirty="0">
-                <a:solidFill>
-                  <a:schemeClr val="tx1"/>
-                </a:solidFill>
-                <a:effectLst/>
-                <a:latin typeface="+mn-lt"/>
-                <a:ea typeface="+mn-ea"/>
-                <a:cs typeface="+mn-cs"/>
-              </a:rPr>
-              <a:t>科学家提取了患病婴儿的 HCN1 突变基因（如图中的 M153I，代表第 153 位的蛋氨酸突变为了异亮氨酸），并把它导入到**体外培养的细胞（如 CHO 细胞或 HEK293 细胞）**中表达。</a:t>
-            </a:r>
-            <a:r>
-              <a:rPr lang="zh-CN" altLang="en-US" sz="1200" b="0" i="0" kern="1200" dirty="0">
-                <a:solidFill>
-                  <a:schemeClr val="tx1"/>
-                </a:solidFill>
-                <a:effectLst/>
-                <a:latin typeface="+mn-lt"/>
-                <a:ea typeface="+mn-ea"/>
-                <a:cs typeface="+mn-cs"/>
-              </a:rPr>
-              <a:t>两张图片</a:t>
-            </a:r>
-            <a:r>
-              <a:rPr lang="zh-CN" altLang="zh-CN" sz="1200" b="0" i="0" kern="1200" dirty="0">
-                <a:solidFill>
-                  <a:schemeClr val="tx1"/>
-                </a:solidFill>
-                <a:effectLst/>
-                <a:latin typeface="+mn-lt"/>
-                <a:ea typeface="+mn-ea"/>
-                <a:cs typeface="+mn-cs"/>
-              </a:rPr>
-              <a:t>来自体外细胞的</a:t>
-            </a:r>
-            <a:r>
-              <a:rPr lang="zh-CN" altLang="zh-CN" sz="1200" b="1" i="0" kern="1200" dirty="0">
-                <a:solidFill>
-                  <a:schemeClr val="tx1"/>
-                </a:solidFill>
-                <a:effectLst/>
-                <a:latin typeface="+mn-lt"/>
-                <a:ea typeface="+mn-ea"/>
-                <a:cs typeface="+mn-cs"/>
-              </a:rPr>
-              <a:t>膜片钳实验</a:t>
-            </a:r>
-            <a:r>
-              <a:rPr lang="zh-CN" altLang="zh-CN" sz="1200" b="0" i="0" kern="1200" dirty="0">
-                <a:solidFill>
-                  <a:schemeClr val="tx1"/>
-                </a:solidFill>
-                <a:effectLst/>
-                <a:latin typeface="+mn-lt"/>
-                <a:ea typeface="+mn-ea"/>
-                <a:cs typeface="+mn-cs"/>
-              </a:rPr>
-              <a:t>记录，对比了正常人（黑线）和患病婴儿的 HCN1 通道特性。</a:t>
-            </a:r>
-            <a:r>
               <a:rPr lang="zh-CN" altLang="en-US" dirty="0"/>
-              <a:t>比较明显的是橙红色的，它的激活电压变得很大，约向右平移了</a:t>
+              <a:t>抛出问题：当把静息电位调整到</a:t>
             </a:r>
             <a:r>
               <a:rPr lang="en-US" altLang="zh-CN" dirty="0"/>
-              <a:t>40mV</a:t>
+              <a:t>-65mV,</a:t>
             </a:r>
             <a:r>
               <a:rPr lang="zh-CN" altLang="en-US" dirty="0"/>
-              <a:t>，</a:t>
-            </a:r>
-            <a:r>
-              <a:rPr lang="zh-CN" altLang="zh-CN" sz="1200" b="0" i="0" kern="1200" dirty="0">
-                <a:solidFill>
-                  <a:schemeClr val="tx1"/>
-                </a:solidFill>
-                <a:effectLst/>
-                <a:latin typeface="+mn-lt"/>
-                <a:ea typeface="+mn-ea"/>
-                <a:cs typeface="+mn-cs"/>
-              </a:rPr>
-              <a:t>在 -75mV 时，突变通道已经处于接近 100% 开启的</a:t>
-            </a:r>
-            <a:r>
-              <a:rPr lang="zh-CN" altLang="zh-CN" sz="1200" b="1" i="0" kern="1200" dirty="0">
-                <a:solidFill>
-                  <a:schemeClr val="tx1"/>
-                </a:solidFill>
-                <a:effectLst/>
-                <a:latin typeface="+mn-lt"/>
-                <a:ea typeface="+mn-ea"/>
-                <a:cs typeface="+mn-cs"/>
-              </a:rPr>
-              <a:t>饱和死区（红线顶部）</a:t>
-            </a:r>
-            <a:r>
-              <a:rPr lang="zh-CN" altLang="en-US" sz="1200" b="0" i="0" kern="1200" dirty="0">
-                <a:solidFill>
-                  <a:schemeClr val="tx1"/>
-                </a:solidFill>
-                <a:effectLst/>
-                <a:latin typeface="+mn-lt"/>
-                <a:ea typeface="+mn-ea"/>
-                <a:cs typeface="+mn-cs"/>
-              </a:rPr>
-              <a:t>，</a:t>
-            </a:r>
-            <a:r>
-              <a:rPr lang="zh-CN" altLang="zh-CN" sz="1200" b="0" i="0" kern="1200" dirty="0">
-                <a:solidFill>
-                  <a:schemeClr val="tx1"/>
-                </a:solidFill>
-                <a:effectLst/>
-                <a:latin typeface="+mn-lt"/>
-                <a:ea typeface="+mn-ea"/>
-                <a:cs typeface="+mn-cs"/>
-              </a:rPr>
-              <a:t>斜率变成了零，动态调谐能力彻底丧失</a:t>
-            </a:r>
-            <a:r>
-              <a:rPr lang="zh-CN" altLang="en-US" sz="1200" b="0" i="0" kern="1200" dirty="0">
-                <a:solidFill>
-                  <a:schemeClr val="tx1"/>
-                </a:solidFill>
-                <a:effectLst/>
-                <a:latin typeface="+mn-lt"/>
-                <a:ea typeface="+mn-ea"/>
-                <a:cs typeface="+mn-cs"/>
-              </a:rPr>
-              <a:t>。</a:t>
+              <a:t>神奇的事情发生了，</a:t>
+            </a:r>
+            <a:r>
+              <a:rPr lang="en-US" altLang="zh-CN" dirty="0" err="1"/>
+              <a:t>hh</a:t>
             </a:r>
             <a:r>
               <a:rPr lang="zh-CN" altLang="en-US" dirty="0"/>
-              <a:t>同时它的激活时间常数也显著低于正常组，</a:t>
-            </a:r>
-            <a:r>
-              <a:rPr lang="zh-CN" altLang="zh-CN" sz="1200" b="0" i="0" kern="1200" dirty="0">
-                <a:solidFill>
-                  <a:schemeClr val="tx1"/>
-                </a:solidFill>
-                <a:effectLst/>
-                <a:latin typeface="+mn-lt"/>
-                <a:ea typeface="+mn-ea"/>
-                <a:cs typeface="+mn-cs"/>
-              </a:rPr>
-              <a:t>它失去了正常通道‘缓慢负反馈’的减震特性。</a:t>
-            </a:r>
-            <a:r>
-              <a:rPr lang="zh-CN" altLang="zh-CN" sz="1200" b="1" i="0" kern="1200" dirty="0">
-                <a:solidFill>
-                  <a:schemeClr val="tx1"/>
-                </a:solidFill>
-                <a:effectLst/>
-                <a:latin typeface="+mn-lt"/>
-                <a:ea typeface="+mn-ea"/>
-                <a:cs typeface="+mn-cs"/>
-              </a:rPr>
-              <a:t>总结来说：</a:t>
-            </a:r>
-            <a:r>
-              <a:rPr lang="zh-CN" altLang="zh-CN" sz="1200" b="0" i="0" kern="1200" dirty="0">
-                <a:solidFill>
-                  <a:schemeClr val="tx1"/>
-                </a:solidFill>
-                <a:effectLst/>
-                <a:latin typeface="+mn-lt"/>
-                <a:ea typeface="+mn-ea"/>
-                <a:cs typeface="+mn-cs"/>
-              </a:rPr>
-              <a:t> 这种突变既让通道失去了敏感的‘频率调谐能力’，又产生了巨大的持续漏电流，导致神经元极度兴奋</a:t>
-            </a:r>
-            <a:r>
-              <a:rPr lang="zh-CN" altLang="en-US" sz="1200" b="0" i="0" kern="1200" dirty="0">
-                <a:solidFill>
-                  <a:schemeClr val="tx1"/>
-                </a:solidFill>
-                <a:effectLst/>
-                <a:latin typeface="+mn-lt"/>
-                <a:ea typeface="+mn-ea"/>
-                <a:cs typeface="+mn-cs"/>
-              </a:rPr>
-              <a:t>，</a:t>
-            </a:r>
-            <a:r>
-              <a:rPr lang="zh-CN" altLang="zh-CN" sz="1200" b="0" i="0" kern="1200" dirty="0">
-                <a:solidFill>
-                  <a:schemeClr val="tx1"/>
-                </a:solidFill>
-                <a:effectLst/>
-                <a:latin typeface="+mn-lt"/>
-                <a:ea typeface="+mn-ea"/>
-                <a:cs typeface="+mn-cs"/>
-              </a:rPr>
-              <a:t>这就是导致婴儿爆发严重癫痫的底层细胞级机制。</a:t>
-            </a:r>
-            <a:endParaRPr lang="zh-CN" altLang="en-US" dirty="0"/>
-          </a:p>
-          <a:p>
-            <a:endParaRPr lang="zh-CN" altLang="en-US" dirty="0"/>
+              <a:t>模型也出现了类似的共振峰，并且对应频率与加了</a:t>
+            </a:r>
+            <a:r>
+              <a:rPr lang="en-US" altLang="zh-CN" dirty="0" err="1"/>
+              <a:t>hcn</a:t>
+            </a:r>
+            <a:r>
+              <a:rPr lang="zh-CN" altLang="en-US" dirty="0"/>
+              <a:t>的几乎一样，增大到了约</a:t>
+            </a:r>
+            <a:r>
+              <a:rPr lang="en-US" altLang="zh-CN" dirty="0"/>
+              <a:t>25Hz</a:t>
+            </a:r>
+            <a:r>
+              <a:rPr lang="zh-CN" altLang="en-US" dirty="0"/>
+              <a:t>，这是为什么？</a:t>
+            </a:r>
           </a:p>
         </p:txBody>
       </p:sp>
@@ -1030,1166 +854,7 @@
           <a:p>
             <a:fld id="{46D80658-9F01-48E8-A529-84FBF04BFF31}" type="slidenum">
               <a:rPr lang="zh-CN" altLang="en-US" smtClean="0"/>
-              <a:t>11</a:t>
-            </a:fld>
-            <a:endParaRPr lang="zh-CN" altLang="en-US"/>
-          </a:p>
-        </p:txBody>
-      </p:sp>
-    </p:spTree>
-    <p:extLst>
-      <p:ext uri="{BB962C8B-B14F-4D97-AF65-F5344CB8AC3E}">
-        <p14:creationId xmlns:p14="http://schemas.microsoft.com/office/powerpoint/2010/main" val="256223227"/>
-      </p:ext>
-    </p:extLst>
-  </p:cSld>
-  <p:clrMapOvr>
-    <a:masterClrMapping/>
-  </p:clrMapOvr>
-</p:notes>
-</file>
-
-<file path=ppt/notesSlides/notesSlide2.xml><?xml version="1.0" encoding="utf-8"?>
-<p:notes xmlns:a="http://schemas.openxmlformats.org/drawingml/2006/main" xmlns:r="http://schemas.openxmlformats.org/officeDocument/2006/relationships" xmlns:p="http://schemas.openxmlformats.org/presentationml/2006/main">
-  <p:cSld>
-    <p:spTree>
-      <p:nvGrpSpPr>
-        <p:cNvPr id="1" name=""/>
-        <p:cNvGrpSpPr/>
-        <p:nvPr/>
-      </p:nvGrpSpPr>
-      <p:grpSpPr>
-        <a:xfrm>
-          <a:off x="0" y="0"/>
-          <a:ext cx="0" cy="0"/>
-          <a:chOff x="0" y="0"/>
-          <a:chExt cx="0" cy="0"/>
-        </a:xfrm>
-      </p:grpSpPr>
-      <p:sp>
-        <p:nvSpPr>
-          <p:cNvPr id="2" name="幻灯片图像占位符 1"/>
-          <p:cNvSpPr>
-            <a:spLocks noGrp="1" noRot="1" noChangeAspect="1"/>
-          </p:cNvSpPr>
-          <p:nvPr>
-            <p:ph type="sldImg"/>
-          </p:nvPr>
-        </p:nvSpPr>
-        <p:spPr/>
-      </p:sp>
-      <p:sp>
-        <p:nvSpPr>
-          <p:cNvPr id="3" name="备注占位符 2"/>
-          <p:cNvSpPr>
-            <a:spLocks noGrp="1"/>
-          </p:cNvSpPr>
-          <p:nvPr>
-            <p:ph type="body" idx="1"/>
-          </p:nvPr>
-        </p:nvSpPr>
-        <p:spPr/>
-        <p:txBody>
-          <a:bodyPr/>
-          <a:lstStyle/>
-          <a:p>
-            <a:r>
-              <a:rPr lang="zh-CN" altLang="zh-CN" sz="1200" b="0" i="0" kern="1200" dirty="0">
-                <a:solidFill>
-                  <a:schemeClr val="tx1"/>
-                </a:solidFill>
-                <a:effectLst/>
-                <a:latin typeface="+mn-lt"/>
-                <a:ea typeface="+mn-ea"/>
-                <a:cs typeface="+mn-cs"/>
-              </a:rPr>
-              <a:t> 大脑中充满了像 Theta 波、Gamma 波这样的特定节律。如果神经元只是被动衰减的低通滤波器，它就像一台没有调台功能的收音机。为了在充斥着噪音的突触输入中‘听’到特定的频道，神经元膜上必须存在某种主动的带通滤波机制。</a:t>
-            </a:r>
-            <a:r>
-              <a:rPr lang="zh-CN" altLang="en-US" sz="1200" b="0" i="0" kern="1200" dirty="0">
-                <a:solidFill>
-                  <a:schemeClr val="tx1"/>
-                </a:solidFill>
-                <a:effectLst/>
-                <a:latin typeface="+mn-lt"/>
-                <a:ea typeface="+mn-ea"/>
-                <a:cs typeface="+mn-cs"/>
-              </a:rPr>
-              <a:t>我们的工作涉及</a:t>
-            </a:r>
-            <a:r>
-              <a:rPr lang="en-US" altLang="zh-CN" sz="1200" b="0" i="0" kern="1200" dirty="0">
-                <a:solidFill>
-                  <a:schemeClr val="tx1"/>
-                </a:solidFill>
-                <a:effectLst/>
-                <a:latin typeface="+mn-lt"/>
-                <a:ea typeface="+mn-ea"/>
-                <a:cs typeface="+mn-cs"/>
-              </a:rPr>
-              <a:t>theta</a:t>
-            </a:r>
-            <a:r>
-              <a:rPr lang="zh-CN" altLang="en-US" sz="1200" b="0" i="0" kern="1200" dirty="0">
-                <a:solidFill>
-                  <a:schemeClr val="tx1"/>
-                </a:solidFill>
-                <a:effectLst/>
-                <a:latin typeface="+mn-lt"/>
-                <a:ea typeface="+mn-ea"/>
-                <a:cs typeface="+mn-cs"/>
-              </a:rPr>
-              <a:t>和</a:t>
-            </a:r>
-            <a:r>
-              <a:rPr lang="en-US" altLang="zh-CN" sz="1200" b="0" i="0" kern="1200" dirty="0">
-                <a:solidFill>
-                  <a:schemeClr val="tx1"/>
-                </a:solidFill>
-                <a:effectLst/>
-                <a:latin typeface="+mn-lt"/>
-                <a:ea typeface="+mn-ea"/>
-                <a:cs typeface="+mn-cs"/>
-              </a:rPr>
-              <a:t>beta/gamma</a:t>
-            </a:r>
-            <a:r>
-              <a:rPr lang="zh-CN" altLang="en-US" sz="1200" b="0" i="0" kern="1200" dirty="0">
-                <a:solidFill>
-                  <a:schemeClr val="tx1"/>
-                </a:solidFill>
-                <a:effectLst/>
-                <a:latin typeface="+mn-lt"/>
-                <a:ea typeface="+mn-ea"/>
-                <a:cs typeface="+mn-cs"/>
-              </a:rPr>
-              <a:t>：</a:t>
-            </a:r>
-            <a:r>
-              <a:rPr lang="zh-CN" altLang="zh-CN" sz="1200" b="0" i="0" kern="1200" dirty="0">
-                <a:solidFill>
-                  <a:schemeClr val="tx1"/>
-                </a:solidFill>
-                <a:effectLst/>
-                <a:latin typeface="+mn-lt"/>
-                <a:ea typeface="+mn-ea"/>
-                <a:cs typeface="+mn-cs"/>
-              </a:rPr>
-              <a:t>Theta波又被称为 “</a:t>
-            </a:r>
-            <a:r>
-              <a:rPr lang="zh-CN" altLang="zh-CN" sz="1200" b="1" i="0" kern="1200" dirty="0">
-                <a:solidFill>
-                  <a:schemeClr val="tx1"/>
-                </a:solidFill>
-                <a:effectLst/>
-                <a:latin typeface="+mn-lt"/>
-                <a:ea typeface="+mn-ea"/>
-                <a:cs typeface="+mn-cs"/>
-              </a:rPr>
-              <a:t>受暗示波</a:t>
-            </a:r>
-            <a:r>
-              <a:rPr lang="zh-CN" altLang="zh-CN" sz="1200" b="0" i="0" kern="1200" dirty="0">
-                <a:solidFill>
-                  <a:schemeClr val="tx1"/>
-                </a:solidFill>
-                <a:effectLst/>
-                <a:latin typeface="+mn-lt"/>
-                <a:ea typeface="+mn-ea"/>
-                <a:cs typeface="+mn-cs"/>
-              </a:rPr>
-              <a:t>”，因为它普遍存在于人们</a:t>
-            </a:r>
-            <a:r>
-              <a:rPr lang="zh-CN" altLang="zh-CN" sz="1200" b="1" i="0" kern="1200" dirty="0">
-                <a:solidFill>
-                  <a:schemeClr val="tx1"/>
-                </a:solidFill>
-                <a:effectLst/>
-                <a:latin typeface="+mn-lt"/>
-                <a:ea typeface="+mn-ea"/>
-                <a:cs typeface="+mn-cs"/>
-              </a:rPr>
-              <a:t>精神恍惚或者是催眠状态</a:t>
-            </a:r>
-            <a:r>
-              <a:rPr lang="zh-CN" altLang="zh-CN" sz="1200" b="0" i="0" kern="1200" dirty="0">
-                <a:solidFill>
-                  <a:schemeClr val="tx1"/>
-                </a:solidFill>
-                <a:effectLst/>
-                <a:latin typeface="+mn-lt"/>
-                <a:ea typeface="+mn-ea"/>
-                <a:cs typeface="+mn-cs"/>
-              </a:rPr>
-              <a:t>。而在这种状态下，大脑的Theta波是</a:t>
-            </a:r>
-            <a:r>
-              <a:rPr lang="zh-CN" altLang="zh-CN" sz="1200" b="1" i="0" kern="1200" dirty="0">
-                <a:solidFill>
-                  <a:schemeClr val="tx1"/>
-                </a:solidFill>
-                <a:effectLst/>
-                <a:latin typeface="+mn-lt"/>
-                <a:ea typeface="+mn-ea"/>
-                <a:cs typeface="+mn-cs"/>
-              </a:rPr>
-              <a:t>最佳的</a:t>
-            </a:r>
-            <a:r>
-              <a:rPr lang="zh-CN" altLang="zh-CN" sz="1200" b="0" i="0" kern="1200" dirty="0">
-                <a:solidFill>
-                  <a:schemeClr val="tx1"/>
-                </a:solidFill>
-                <a:effectLst/>
-                <a:latin typeface="+mn-lt"/>
-                <a:ea typeface="+mn-ea"/>
-                <a:cs typeface="+mn-cs"/>
-              </a:rPr>
-              <a:t>，它更方便病人接受催眠和相关的治疗。因为Theta波通常在你</a:t>
-            </a:r>
-            <a:r>
-              <a:rPr lang="zh-CN" altLang="zh-CN" sz="1200" b="1" i="0" kern="1200" dirty="0">
-                <a:solidFill>
-                  <a:schemeClr val="tx1"/>
-                </a:solidFill>
-                <a:effectLst/>
-                <a:latin typeface="+mn-lt"/>
-                <a:ea typeface="+mn-ea"/>
-                <a:cs typeface="+mn-cs"/>
-              </a:rPr>
-              <a:t>做白日梦或将要入睡时出现</a:t>
-            </a:r>
-            <a:r>
-              <a:rPr lang="zh-CN" altLang="zh-CN" sz="1200" b="0" i="0" kern="1200" dirty="0">
-                <a:solidFill>
-                  <a:schemeClr val="tx1"/>
-                </a:solidFill>
-                <a:effectLst/>
-                <a:latin typeface="+mn-lt"/>
-                <a:ea typeface="+mn-ea"/>
-                <a:cs typeface="+mn-cs"/>
-              </a:rPr>
-              <a:t>。Beta波是人们在清醒中最常见的高频波。它在</a:t>
-            </a:r>
-            <a:r>
-              <a:rPr lang="zh-CN" altLang="zh-CN" sz="1200" b="1" i="0" kern="1200" dirty="0">
-                <a:solidFill>
-                  <a:schemeClr val="tx1"/>
-                </a:solidFill>
-                <a:effectLst/>
-                <a:latin typeface="+mn-lt"/>
-                <a:ea typeface="+mn-ea"/>
-                <a:cs typeface="+mn-cs"/>
-              </a:rPr>
-              <a:t>认知推理、计算、阅读、沟通以及思考</a:t>
-            </a:r>
-            <a:r>
-              <a:rPr lang="zh-CN" altLang="zh-CN" sz="1200" b="0" i="0" kern="1200" dirty="0">
-                <a:solidFill>
-                  <a:schemeClr val="tx1"/>
-                </a:solidFill>
-                <a:effectLst/>
-                <a:latin typeface="+mn-lt"/>
-                <a:ea typeface="+mn-ea"/>
-                <a:cs typeface="+mn-cs"/>
-              </a:rPr>
-              <a:t>等有意识的状态下会帮助人们做出完美的</a:t>
-            </a:r>
-            <a:r>
-              <a:rPr lang="zh-CN" altLang="en-US" sz="1200" b="0" i="0" kern="1200" dirty="0">
-                <a:solidFill>
-                  <a:schemeClr val="tx1"/>
-                </a:solidFill>
-                <a:effectLst/>
-                <a:latin typeface="+mn-lt"/>
-                <a:ea typeface="+mn-ea"/>
-                <a:cs typeface="+mn-cs"/>
-              </a:rPr>
-              <a:t>响应</a:t>
-            </a:r>
-            <a:r>
-              <a:rPr lang="zh-CN" altLang="zh-CN" sz="1200" b="0" i="0" kern="1200" dirty="0">
-                <a:solidFill>
-                  <a:schemeClr val="tx1"/>
-                </a:solidFill>
-                <a:effectLst/>
-                <a:latin typeface="+mn-lt"/>
-                <a:ea typeface="+mn-ea"/>
-                <a:cs typeface="+mn-cs"/>
-              </a:rPr>
-              <a:t>。</a:t>
-            </a:r>
-            <a:endParaRPr lang="zh-CN" altLang="en-US" dirty="0"/>
-          </a:p>
-        </p:txBody>
-      </p:sp>
-      <p:sp>
-        <p:nvSpPr>
-          <p:cNvPr id="4" name="灯片编号占位符 3"/>
-          <p:cNvSpPr>
-            <a:spLocks noGrp="1"/>
-          </p:cNvSpPr>
-          <p:nvPr>
-            <p:ph type="sldNum" sz="quarter" idx="5"/>
-          </p:nvPr>
-        </p:nvSpPr>
-        <p:spPr/>
-        <p:txBody>
-          <a:bodyPr/>
-          <a:lstStyle/>
-          <a:p>
-            <a:fld id="{46D80658-9F01-48E8-A529-84FBF04BFF31}" type="slidenum">
-              <a:rPr lang="zh-CN" altLang="en-US" smtClean="0"/>
-              <a:t>3</a:t>
-            </a:fld>
-            <a:endParaRPr lang="zh-CN" altLang="en-US"/>
-          </a:p>
-        </p:txBody>
-      </p:sp>
-    </p:spTree>
-    <p:extLst>
-      <p:ext uri="{BB962C8B-B14F-4D97-AF65-F5344CB8AC3E}">
-        <p14:creationId xmlns:p14="http://schemas.microsoft.com/office/powerpoint/2010/main" val="1677289396"/>
-      </p:ext>
-    </p:extLst>
-  </p:cSld>
-  <p:clrMapOvr>
-    <a:masterClrMapping/>
-  </p:clrMapOvr>
-</p:notes>
-</file>
-
-<file path=ppt/notesSlides/notesSlide3.xml><?xml version="1.0" encoding="utf-8"?>
-<p:notes xmlns:a="http://schemas.openxmlformats.org/drawingml/2006/main" xmlns:r="http://schemas.openxmlformats.org/officeDocument/2006/relationships" xmlns:p="http://schemas.openxmlformats.org/presentationml/2006/main">
-  <p:cSld>
-    <p:spTree>
-      <p:nvGrpSpPr>
-        <p:cNvPr id="1" name=""/>
-        <p:cNvGrpSpPr/>
-        <p:nvPr/>
-      </p:nvGrpSpPr>
-      <p:grpSpPr>
-        <a:xfrm>
-          <a:off x="0" y="0"/>
-          <a:ext cx="0" cy="0"/>
-          <a:chOff x="0" y="0"/>
-          <a:chExt cx="0" cy="0"/>
-        </a:xfrm>
-      </p:grpSpPr>
-      <p:sp>
-        <p:nvSpPr>
-          <p:cNvPr id="2" name="幻灯片图像占位符 1"/>
-          <p:cNvSpPr>
-            <a:spLocks noGrp="1" noRot="1" noChangeAspect="1"/>
-          </p:cNvSpPr>
-          <p:nvPr>
-            <p:ph type="sldImg"/>
-          </p:nvPr>
-        </p:nvSpPr>
-        <p:spPr/>
-      </p:sp>
-      <p:sp>
-        <p:nvSpPr>
-          <p:cNvPr id="3" name="备注占位符 2"/>
-          <p:cNvSpPr>
-            <a:spLocks noGrp="1"/>
-          </p:cNvSpPr>
-          <p:nvPr>
-            <p:ph type="body" idx="1"/>
-          </p:nvPr>
-        </p:nvSpPr>
-        <p:spPr/>
-        <p:txBody>
-          <a:bodyPr/>
-          <a:lstStyle/>
-          <a:p>
-            <a:r>
-              <a:rPr lang="zh-CN" altLang="zh-CN" sz="1200" b="1" i="0" kern="1200" dirty="0">
-                <a:solidFill>
-                  <a:schemeClr val="tx1"/>
-                </a:solidFill>
-                <a:effectLst/>
-                <a:latin typeface="+mn-lt"/>
-                <a:ea typeface="+mn-ea"/>
-                <a:cs typeface="+mn-cs"/>
-              </a:rPr>
-              <a:t>反常的激活条件：</a:t>
-            </a:r>
-            <a:r>
-              <a:rPr lang="zh-CN" altLang="zh-CN" sz="1200" b="0" i="0" kern="1200" dirty="0">
-                <a:solidFill>
-                  <a:schemeClr val="tx1"/>
-                </a:solidFill>
-                <a:effectLst/>
-                <a:latin typeface="+mn-lt"/>
-                <a:ea typeface="+mn-ea"/>
-                <a:cs typeface="+mn-cs"/>
-              </a:rPr>
-              <a:t> 去极化关闭，超极化（越负）越激活。</a:t>
-            </a:r>
-          </a:p>
-          <a:p>
-            <a:r>
-              <a:rPr lang="zh-CN" altLang="zh-CN" sz="1200" b="1" i="0" kern="1200" dirty="0">
-                <a:solidFill>
-                  <a:schemeClr val="tx1"/>
-                </a:solidFill>
-                <a:effectLst/>
-                <a:latin typeface="+mn-lt"/>
-                <a:ea typeface="+mn-ea"/>
-                <a:cs typeface="+mn-cs"/>
-              </a:rPr>
-              <a:t>缓慢的动力学：</a:t>
-            </a:r>
-            <a:r>
-              <a:rPr lang="zh-CN" altLang="zh-CN" sz="1200" b="0" i="0" kern="1200" dirty="0">
-                <a:solidFill>
-                  <a:schemeClr val="tx1"/>
-                </a:solidFill>
-                <a:effectLst/>
-                <a:latin typeface="+mn-lt"/>
-                <a:ea typeface="+mn-ea"/>
-                <a:cs typeface="+mn-cs"/>
-              </a:rPr>
-              <a:t> 它的开关极其缓慢，这相当于在等效电路中引入了一个“感抗（Inductance）”。</a:t>
-            </a:r>
-            <a:endParaRPr lang="en-US" altLang="zh-CN" sz="1200" b="0" i="0" kern="1200" dirty="0">
-              <a:solidFill>
-                <a:schemeClr val="tx1"/>
-              </a:solidFill>
-              <a:effectLst/>
-              <a:latin typeface="+mn-lt"/>
-              <a:ea typeface="+mn-ea"/>
-              <a:cs typeface="+mn-cs"/>
-            </a:endParaRPr>
-          </a:p>
-          <a:p>
-            <a:r>
-              <a:rPr lang="zh-CN" altLang="zh-CN" sz="1200" b="0" i="0" kern="1200" dirty="0">
-                <a:solidFill>
-                  <a:schemeClr val="tx1"/>
-                </a:solidFill>
-                <a:effectLst/>
-                <a:latin typeface="+mn-lt"/>
-                <a:ea typeface="+mn-ea"/>
-                <a:cs typeface="+mn-cs"/>
-              </a:rPr>
-              <a:t>当膜电位</a:t>
-            </a:r>
-            <a:r>
-              <a:rPr lang="zh-CN" altLang="zh-CN" sz="1200" b="1" i="0" kern="1200" dirty="0">
-                <a:solidFill>
-                  <a:schemeClr val="tx1"/>
-                </a:solidFill>
-                <a:effectLst/>
-                <a:latin typeface="+mn-lt"/>
-                <a:ea typeface="+mn-ea"/>
-                <a:cs typeface="+mn-cs"/>
-              </a:rPr>
-              <a:t>超极化</a:t>
-            </a:r>
-            <a:r>
-              <a:rPr lang="zh-CN" altLang="zh-CN" sz="1200" b="0" i="0" kern="1200" dirty="0">
-                <a:solidFill>
-                  <a:schemeClr val="tx1"/>
-                </a:solidFill>
-                <a:effectLst/>
-                <a:latin typeface="+mn-lt"/>
-                <a:ea typeface="+mn-ea"/>
-                <a:cs typeface="+mn-cs"/>
-              </a:rPr>
-              <a:t>（比静息更负，如 -75 mV 或更低）时，HCN 通道打开，允许 Na⁺ 和 K⁺ 流过，这就是 Ih 电流</a:t>
-            </a:r>
-            <a:r>
-              <a:rPr lang="zh-CN" altLang="en-US" sz="1200" b="0" i="0" kern="1200" dirty="0">
-                <a:solidFill>
-                  <a:schemeClr val="tx1"/>
-                </a:solidFill>
-                <a:effectLst/>
-                <a:latin typeface="+mn-lt"/>
-                <a:ea typeface="+mn-ea"/>
-                <a:cs typeface="+mn-cs"/>
-              </a:rPr>
-              <a:t>，</a:t>
-            </a:r>
-            <a:r>
-              <a:rPr lang="zh-CN" altLang="zh-CN" sz="1200" b="0" i="0" kern="1200" dirty="0">
-                <a:solidFill>
-                  <a:schemeClr val="tx1"/>
-                </a:solidFill>
-                <a:effectLst/>
-                <a:latin typeface="+mn-lt"/>
-                <a:ea typeface="+mn-ea"/>
-                <a:cs typeface="+mn-cs"/>
-              </a:rPr>
-              <a:t>超极化激活的阳离子电流</a:t>
-            </a:r>
-            <a:r>
-              <a:rPr lang="zh-CN" altLang="en-US" sz="1200" b="0" i="0" kern="1200" dirty="0">
-                <a:solidFill>
-                  <a:schemeClr val="tx1"/>
-                </a:solidFill>
-                <a:effectLst/>
-                <a:latin typeface="+mn-lt"/>
-                <a:ea typeface="+mn-ea"/>
-                <a:cs typeface="+mn-cs"/>
-              </a:rPr>
-              <a:t>。</a:t>
-            </a:r>
-            <a:r>
-              <a:rPr lang="zh-CN" altLang="zh-CN" sz="1200" b="0" i="0" kern="1200" dirty="0">
-                <a:solidFill>
-                  <a:schemeClr val="tx1"/>
-                </a:solidFill>
-                <a:effectLst/>
-                <a:latin typeface="+mn-lt"/>
-                <a:ea typeface="+mn-ea"/>
-                <a:cs typeface="+mn-cs"/>
-              </a:rPr>
-              <a:t>Ih 是一个缓慢的内向电流，它让膜电位在超极化后缓慢回升，像弹簧一样往回拉。正是这个特性，让神经元能在 Theta 频段产生共振，赋予膜电位“节律弹性”。</a:t>
-            </a:r>
-          </a:p>
-          <a:p>
-            <a:endParaRPr lang="zh-CN" altLang="en-US" dirty="0"/>
-          </a:p>
-        </p:txBody>
-      </p:sp>
-      <p:sp>
-        <p:nvSpPr>
-          <p:cNvPr id="4" name="灯片编号占位符 3"/>
-          <p:cNvSpPr>
-            <a:spLocks noGrp="1"/>
-          </p:cNvSpPr>
-          <p:nvPr>
-            <p:ph type="sldNum" sz="quarter" idx="5"/>
-          </p:nvPr>
-        </p:nvSpPr>
-        <p:spPr/>
-        <p:txBody>
-          <a:bodyPr/>
-          <a:lstStyle/>
-          <a:p>
-            <a:fld id="{46D80658-9F01-48E8-A529-84FBF04BFF31}" type="slidenum">
-              <a:rPr lang="zh-CN" altLang="en-US" smtClean="0"/>
-              <a:t>4</a:t>
-            </a:fld>
-            <a:endParaRPr lang="zh-CN" altLang="en-US"/>
-          </a:p>
-        </p:txBody>
-      </p:sp>
-    </p:spTree>
-    <p:extLst>
-      <p:ext uri="{BB962C8B-B14F-4D97-AF65-F5344CB8AC3E}">
-        <p14:creationId xmlns:p14="http://schemas.microsoft.com/office/powerpoint/2010/main" val="2417511541"/>
-      </p:ext>
-    </p:extLst>
-  </p:cSld>
-  <p:clrMapOvr>
-    <a:masterClrMapping/>
-  </p:clrMapOvr>
-</p:notes>
-</file>
-
-<file path=ppt/notesSlides/notesSlide4.xml><?xml version="1.0" encoding="utf-8"?>
-<p:notes xmlns:a="http://schemas.openxmlformats.org/drawingml/2006/main" xmlns:r="http://schemas.openxmlformats.org/officeDocument/2006/relationships" xmlns:p="http://schemas.openxmlformats.org/presentationml/2006/main">
-  <p:cSld>
-    <p:spTree>
-      <p:nvGrpSpPr>
-        <p:cNvPr id="1" name=""/>
-        <p:cNvGrpSpPr/>
-        <p:nvPr/>
-      </p:nvGrpSpPr>
-      <p:grpSpPr>
-        <a:xfrm>
-          <a:off x="0" y="0"/>
-          <a:ext cx="0" cy="0"/>
-          <a:chOff x="0" y="0"/>
-          <a:chExt cx="0" cy="0"/>
-        </a:xfrm>
-      </p:grpSpPr>
-      <p:sp>
-        <p:nvSpPr>
-          <p:cNvPr id="2" name="幻灯片图像占位符 1"/>
-          <p:cNvSpPr>
-            <a:spLocks noGrp="1" noRot="1" noChangeAspect="1"/>
-          </p:cNvSpPr>
-          <p:nvPr>
-            <p:ph type="sldImg"/>
-          </p:nvPr>
-        </p:nvSpPr>
-        <p:spPr/>
-      </p:sp>
-      <p:sp>
-        <p:nvSpPr>
-          <p:cNvPr id="3" name="备注占位符 2"/>
-          <p:cNvSpPr>
-            <a:spLocks noGrp="1"/>
-          </p:cNvSpPr>
-          <p:nvPr>
-            <p:ph type="body" idx="1"/>
-          </p:nvPr>
-        </p:nvSpPr>
-        <p:spPr/>
-        <p:txBody>
-          <a:bodyPr/>
-          <a:lstStyle/>
-          <a:p>
-            <a:r>
-              <a:rPr lang="zh-CN" altLang="zh-CN" sz="1200" b="0" i="0" kern="1200" dirty="0">
-                <a:solidFill>
-                  <a:schemeClr val="tx1"/>
-                </a:solidFill>
-                <a:effectLst/>
-                <a:latin typeface="+mn-lt"/>
-                <a:ea typeface="+mn-ea"/>
-                <a:cs typeface="+mn-cs"/>
-              </a:rPr>
-              <a:t> 为了量化这一过程，我在 NEURON 中构建了包含胞体和远端树突的形态学模型，严格设置静息工作点在 -75mV 的亚阈值区间，并注入 ZAP 扫频电流进行测试。</a:t>
-            </a:r>
-            <a:endParaRPr lang="en-US" altLang="zh-CN" sz="1200" b="0" i="0" kern="1200" dirty="0">
-              <a:solidFill>
-                <a:schemeClr val="tx1"/>
-              </a:solidFill>
-              <a:effectLst/>
-              <a:latin typeface="+mn-lt"/>
-              <a:ea typeface="+mn-ea"/>
-              <a:cs typeface="+mn-cs"/>
-            </a:endParaRPr>
-          </a:p>
-          <a:p>
-            <a:r>
-              <a:rPr lang="zh-CN" altLang="zh-CN" sz="1200" b="0" i="0" kern="1200" dirty="0">
-                <a:solidFill>
-                  <a:schemeClr val="tx1"/>
-                </a:solidFill>
-                <a:effectLst/>
-                <a:latin typeface="+mn-lt"/>
-                <a:ea typeface="+mn-ea"/>
-                <a:cs typeface="+mn-cs"/>
-              </a:rPr>
-              <a:t>形态学：包含胞体 (Soma) 和树突 (Dendrite 0.8)。</a:t>
-            </a:r>
-          </a:p>
-          <a:p>
-            <a:r>
-              <a:rPr lang="zh-CN" altLang="zh-CN" sz="1200" b="0" i="0" kern="1200" dirty="0">
-                <a:solidFill>
-                  <a:schemeClr val="tx1"/>
-                </a:solidFill>
-                <a:effectLst/>
-                <a:latin typeface="+mn-lt"/>
-                <a:ea typeface="+mn-ea"/>
-                <a:cs typeface="+mn-cs"/>
-              </a:rPr>
-              <a:t>机制：引入了 HH 基础通道和基于真实电生理数据的HCN 通道。</a:t>
-            </a:r>
-          </a:p>
-          <a:p>
-            <a:r>
-              <a:rPr lang="zh-CN" altLang="zh-CN" sz="1200" b="0" i="0" kern="1200" dirty="0">
-                <a:solidFill>
-                  <a:schemeClr val="tx1"/>
-                </a:solidFill>
-                <a:effectLst/>
-                <a:latin typeface="+mn-lt"/>
-                <a:ea typeface="+mn-ea"/>
-                <a:cs typeface="+mn-cs"/>
-              </a:rPr>
-              <a:t>刺激协议：ZAP 扫频电流（0.5-25 Hz）。</a:t>
-            </a:r>
-          </a:p>
-          <a:p>
-            <a:endParaRPr lang="zh-CN" altLang="en-US" dirty="0"/>
-          </a:p>
-        </p:txBody>
-      </p:sp>
-      <p:sp>
-        <p:nvSpPr>
-          <p:cNvPr id="4" name="灯片编号占位符 3"/>
-          <p:cNvSpPr>
-            <a:spLocks noGrp="1"/>
-          </p:cNvSpPr>
-          <p:nvPr>
-            <p:ph type="sldNum" sz="quarter" idx="5"/>
-          </p:nvPr>
-        </p:nvSpPr>
-        <p:spPr/>
-        <p:txBody>
-          <a:bodyPr/>
-          <a:lstStyle/>
-          <a:p>
-            <a:fld id="{46D80658-9F01-48E8-A529-84FBF04BFF31}" type="slidenum">
-              <a:rPr lang="zh-CN" altLang="en-US" smtClean="0"/>
-              <a:t>5</a:t>
-            </a:fld>
-            <a:endParaRPr lang="zh-CN" altLang="en-US"/>
-          </a:p>
-        </p:txBody>
-      </p:sp>
-    </p:spTree>
-    <p:extLst>
-      <p:ext uri="{BB962C8B-B14F-4D97-AF65-F5344CB8AC3E}">
-        <p14:creationId xmlns:p14="http://schemas.microsoft.com/office/powerpoint/2010/main" val="1359733371"/>
-      </p:ext>
-    </p:extLst>
-  </p:cSld>
-  <p:clrMapOvr>
-    <a:masterClrMapping/>
-  </p:clrMapOvr>
-</p:notes>
-</file>
-
-<file path=ppt/notesSlides/notesSlide5.xml><?xml version="1.0" encoding="utf-8"?>
-<p:notes xmlns:a="http://schemas.openxmlformats.org/drawingml/2006/main" xmlns:r="http://schemas.openxmlformats.org/officeDocument/2006/relationships" xmlns:p="http://schemas.openxmlformats.org/presentationml/2006/main">
-  <p:cSld>
-    <p:spTree>
-      <p:nvGrpSpPr>
-        <p:cNvPr id="1" name=""/>
-        <p:cNvGrpSpPr/>
-        <p:nvPr/>
-      </p:nvGrpSpPr>
-      <p:grpSpPr>
-        <a:xfrm>
-          <a:off x="0" y="0"/>
-          <a:ext cx="0" cy="0"/>
-          <a:chOff x="0" y="0"/>
-          <a:chExt cx="0" cy="0"/>
-        </a:xfrm>
-      </p:grpSpPr>
-      <p:sp>
-        <p:nvSpPr>
-          <p:cNvPr id="2" name="幻灯片图像占位符 1"/>
-          <p:cNvSpPr>
-            <a:spLocks noGrp="1" noRot="1" noChangeAspect="1"/>
-          </p:cNvSpPr>
-          <p:nvPr>
-            <p:ph type="sldImg"/>
-          </p:nvPr>
-        </p:nvSpPr>
-        <p:spPr/>
-      </p:sp>
-      <p:sp>
-        <p:nvSpPr>
-          <p:cNvPr id="3" name="备注占位符 2"/>
-          <p:cNvSpPr>
-            <a:spLocks noGrp="1"/>
-          </p:cNvSpPr>
-          <p:nvPr>
-            <p:ph type="body" idx="1"/>
-          </p:nvPr>
-        </p:nvSpPr>
-        <p:spPr/>
-        <p:txBody>
-          <a:bodyPr/>
-          <a:lstStyle/>
-          <a:p>
-            <a:r>
-              <a:rPr lang="zh-CN" altLang="zh-CN" sz="1200" b="0" i="0" kern="1200" dirty="0">
-                <a:solidFill>
-                  <a:schemeClr val="tx1"/>
-                </a:solidFill>
-                <a:effectLst/>
-                <a:latin typeface="+mn-lt"/>
-                <a:ea typeface="+mn-ea"/>
-                <a:cs typeface="+mn-cs"/>
-              </a:rPr>
-              <a:t>在注入扫频电流前，我先用负向方波电流</a:t>
-            </a:r>
-            <a:r>
-              <a:rPr lang="en-US" altLang="zh-CN" sz="1200" b="0" i="0" kern="1200" dirty="0">
-                <a:solidFill>
-                  <a:schemeClr val="tx1"/>
-                </a:solidFill>
-                <a:effectLst/>
-                <a:latin typeface="+mn-lt"/>
-                <a:ea typeface="+mn-ea"/>
-                <a:cs typeface="+mn-cs"/>
-              </a:rPr>
-              <a:t>-0.05nA</a:t>
-            </a:r>
-            <a:r>
-              <a:rPr lang="zh-CN" altLang="zh-CN" sz="1200" b="0" i="0" kern="1200" dirty="0">
-                <a:solidFill>
-                  <a:schemeClr val="tx1"/>
-                </a:solidFill>
-                <a:effectLst/>
-                <a:latin typeface="+mn-lt"/>
-                <a:ea typeface="+mn-ea"/>
-                <a:cs typeface="+mn-cs"/>
-              </a:rPr>
-              <a:t>验证了通道的合法性。如图所示，红色曲线展现了经典的 Sag 现象，证明 HCN 通道成功充当了对抗超极化的‘电压减震器</a:t>
-            </a:r>
-            <a:r>
-              <a:rPr lang="zh-CN" altLang="en-US" sz="1200" b="0" i="0" kern="1200" dirty="0">
-                <a:solidFill>
-                  <a:schemeClr val="tx1"/>
-                </a:solidFill>
-                <a:effectLst/>
-                <a:latin typeface="+mn-lt"/>
-                <a:ea typeface="+mn-ea"/>
-                <a:cs typeface="+mn-cs"/>
-              </a:rPr>
-              <a:t>。</a:t>
-            </a:r>
-            <a:r>
-              <a:rPr lang="zh-CN" altLang="zh-CN" sz="1200" b="0" i="0" kern="1200" dirty="0">
-                <a:solidFill>
-                  <a:schemeClr val="tx1"/>
-                </a:solidFill>
-                <a:effectLst/>
-                <a:latin typeface="+mn-lt"/>
-                <a:ea typeface="+mn-ea"/>
-                <a:cs typeface="+mn-cs"/>
-              </a:rPr>
-              <a:t>完美复现了 2.0 mV 的 Sag recovery 和回跃去极化。</a:t>
-            </a:r>
-            <a:r>
-              <a:rPr lang="zh-CN" altLang="en-US" sz="1200" b="0" i="0" kern="1200" dirty="0">
-                <a:solidFill>
-                  <a:schemeClr val="tx1"/>
-                </a:solidFill>
-                <a:effectLst/>
-                <a:latin typeface="+mn-lt"/>
-                <a:ea typeface="+mn-ea"/>
-                <a:cs typeface="+mn-cs"/>
-              </a:rPr>
-              <a:t>右边这张图说明了我们外加的扫频电流</a:t>
-            </a:r>
-            <a:r>
-              <a:rPr lang="zh-CN" altLang="zh-CN" sz="1200" b="0" i="0" kern="1200" dirty="0">
-                <a:solidFill>
-                  <a:schemeClr val="tx1"/>
-                </a:solidFill>
-                <a:effectLst/>
-                <a:latin typeface="+mn-lt"/>
-                <a:ea typeface="+mn-ea"/>
-                <a:cs typeface="+mn-cs"/>
-              </a:rPr>
-              <a:t>足够小，细胞完全处于**“亚阈值（Subthreshold）”**状态。只有在这种线性/微扰状态下，后面计算阻抗和共振才在数学上具有合法性</a:t>
-            </a:r>
-            <a:r>
-              <a:rPr lang="zh-CN" altLang="en-US" sz="1200" b="0" i="0" kern="1200" dirty="0">
-                <a:solidFill>
-                  <a:schemeClr val="tx1"/>
-                </a:solidFill>
-                <a:effectLst/>
-                <a:latin typeface="+mn-lt"/>
-                <a:ea typeface="+mn-ea"/>
-                <a:cs typeface="+mn-cs"/>
-              </a:rPr>
-              <a:t>，同时可以发现电压变化会稍微小一点，这是因为额外增加了离子通道。</a:t>
-            </a:r>
-            <a:endParaRPr lang="zh-CN" altLang="en-US" dirty="0"/>
-          </a:p>
-        </p:txBody>
-      </p:sp>
-      <p:sp>
-        <p:nvSpPr>
-          <p:cNvPr id="4" name="灯片编号占位符 3"/>
-          <p:cNvSpPr>
-            <a:spLocks noGrp="1"/>
-          </p:cNvSpPr>
-          <p:nvPr>
-            <p:ph type="sldNum" sz="quarter" idx="5"/>
-          </p:nvPr>
-        </p:nvSpPr>
-        <p:spPr/>
-        <p:txBody>
-          <a:bodyPr/>
-          <a:lstStyle/>
-          <a:p>
-            <a:fld id="{46D80658-9F01-48E8-A529-84FBF04BFF31}" type="slidenum">
-              <a:rPr lang="zh-CN" altLang="en-US" smtClean="0"/>
-              <a:t>6</a:t>
-            </a:fld>
-            <a:endParaRPr lang="zh-CN" altLang="en-US"/>
-          </a:p>
-        </p:txBody>
-      </p:sp>
-    </p:spTree>
-    <p:extLst>
-      <p:ext uri="{BB962C8B-B14F-4D97-AF65-F5344CB8AC3E}">
-        <p14:creationId xmlns:p14="http://schemas.microsoft.com/office/powerpoint/2010/main" val="64001801"/>
-      </p:ext>
-    </p:extLst>
-  </p:cSld>
-  <p:clrMapOvr>
-    <a:masterClrMapping/>
-  </p:clrMapOvr>
-</p:notes>
-</file>
-
-<file path=ppt/notesSlides/notesSlide6.xml><?xml version="1.0" encoding="utf-8"?>
-<p:notes xmlns:a="http://schemas.openxmlformats.org/drawingml/2006/main" xmlns:r="http://schemas.openxmlformats.org/officeDocument/2006/relationships" xmlns:p="http://schemas.openxmlformats.org/presentationml/2006/main">
-  <p:cSld>
-    <p:spTree>
-      <p:nvGrpSpPr>
-        <p:cNvPr id="1" name=""/>
-        <p:cNvGrpSpPr/>
-        <p:nvPr/>
-      </p:nvGrpSpPr>
-      <p:grpSpPr>
-        <a:xfrm>
-          <a:off x="0" y="0"/>
-          <a:ext cx="0" cy="0"/>
-          <a:chOff x="0" y="0"/>
-          <a:chExt cx="0" cy="0"/>
-        </a:xfrm>
-      </p:grpSpPr>
-      <p:sp>
-        <p:nvSpPr>
-          <p:cNvPr id="2" name="幻灯片图像占位符 1"/>
-          <p:cNvSpPr>
-            <a:spLocks noGrp="1" noRot="1" noChangeAspect="1"/>
-          </p:cNvSpPr>
-          <p:nvPr>
-            <p:ph type="sldImg"/>
-          </p:nvPr>
-        </p:nvSpPr>
-        <p:spPr/>
-      </p:sp>
-      <p:sp>
-        <p:nvSpPr>
-          <p:cNvPr id="3" name="备注占位符 2"/>
-          <p:cNvSpPr>
-            <a:spLocks noGrp="1"/>
-          </p:cNvSpPr>
-          <p:nvPr>
-            <p:ph type="body" idx="1"/>
-          </p:nvPr>
-        </p:nvSpPr>
-        <p:spPr/>
-        <p:txBody>
-          <a:bodyPr/>
-          <a:lstStyle/>
-          <a:p>
-            <a:r>
-              <a:rPr lang="zh-CN" altLang="zh-CN" sz="1200" b="0" i="0" kern="1200" dirty="0">
-                <a:solidFill>
-                  <a:schemeClr val="tx1"/>
-                </a:solidFill>
-                <a:effectLst/>
-                <a:latin typeface="+mn-lt"/>
-                <a:ea typeface="+mn-ea"/>
-                <a:cs typeface="+mn-cs"/>
-              </a:rPr>
-              <a:t>对于 RC 电容下凹的衰减曲线，这种算法会不可避免地捕捉到一个 0.036 的数学曲率伪影</a:t>
-            </a:r>
-            <a:r>
-              <a:rPr lang="zh-CN" altLang="en-US" sz="1200" b="0" i="0" kern="1200" dirty="0">
-                <a:solidFill>
-                  <a:schemeClr val="tx1"/>
-                </a:solidFill>
-                <a:effectLst/>
-                <a:latin typeface="+mn-lt"/>
-                <a:ea typeface="+mn-ea"/>
-                <a:cs typeface="+mn-cs"/>
-              </a:rPr>
-              <a:t>。</a:t>
-            </a:r>
-            <a:r>
-              <a:rPr lang="zh-CN" altLang="zh-CN" sz="1200" b="0" i="0" kern="1200" dirty="0">
-                <a:solidFill>
-                  <a:schemeClr val="tx1"/>
-                </a:solidFill>
-                <a:effectLst/>
-                <a:latin typeface="+mn-lt"/>
-                <a:ea typeface="+mn-ea"/>
-                <a:cs typeface="+mn-cs"/>
-              </a:rPr>
-              <a:t>HCN 通道加入后跃升至 0.062，是将共振能力</a:t>
-            </a:r>
-            <a:r>
-              <a:rPr lang="zh-CN" altLang="zh-CN" sz="1200" b="1" i="0" kern="1200" dirty="0">
-                <a:solidFill>
-                  <a:schemeClr val="tx1"/>
-                </a:solidFill>
-                <a:effectLst/>
-                <a:latin typeface="+mn-lt"/>
-                <a:ea typeface="+mn-ea"/>
-                <a:cs typeface="+mn-cs"/>
-              </a:rPr>
-              <a:t>绝对翻倍</a:t>
-            </a:r>
-            <a:r>
-              <a:rPr lang="zh-CN" altLang="zh-CN" sz="1200" b="0" i="0" kern="1200" dirty="0">
-                <a:solidFill>
-                  <a:schemeClr val="tx1"/>
-                </a:solidFill>
-                <a:effectLst/>
-                <a:latin typeface="+mn-lt"/>
-                <a:ea typeface="+mn-ea"/>
-                <a:cs typeface="+mn-cs"/>
-              </a:rPr>
-              <a:t>的真实生物学效应。配合非线性的动作电位阈值，这微小的亚阈值放大足以决定神经元是否</a:t>
-            </a:r>
-            <a:r>
-              <a:rPr lang="en-US" altLang="zh-CN" sz="1200" b="0" i="0" kern="1200" dirty="0">
-                <a:solidFill>
-                  <a:schemeClr val="tx1"/>
-                </a:solidFill>
-                <a:effectLst/>
-                <a:latin typeface="+mn-lt"/>
-                <a:ea typeface="+mn-ea"/>
-                <a:cs typeface="+mn-cs"/>
-              </a:rPr>
-              <a:t>fire</a:t>
-            </a:r>
-            <a:r>
-              <a:rPr lang="zh-CN" altLang="en-US" sz="1200" b="0" i="0" kern="1200" dirty="0">
-                <a:solidFill>
-                  <a:schemeClr val="tx1"/>
-                </a:solidFill>
-                <a:effectLst/>
-                <a:latin typeface="+mn-lt"/>
-                <a:ea typeface="+mn-ea"/>
-                <a:cs typeface="+mn-cs"/>
-              </a:rPr>
-              <a:t>。</a:t>
-            </a:r>
-            <a:endParaRPr lang="zh-CN" altLang="en-US" dirty="0"/>
-          </a:p>
-        </p:txBody>
-      </p:sp>
-      <p:sp>
-        <p:nvSpPr>
-          <p:cNvPr id="4" name="灯片编号占位符 3"/>
-          <p:cNvSpPr>
-            <a:spLocks noGrp="1"/>
-          </p:cNvSpPr>
-          <p:nvPr>
-            <p:ph type="sldNum" sz="quarter" idx="5"/>
-          </p:nvPr>
-        </p:nvSpPr>
-        <p:spPr/>
-        <p:txBody>
-          <a:bodyPr/>
-          <a:lstStyle/>
-          <a:p>
-            <a:fld id="{46D80658-9F01-48E8-A529-84FBF04BFF31}" type="slidenum">
-              <a:rPr lang="zh-CN" altLang="en-US" smtClean="0"/>
-              <a:t>7</a:t>
-            </a:fld>
-            <a:endParaRPr lang="zh-CN" altLang="en-US"/>
-          </a:p>
-        </p:txBody>
-      </p:sp>
-    </p:spTree>
-    <p:extLst>
-      <p:ext uri="{BB962C8B-B14F-4D97-AF65-F5344CB8AC3E}">
-        <p14:creationId xmlns:p14="http://schemas.microsoft.com/office/powerpoint/2010/main" val="453243283"/>
-      </p:ext>
-    </p:extLst>
-  </p:cSld>
-  <p:clrMapOvr>
-    <a:masterClrMapping/>
-  </p:clrMapOvr>
-</p:notes>
-</file>
-
-<file path=ppt/notesSlides/notesSlide7.xml><?xml version="1.0" encoding="utf-8"?>
-<p:notes xmlns:a="http://schemas.openxmlformats.org/drawingml/2006/main" xmlns:r="http://schemas.openxmlformats.org/officeDocument/2006/relationships" xmlns:p="http://schemas.openxmlformats.org/presentationml/2006/main">
-  <p:cSld>
-    <p:spTree>
-      <p:nvGrpSpPr>
-        <p:cNvPr id="1" name=""/>
-        <p:cNvGrpSpPr/>
-        <p:nvPr/>
-      </p:nvGrpSpPr>
-      <p:grpSpPr>
-        <a:xfrm>
-          <a:off x="0" y="0"/>
-          <a:ext cx="0" cy="0"/>
-          <a:chOff x="0" y="0"/>
-          <a:chExt cx="0" cy="0"/>
-        </a:xfrm>
-      </p:grpSpPr>
-      <p:sp>
-        <p:nvSpPr>
-          <p:cNvPr id="2" name="幻灯片图像占位符 1"/>
-          <p:cNvSpPr>
-            <a:spLocks noGrp="1" noRot="1" noChangeAspect="1"/>
-          </p:cNvSpPr>
-          <p:nvPr>
-            <p:ph type="sldImg"/>
-          </p:nvPr>
-        </p:nvSpPr>
-        <p:spPr/>
-      </p:sp>
-      <p:sp>
-        <p:nvSpPr>
-          <p:cNvPr id="3" name="备注占位符 2"/>
-          <p:cNvSpPr>
-            <a:spLocks noGrp="1"/>
-          </p:cNvSpPr>
-          <p:nvPr>
-            <p:ph type="body" idx="1"/>
-          </p:nvPr>
-        </p:nvSpPr>
-        <p:spPr/>
-        <p:txBody>
-          <a:bodyPr/>
-          <a:lstStyle/>
-          <a:p>
-            <a:r>
-              <a:rPr lang="zh-CN" altLang="en-US" dirty="0"/>
-              <a:t>抛出问题：当把静息电位调整到</a:t>
-            </a:r>
-            <a:r>
-              <a:rPr lang="en-US" altLang="zh-CN" dirty="0"/>
-              <a:t>-65mV,</a:t>
-            </a:r>
-            <a:r>
-              <a:rPr lang="zh-CN" altLang="en-US" dirty="0"/>
-              <a:t>神奇的事情发生了，</a:t>
-            </a:r>
-            <a:r>
-              <a:rPr lang="en-US" altLang="zh-CN" dirty="0" err="1"/>
-              <a:t>hh</a:t>
-            </a:r>
-            <a:r>
-              <a:rPr lang="zh-CN" altLang="en-US" dirty="0"/>
-              <a:t>模型也出现了类似的共振峰，并且对应频率与加了</a:t>
-            </a:r>
-            <a:r>
-              <a:rPr lang="en-US" altLang="zh-CN" dirty="0" err="1"/>
-              <a:t>hcn</a:t>
-            </a:r>
-            <a:r>
-              <a:rPr lang="zh-CN" altLang="en-US" dirty="0"/>
-              <a:t>的几乎一样，增大到了约</a:t>
-            </a:r>
-            <a:r>
-              <a:rPr lang="en-US" altLang="zh-CN" dirty="0"/>
-              <a:t>25Hz</a:t>
-            </a:r>
-            <a:r>
-              <a:rPr lang="zh-CN" altLang="en-US" dirty="0"/>
-              <a:t>，这是为什么？</a:t>
-            </a:r>
-          </a:p>
-        </p:txBody>
-      </p:sp>
-      <p:sp>
-        <p:nvSpPr>
-          <p:cNvPr id="4" name="灯片编号占位符 3"/>
-          <p:cNvSpPr>
-            <a:spLocks noGrp="1"/>
-          </p:cNvSpPr>
-          <p:nvPr>
-            <p:ph type="sldNum" sz="quarter" idx="5"/>
-          </p:nvPr>
-        </p:nvSpPr>
-        <p:spPr/>
-        <p:txBody>
-          <a:bodyPr/>
-          <a:lstStyle/>
-          <a:p>
-            <a:fld id="{46D80658-9F01-48E8-A529-84FBF04BFF31}" type="slidenum">
-              <a:rPr lang="zh-CN" altLang="en-US" smtClean="0"/>
-              <a:t>8</a:t>
+              <a:t>12</a:t>
             </a:fld>
             <a:endParaRPr lang="zh-CN" altLang="en-US"/>
           </a:p>
@@ -2208,7 +873,7 @@
 </p:notes>
 </file>
 
-<file path=ppt/notesSlides/notesSlide8.xml><?xml version="1.0" encoding="utf-8"?>
+<file path=ppt/notesSlides/notesSlide12.xml><?xml version="1.0" encoding="utf-8"?>
 <p:notes xmlns:a="http://schemas.openxmlformats.org/drawingml/2006/main" xmlns:r="http://schemas.openxmlformats.org/officeDocument/2006/relationships" xmlns:p="http://schemas.openxmlformats.org/presentationml/2006/main">
   <p:cSld>
     <p:spTree>
@@ -2838,7 +1503,7 @@
           <a:p>
             <a:fld id="{46D80658-9F01-48E8-A529-84FBF04BFF31}" type="slidenum">
               <a:rPr lang="zh-CN" altLang="en-US" smtClean="0"/>
-              <a:t>9</a:t>
+              <a:t>13</a:t>
             </a:fld>
             <a:endParaRPr lang="zh-CN" altLang="en-US"/>
           </a:p>
@@ -2857,7 +1522,7 @@
 </p:notes>
 </file>
 
-<file path=ppt/notesSlides/notesSlide9.xml><?xml version="1.0" encoding="utf-8"?>
+<file path=ppt/notesSlides/notesSlide13.xml><?xml version="1.0" encoding="utf-8"?>
 <p:notes xmlns:a="http://schemas.openxmlformats.org/drawingml/2006/main" xmlns:r="http://schemas.openxmlformats.org/officeDocument/2006/relationships" xmlns:p="http://schemas.openxmlformats.org/presentationml/2006/main">
   <p:cSld>
     <p:spTree>
@@ -2902,7 +1567,7 @@
           <a:lstStyle/>
           <a:p>
             <a:r>
-              <a:rPr lang="zh-CN" altLang="zh-CN" sz="1200" b="0" i="0" kern="1200" dirty="0">
+              <a:rPr lang="zh-CN" altLang="en-US" sz="1200" b="0" i="0" kern="1200" dirty="0">
                 <a:solidFill>
                   <a:schemeClr val="tx1"/>
                 </a:solidFill>
@@ -2911,10 +1576,10 @@
                 <a:ea typeface="+mn-ea"/>
                 <a:cs typeface="+mn-cs"/>
               </a:rPr>
-              <a:t>此外，我</a:t>
-            </a:r>
-            <a:r>
-              <a:rPr lang="zh-CN" altLang="en-US" sz="1200" b="0" i="0" kern="1200" dirty="0">
+              <a:t>这两张图很类似</a:t>
+            </a:r>
+            <a:r>
+              <a:rPr lang="en-US" altLang="zh-CN" sz="1200" b="0" i="0" kern="1200" dirty="0">
                 <a:solidFill>
                   <a:schemeClr val="tx1"/>
                 </a:solidFill>
@@ -2923,10 +1588,10 @@
                 <a:ea typeface="+mn-ea"/>
                 <a:cs typeface="+mn-cs"/>
               </a:rPr>
-              <a:t>们</a:t>
-            </a:r>
-            <a:r>
-              <a:rPr lang="zh-CN" altLang="zh-CN" sz="1200" b="0" i="0" kern="1200" dirty="0">
+              <a:t>slide4</a:t>
+            </a:r>
+            <a:r>
+              <a:rPr lang="zh-CN" altLang="en-US" sz="1200" b="0" i="0" kern="1200" dirty="0">
                 <a:solidFill>
                   <a:schemeClr val="tx1"/>
                 </a:solidFill>
@@ -2935,10 +1600,21 @@
                 <a:ea typeface="+mn-ea"/>
                 <a:cs typeface="+mn-cs"/>
               </a:rPr>
-              <a:t>的模型还在树突端 (Dend 0.8) 测到了同样的共振。在真实大脑的海马 CA1 区，远端树突的 HCN 密度极高</a:t>
-            </a:r>
-            <a:r>
-              <a:rPr lang="zh-CN" altLang="en-US" sz="1200" b="0" i="0" kern="1200" dirty="0">
+              <a:t>的两张图。</a:t>
+            </a:r>
+            <a:endParaRPr lang="en-US" altLang="zh-CN" sz="1200" b="0" i="0" kern="1200" dirty="0">
+              <a:solidFill>
+                <a:schemeClr val="tx1"/>
+              </a:solidFill>
+              <a:effectLst/>
+              <a:latin typeface="+mn-lt"/>
+              <a:ea typeface="+mn-ea"/>
+              <a:cs typeface="+mn-cs"/>
+            </a:endParaRPr>
+          </a:p>
+          <a:p>
+            <a:r>
+              <a:rPr lang="zh-CN" altLang="zh-CN" sz="1200" b="0" i="0" kern="1200" dirty="0">
                 <a:solidFill>
                   <a:schemeClr val="tx1"/>
                 </a:solidFill>
@@ -2947,10 +1623,10 @@
                 <a:ea typeface="+mn-ea"/>
                 <a:cs typeface="+mn-cs"/>
               </a:rPr>
-              <a:t>，我们的模型也定性的考虑了这点，设置了一个线性梯度分布，胞体是</a:t>
-            </a:r>
-            <a:r>
-              <a:rPr lang="en-US" altLang="zh-CN" sz="1200" b="0" i="0" kern="1200" dirty="0">
+              <a:t>科学家提取了患病婴儿的 HCN1 突变基因（如图中的 M153I，代表第 153 位的蛋氨酸突变为了异亮氨酸），并把它导入到**体外培养的细胞（如 CHO 细胞或 HEK293 细胞）**中表达。</a:t>
+            </a:r>
+            <a:r>
+              <a:rPr lang="zh-CN" altLang="en-US" sz="1200" b="0" i="0" kern="1200" dirty="0">
                 <a:solidFill>
                   <a:schemeClr val="tx1"/>
                 </a:solidFill>
@@ -2959,10 +1635,10 @@
                 <a:ea typeface="+mn-ea"/>
                 <a:cs typeface="+mn-cs"/>
               </a:rPr>
-              <a:t>0.25g_h</a:t>
-            </a:r>
-            <a:r>
-              <a:rPr lang="zh-CN" altLang="en-US" sz="1200" b="0" i="0" kern="1200" dirty="0">
+              <a:t>两张图片</a:t>
+            </a:r>
+            <a:r>
+              <a:rPr lang="zh-CN" altLang="zh-CN" sz="1200" b="0" i="0" kern="1200" dirty="0">
                 <a:solidFill>
                   <a:schemeClr val="tx1"/>
                 </a:solidFill>
@@ -2971,10 +1647,10 @@
                 <a:ea typeface="+mn-ea"/>
                 <a:cs typeface="+mn-cs"/>
               </a:rPr>
-              <a:t>，远端的密度大约是</a:t>
-            </a:r>
-            <a:r>
-              <a:rPr lang="en-US" altLang="zh-CN" sz="1200" b="0" i="0" kern="1200" dirty="0" err="1">
+              <a:t>来自体外细胞的</a:t>
+            </a:r>
+            <a:r>
+              <a:rPr lang="zh-CN" altLang="zh-CN" sz="1200" b="1" i="0" kern="1200" dirty="0">
                 <a:solidFill>
                   <a:schemeClr val="tx1"/>
                 </a:solidFill>
@@ -2983,10 +1659,10 @@
                 <a:ea typeface="+mn-ea"/>
                 <a:cs typeface="+mn-cs"/>
               </a:rPr>
-              <a:t>g_h</a:t>
-            </a:r>
-            <a:r>
-              <a:rPr lang="en-US" altLang="zh-CN" sz="1200" b="0" i="0" kern="1200" dirty="0">
+              <a:t>膜片钳实验</a:t>
+            </a:r>
+            <a:r>
+              <a:rPr lang="zh-CN" altLang="zh-CN" sz="1200" b="0" i="0" kern="1200" dirty="0">
                 <a:solidFill>
                   <a:schemeClr val="tx1"/>
                 </a:solidFill>
@@ -2995,10 +1671,22 @@
                 <a:ea typeface="+mn-ea"/>
                 <a:cs typeface="+mn-cs"/>
               </a:rPr>
-              <a:t>,</a:t>
-            </a:r>
-            <a:r>
-              <a:rPr lang="zh-CN" altLang="en-US" sz="1200" b="0" i="0" kern="1200" dirty="0">
+              <a:t>记录，对比了正常人（黑线）和患病婴儿的 HCN1 通道特性。</a:t>
+            </a:r>
+            <a:r>
+              <a:rPr lang="zh-CN" altLang="en-US" dirty="0"/>
+              <a:t>比较明显的是橙红色的，它的激活电压变得很大，约向右平移了</a:t>
+            </a:r>
+            <a:r>
+              <a:rPr lang="en-US" altLang="zh-CN" dirty="0"/>
+              <a:t>40mV</a:t>
+            </a:r>
+            <a:r>
+              <a:rPr lang="zh-CN" altLang="en-US" dirty="0"/>
+              <a:t>，</a:t>
+            </a:r>
+            <a:r>
+              <a:rPr lang="zh-CN" altLang="zh-CN" sz="1200" b="0" i="0" kern="1200" dirty="0">
                 <a:solidFill>
                   <a:schemeClr val="tx1"/>
                 </a:solidFill>
@@ -3007,10 +1695,10 @@
                 <a:ea typeface="+mn-ea"/>
                 <a:cs typeface="+mn-cs"/>
               </a:rPr>
-              <a:t>是胞体的四倍，这种分布</a:t>
-            </a:r>
-            <a:r>
-              <a:rPr lang="zh-CN" altLang="zh-CN" sz="1200" b="0" i="0" kern="1200" dirty="0">
+              <a:t>在 -75mV 时，突变通道已经处于接近 100% 开启的</a:t>
+            </a:r>
+            <a:r>
+              <a:rPr lang="zh-CN" altLang="zh-CN" sz="1200" b="1" i="0" kern="1200" dirty="0">
                 <a:solidFill>
                   <a:schemeClr val="tx1"/>
                 </a:solidFill>
@@ -3019,7 +1707,7 @@
                 <a:ea typeface="+mn-ea"/>
                 <a:cs typeface="+mn-cs"/>
               </a:rPr>
-              <a:t>确保了远端和近端突触输入的公平竞争与时间同步</a:t>
+              <a:t>饱和死区（红线顶部）</a:t>
             </a:r>
             <a:r>
               <a:rPr lang="zh-CN" altLang="en-US" sz="1200" b="0" i="0" kern="1200" dirty="0">
@@ -3031,6 +1719,1333 @@
                 <a:ea typeface="+mn-ea"/>
                 <a:cs typeface="+mn-cs"/>
               </a:rPr>
+              <a:t>，</a:t>
+            </a:r>
+            <a:r>
+              <a:rPr lang="zh-CN" altLang="zh-CN" sz="1200" b="0" i="0" kern="1200" dirty="0">
+                <a:solidFill>
+                  <a:schemeClr val="tx1"/>
+                </a:solidFill>
+                <a:effectLst/>
+                <a:latin typeface="+mn-lt"/>
+                <a:ea typeface="+mn-ea"/>
+                <a:cs typeface="+mn-cs"/>
+              </a:rPr>
+              <a:t>斜率变成了零，动态调谐能力彻底丧失</a:t>
+            </a:r>
+            <a:r>
+              <a:rPr lang="zh-CN" altLang="en-US" sz="1200" b="0" i="0" kern="1200" dirty="0">
+                <a:solidFill>
+                  <a:schemeClr val="tx1"/>
+                </a:solidFill>
+                <a:effectLst/>
+                <a:latin typeface="+mn-lt"/>
+                <a:ea typeface="+mn-ea"/>
+                <a:cs typeface="+mn-cs"/>
+              </a:rPr>
+              <a:t>。</a:t>
+            </a:r>
+            <a:r>
+              <a:rPr lang="zh-CN" altLang="en-US" dirty="0"/>
+              <a:t>同时它的激活时间常数也显著低于正常组，</a:t>
+            </a:r>
+            <a:r>
+              <a:rPr lang="zh-CN" altLang="zh-CN" sz="1200" b="0" i="0" kern="1200" dirty="0">
+                <a:solidFill>
+                  <a:schemeClr val="tx1"/>
+                </a:solidFill>
+                <a:effectLst/>
+                <a:latin typeface="+mn-lt"/>
+                <a:ea typeface="+mn-ea"/>
+                <a:cs typeface="+mn-cs"/>
+              </a:rPr>
+              <a:t>它失去了正常通道‘缓慢负反馈’的减震特性。</a:t>
+            </a:r>
+            <a:r>
+              <a:rPr lang="zh-CN" altLang="zh-CN" sz="1200" b="1" i="0" kern="1200" dirty="0">
+                <a:solidFill>
+                  <a:schemeClr val="tx1"/>
+                </a:solidFill>
+                <a:effectLst/>
+                <a:latin typeface="+mn-lt"/>
+                <a:ea typeface="+mn-ea"/>
+                <a:cs typeface="+mn-cs"/>
+              </a:rPr>
+              <a:t>总结来说：</a:t>
+            </a:r>
+            <a:r>
+              <a:rPr lang="zh-CN" altLang="zh-CN" sz="1200" b="0" i="0" kern="1200" dirty="0">
+                <a:solidFill>
+                  <a:schemeClr val="tx1"/>
+                </a:solidFill>
+                <a:effectLst/>
+                <a:latin typeface="+mn-lt"/>
+                <a:ea typeface="+mn-ea"/>
+                <a:cs typeface="+mn-cs"/>
+              </a:rPr>
+              <a:t> 这种突变既让通道失去了敏感的‘频率调谐能力’，又产生了巨大的持续漏电流，导致神经元极度兴奋</a:t>
+            </a:r>
+            <a:r>
+              <a:rPr lang="zh-CN" altLang="en-US" sz="1200" b="0" i="0" kern="1200" dirty="0">
+                <a:solidFill>
+                  <a:schemeClr val="tx1"/>
+                </a:solidFill>
+                <a:effectLst/>
+                <a:latin typeface="+mn-lt"/>
+                <a:ea typeface="+mn-ea"/>
+                <a:cs typeface="+mn-cs"/>
+              </a:rPr>
+              <a:t>，</a:t>
+            </a:r>
+            <a:r>
+              <a:rPr lang="zh-CN" altLang="zh-CN" sz="1200" b="0" i="0" kern="1200" dirty="0">
+                <a:solidFill>
+                  <a:schemeClr val="tx1"/>
+                </a:solidFill>
+                <a:effectLst/>
+                <a:latin typeface="+mn-lt"/>
+                <a:ea typeface="+mn-ea"/>
+                <a:cs typeface="+mn-cs"/>
+              </a:rPr>
+              <a:t>这就是导致婴儿爆发严重癫痫的底层细胞级机制。</a:t>
+            </a:r>
+            <a:endParaRPr lang="zh-CN" altLang="en-US" dirty="0"/>
+          </a:p>
+          <a:p>
+            <a:endParaRPr lang="zh-CN" altLang="en-US" dirty="0"/>
+          </a:p>
+        </p:txBody>
+      </p:sp>
+      <p:sp>
+        <p:nvSpPr>
+          <p:cNvPr id="4" name="灯片编号占位符 3"/>
+          <p:cNvSpPr>
+            <a:spLocks noGrp="1"/>
+          </p:cNvSpPr>
+          <p:nvPr>
+            <p:ph type="sldNum" sz="quarter" idx="5"/>
+          </p:nvPr>
+        </p:nvSpPr>
+        <p:spPr/>
+        <p:txBody>
+          <a:bodyPr/>
+          <a:lstStyle/>
+          <a:p>
+            <a:fld id="{46D80658-9F01-48E8-A529-84FBF04BFF31}" type="slidenum">
+              <a:rPr lang="zh-CN" altLang="en-US" smtClean="0"/>
+              <a:t>14</a:t>
+            </a:fld>
+            <a:endParaRPr lang="zh-CN" altLang="en-US"/>
+          </a:p>
+        </p:txBody>
+      </p:sp>
+    </p:spTree>
+    <p:extLst>
+      <p:ext uri="{BB962C8B-B14F-4D97-AF65-F5344CB8AC3E}">
+        <p14:creationId xmlns:p14="http://schemas.microsoft.com/office/powerpoint/2010/main" val="256223227"/>
+      </p:ext>
+    </p:extLst>
+  </p:cSld>
+  <p:clrMapOvr>
+    <a:masterClrMapping/>
+  </p:clrMapOvr>
+</p:notes>
+</file>
+
+<file path=ppt/notesSlides/notesSlide14.xml><?xml version="1.0" encoding="utf-8"?>
+<p:notes xmlns:a="http://schemas.openxmlformats.org/drawingml/2006/main" xmlns:r="http://schemas.openxmlformats.org/officeDocument/2006/relationships" xmlns:p="http://schemas.openxmlformats.org/presentationml/2006/main">
+  <p:cSld>
+    <p:spTree>
+      <p:nvGrpSpPr>
+        <p:cNvPr id="1" name=""/>
+        <p:cNvGrpSpPr/>
+        <p:nvPr/>
+      </p:nvGrpSpPr>
+      <p:grpSpPr>
+        <a:xfrm>
+          <a:off x="0" y="0"/>
+          <a:ext cx="0" cy="0"/>
+          <a:chOff x="0" y="0"/>
+          <a:chExt cx="0" cy="0"/>
+        </a:xfrm>
+      </p:grpSpPr>
+      <p:sp>
+        <p:nvSpPr>
+          <p:cNvPr id="2" name="幻灯片图像占位符 1"/>
+          <p:cNvSpPr>
+            <a:spLocks noGrp="1" noRot="1" noChangeAspect="1"/>
+          </p:cNvSpPr>
+          <p:nvPr>
+            <p:ph type="sldImg"/>
+          </p:nvPr>
+        </p:nvSpPr>
+        <p:spPr/>
+      </p:sp>
+      <p:sp>
+        <p:nvSpPr>
+          <p:cNvPr id="3" name="备注占位符 2"/>
+          <p:cNvSpPr>
+            <a:spLocks noGrp="1"/>
+          </p:cNvSpPr>
+          <p:nvPr>
+            <p:ph type="body" idx="1"/>
+          </p:nvPr>
+        </p:nvSpPr>
+        <p:spPr/>
+        <p:txBody>
+          <a:bodyPr/>
+          <a:lstStyle/>
+          <a:p>
+            <a:endParaRPr lang="zh-CN" altLang="en-US" dirty="0"/>
+          </a:p>
+        </p:txBody>
+      </p:sp>
+      <p:sp>
+        <p:nvSpPr>
+          <p:cNvPr id="4" name="灯片编号占位符 3"/>
+          <p:cNvSpPr>
+            <a:spLocks noGrp="1"/>
+          </p:cNvSpPr>
+          <p:nvPr>
+            <p:ph type="sldNum" sz="quarter" idx="5"/>
+          </p:nvPr>
+        </p:nvSpPr>
+        <p:spPr/>
+        <p:txBody>
+          <a:bodyPr/>
+          <a:lstStyle/>
+          <a:p>
+            <a:fld id="{46D80658-9F01-48E8-A529-84FBF04BFF31}" type="slidenum">
+              <a:rPr lang="zh-CN" altLang="en-US" smtClean="0"/>
+              <a:t>15</a:t>
+            </a:fld>
+            <a:endParaRPr lang="zh-CN" altLang="en-US"/>
+          </a:p>
+        </p:txBody>
+      </p:sp>
+    </p:spTree>
+    <p:extLst>
+      <p:ext uri="{BB962C8B-B14F-4D97-AF65-F5344CB8AC3E}">
+        <p14:creationId xmlns:p14="http://schemas.microsoft.com/office/powerpoint/2010/main" val="3592527384"/>
+      </p:ext>
+    </p:extLst>
+  </p:cSld>
+  <p:clrMapOvr>
+    <a:masterClrMapping/>
+  </p:clrMapOvr>
+</p:notes>
+</file>
+
+<file path=ppt/notesSlides/notesSlide2.xml><?xml version="1.0" encoding="utf-8"?>
+<p:notes xmlns:a="http://schemas.openxmlformats.org/drawingml/2006/main" xmlns:r="http://schemas.openxmlformats.org/officeDocument/2006/relationships" xmlns:p="http://schemas.openxmlformats.org/presentationml/2006/main">
+  <p:cSld>
+    <p:spTree>
+      <p:nvGrpSpPr>
+        <p:cNvPr id="1" name=""/>
+        <p:cNvGrpSpPr/>
+        <p:nvPr/>
+      </p:nvGrpSpPr>
+      <p:grpSpPr>
+        <a:xfrm>
+          <a:off x="0" y="0"/>
+          <a:ext cx="0" cy="0"/>
+          <a:chOff x="0" y="0"/>
+          <a:chExt cx="0" cy="0"/>
+        </a:xfrm>
+      </p:grpSpPr>
+      <p:sp>
+        <p:nvSpPr>
+          <p:cNvPr id="2" name="幻灯片图像占位符 1"/>
+          <p:cNvSpPr>
+            <a:spLocks noGrp="1" noRot="1" noChangeAspect="1"/>
+          </p:cNvSpPr>
+          <p:nvPr>
+            <p:ph type="sldImg"/>
+          </p:nvPr>
+        </p:nvSpPr>
+        <p:spPr/>
+      </p:sp>
+      <mc:AlternateContent xmlns:mc="http://schemas.openxmlformats.org/markup-compatibility/2006" xmlns:a14="http://schemas.microsoft.com/office/drawing/2010/main">
+        <mc:Choice Requires="a14">
+          <p:sp>
+            <p:nvSpPr>
+              <p:cNvPr id="3" name="备注占位符 2"/>
+              <p:cNvSpPr>
+                <a:spLocks noGrp="1"/>
+              </p:cNvSpPr>
+              <p:nvPr>
+                <p:ph type="body" idx="1"/>
+              </p:nvPr>
+            </p:nvSpPr>
+            <p:spPr/>
+            <p:txBody>
+              <a:bodyPr/>
+              <a:lstStyle/>
+              <a:p>
+                <a:r>
+                  <a:rPr lang="zh-CN" altLang="zh-CN" sz="1200" b="0" i="0" kern="1200" dirty="0">
+                    <a:solidFill>
+                      <a:schemeClr val="tx1"/>
+                    </a:solidFill>
+                    <a:effectLst/>
+                    <a:latin typeface="+mn-lt"/>
+                    <a:ea typeface="+mn-ea"/>
+                    <a:cs typeface="+mn-cs"/>
+                  </a:rPr>
+                  <a:t>传统观点认为，神经元细胞膜是一个被动的 RC 积分器。</a:t>
+                </a:r>
+              </a:p>
+              <a:p>
+                <a:r>
+                  <a:rPr lang="zh-CN" altLang="zh-CN" sz="1200" b="0" i="0" kern="1200" dirty="0">
+                    <a:solidFill>
+                      <a:schemeClr val="tx1"/>
+                    </a:solidFill>
+                    <a:effectLst/>
+                    <a:latin typeface="+mn-lt"/>
+                    <a:ea typeface="+mn-ea"/>
+                    <a:cs typeface="+mn-cs"/>
+                  </a:rPr>
+                  <a:t>膜电容 (</a:t>
+                </a:r>
+                <a14:m>
+                  <m:oMath xmlns:m="http://schemas.openxmlformats.org/officeDocument/2006/math">
+                    <m:sSub>
+                      <m:sSubPr>
+                        <m:ctrlPr>
+                          <a:rPr lang="zh-CN" altLang="en-US" sz="1200" i="1" kern="1200">
+                            <a:solidFill>
+                              <a:schemeClr val="tx1"/>
+                            </a:solidFill>
+                            <a:latin typeface="Cambria Math" panose="02040503050406030204" pitchFamily="18" charset="0"/>
+                            <a:ea typeface="+mn-ea"/>
+                            <a:cs typeface="+mn-cs"/>
+                          </a:rPr>
+                        </m:ctrlPr>
+                      </m:sSubPr>
+                      <m:e>
+                        <m:r>
+                          <a:rPr lang="zh-CN" altLang="en-US" sz="1200" i="1" kern="1200">
+                            <a:solidFill>
+                              <a:schemeClr val="tx1"/>
+                            </a:solidFill>
+                            <a:latin typeface="Cambria Math" panose="02040503050406030204" pitchFamily="18" charset="0"/>
+                            <a:ea typeface="+mn-ea"/>
+                            <a:cs typeface="+mn-cs"/>
+                          </a:rPr>
+                          <m:t>𝐶</m:t>
+                        </m:r>
+                      </m:e>
+                      <m:sub>
+                        <m:r>
+                          <a:rPr lang="zh-CN" altLang="en-US" sz="1200" i="1" kern="1200">
+                            <a:solidFill>
+                              <a:schemeClr val="tx1"/>
+                            </a:solidFill>
+                            <a:latin typeface="Cambria Math" panose="02040503050406030204" pitchFamily="18" charset="0"/>
+                            <a:ea typeface="+mn-ea"/>
+                            <a:cs typeface="+mn-cs"/>
+                          </a:rPr>
+                          <m:t>𝑚</m:t>
+                        </m:r>
+                      </m:sub>
+                    </m:sSub>
+                  </m:oMath>
+                </a14:m>
+                <a:r>
+                  <a:rPr lang="zh-CN" altLang="zh-CN" sz="1200" b="0" i="0" kern="1200" dirty="0">
+                    <a:solidFill>
+                      <a:schemeClr val="tx1"/>
+                    </a:solidFill>
+                    <a:effectLst/>
+                    <a:latin typeface="+mn-lt"/>
+                    <a:ea typeface="+mn-ea"/>
+                    <a:cs typeface="+mn-cs"/>
+                  </a:rPr>
+                  <a:t>) 会吸收/过滤掉高频的快速突触输入。</a:t>
+                </a:r>
+              </a:p>
+              <a:p>
+                <a:endParaRPr lang="zh-CN" altLang="en-US" dirty="0"/>
+              </a:p>
+            </p:txBody>
+          </p:sp>
+        </mc:Choice>
+        <mc:Fallback xmlns="">
+          <p:sp>
+            <p:nvSpPr>
+              <p:cNvPr id="3" name="备注占位符 2"/>
+              <p:cNvSpPr>
+                <a:spLocks noGrp="1"/>
+              </p:cNvSpPr>
+              <p:nvPr>
+                <p:ph type="body" idx="1"/>
+              </p:nvPr>
+            </p:nvSpPr>
+            <p:spPr/>
+            <p:txBody>
+              <a:bodyPr/>
+              <a:lstStyle/>
+              <a:p>
+                <a:r>
+                  <a:rPr lang="zh-CN" altLang="zh-CN" sz="1200" b="0" i="0" kern="1200" dirty="0">
+                    <a:solidFill>
+                      <a:schemeClr val="tx1"/>
+                    </a:solidFill>
+                    <a:effectLst/>
+                    <a:latin typeface="+mn-lt"/>
+                    <a:ea typeface="+mn-ea"/>
+                    <a:cs typeface="+mn-cs"/>
+                  </a:rPr>
+                  <a:t>传统观点认为，神经元细胞膜是一个被动的 RC 积分器。</a:t>
+                </a:r>
+              </a:p>
+              <a:p>
+                <a:r>
+                  <a:rPr lang="zh-CN" altLang="zh-CN" sz="1200" b="0" i="0" kern="1200" dirty="0">
+                    <a:solidFill>
+                      <a:schemeClr val="tx1"/>
+                    </a:solidFill>
+                    <a:effectLst/>
+                    <a:latin typeface="+mn-lt"/>
+                    <a:ea typeface="+mn-ea"/>
+                    <a:cs typeface="+mn-cs"/>
+                  </a:rPr>
+                  <a:t>膜电容 (</a:t>
+                </a:r>
+                <a:r>
+                  <a:rPr lang="zh-CN" altLang="en-US" sz="1200" i="0" kern="1200">
+                    <a:solidFill>
+                      <a:schemeClr val="tx1"/>
+                    </a:solidFill>
+                    <a:latin typeface="+mn-lt"/>
+                    <a:ea typeface="+mn-ea"/>
+                    <a:cs typeface="+mn-cs"/>
+                  </a:rPr>
+                  <a:t>𝐶_𝑚</a:t>
+                </a:r>
+                <a:r>
+                  <a:rPr lang="zh-CN" altLang="zh-CN" sz="1200" b="0" i="0" kern="1200" dirty="0">
+                    <a:solidFill>
+                      <a:schemeClr val="tx1"/>
+                    </a:solidFill>
+                    <a:effectLst/>
+                    <a:latin typeface="+mn-lt"/>
+                    <a:ea typeface="+mn-ea"/>
+                    <a:cs typeface="+mn-cs"/>
+                  </a:rPr>
+                  <a:t>) 会吸收/过滤掉高频的快速突触输入。</a:t>
+                </a:r>
+              </a:p>
+              <a:p>
+                <a:endParaRPr lang="zh-CN" altLang="en-US" dirty="0"/>
+              </a:p>
+            </p:txBody>
+          </p:sp>
+        </mc:Fallback>
+      </mc:AlternateContent>
+      <p:sp>
+        <p:nvSpPr>
+          <p:cNvPr id="4" name="灯片编号占位符 3"/>
+          <p:cNvSpPr>
+            <a:spLocks noGrp="1"/>
+          </p:cNvSpPr>
+          <p:nvPr>
+            <p:ph type="sldNum" sz="quarter" idx="5"/>
+          </p:nvPr>
+        </p:nvSpPr>
+        <p:spPr/>
+        <p:txBody>
+          <a:bodyPr/>
+          <a:lstStyle/>
+          <a:p>
+            <a:fld id="{46D80658-9F01-48E8-A529-84FBF04BFF31}" type="slidenum">
+              <a:rPr lang="zh-CN" altLang="en-US" smtClean="0"/>
+              <a:t>2</a:t>
+            </a:fld>
+            <a:endParaRPr lang="zh-CN" altLang="en-US"/>
+          </a:p>
+        </p:txBody>
+      </p:sp>
+    </p:spTree>
+    <p:extLst>
+      <p:ext uri="{BB962C8B-B14F-4D97-AF65-F5344CB8AC3E}">
+        <p14:creationId xmlns:p14="http://schemas.microsoft.com/office/powerpoint/2010/main" val="3376055711"/>
+      </p:ext>
+    </p:extLst>
+  </p:cSld>
+  <p:clrMapOvr>
+    <a:masterClrMapping/>
+  </p:clrMapOvr>
+</p:notes>
+</file>
+
+<file path=ppt/notesSlides/notesSlide3.xml><?xml version="1.0" encoding="utf-8"?>
+<p:notes xmlns:a="http://schemas.openxmlformats.org/drawingml/2006/main" xmlns:r="http://schemas.openxmlformats.org/officeDocument/2006/relationships" xmlns:p="http://schemas.openxmlformats.org/presentationml/2006/main">
+  <p:cSld>
+    <p:spTree>
+      <p:nvGrpSpPr>
+        <p:cNvPr id="1" name=""/>
+        <p:cNvGrpSpPr/>
+        <p:nvPr/>
+      </p:nvGrpSpPr>
+      <p:grpSpPr>
+        <a:xfrm>
+          <a:off x="0" y="0"/>
+          <a:ext cx="0" cy="0"/>
+          <a:chOff x="0" y="0"/>
+          <a:chExt cx="0" cy="0"/>
+        </a:xfrm>
+      </p:grpSpPr>
+      <p:sp>
+        <p:nvSpPr>
+          <p:cNvPr id="2" name="幻灯片图像占位符 1"/>
+          <p:cNvSpPr>
+            <a:spLocks noGrp="1" noRot="1" noChangeAspect="1"/>
+          </p:cNvSpPr>
+          <p:nvPr>
+            <p:ph type="sldImg"/>
+          </p:nvPr>
+        </p:nvSpPr>
+        <p:spPr/>
+      </p:sp>
+      <p:sp>
+        <p:nvSpPr>
+          <p:cNvPr id="3" name="备注占位符 2"/>
+          <p:cNvSpPr>
+            <a:spLocks noGrp="1"/>
+          </p:cNvSpPr>
+          <p:nvPr>
+            <p:ph type="body" idx="1"/>
+          </p:nvPr>
+        </p:nvSpPr>
+        <p:spPr/>
+        <p:txBody>
+          <a:bodyPr/>
+          <a:lstStyle/>
+          <a:p>
+            <a:r>
+              <a:rPr lang="zh-CN" altLang="zh-CN" sz="1200" b="0" i="0" kern="1200" dirty="0">
+                <a:solidFill>
+                  <a:schemeClr val="tx1"/>
+                </a:solidFill>
+                <a:effectLst/>
+                <a:latin typeface="+mn-lt"/>
+                <a:ea typeface="+mn-ea"/>
+                <a:cs typeface="+mn-cs"/>
+              </a:rPr>
+              <a:t>大脑中充满了像 Theta 波、Gamma 波这样的特定节律。如果神经元只是被动衰减的低通滤波器，它就像一台没有调台功能的收音机。为了在充斥着噪音的突触输入中‘听’到特定的频道，神经元膜上必须存在某种主动的带通滤波机制。</a:t>
+            </a:r>
+            <a:r>
+              <a:rPr lang="zh-CN" altLang="en-US" sz="1200" b="0" i="0" kern="1200" dirty="0">
+                <a:solidFill>
+                  <a:schemeClr val="tx1"/>
+                </a:solidFill>
+                <a:effectLst/>
+                <a:latin typeface="+mn-lt"/>
+                <a:ea typeface="+mn-ea"/>
+                <a:cs typeface="+mn-cs"/>
+              </a:rPr>
+              <a:t>我们的工作涉及</a:t>
+            </a:r>
+            <a:r>
+              <a:rPr lang="en-US" altLang="zh-CN" sz="1200" b="0" i="0" kern="1200" dirty="0">
+                <a:solidFill>
+                  <a:schemeClr val="tx1"/>
+                </a:solidFill>
+                <a:effectLst/>
+                <a:latin typeface="+mn-lt"/>
+                <a:ea typeface="+mn-ea"/>
+                <a:cs typeface="+mn-cs"/>
+              </a:rPr>
+              <a:t>theta</a:t>
+            </a:r>
+            <a:r>
+              <a:rPr lang="zh-CN" altLang="en-US" sz="1200" b="0" i="0" kern="1200" dirty="0">
+                <a:solidFill>
+                  <a:schemeClr val="tx1"/>
+                </a:solidFill>
+                <a:effectLst/>
+                <a:latin typeface="+mn-lt"/>
+                <a:ea typeface="+mn-ea"/>
+                <a:cs typeface="+mn-cs"/>
+              </a:rPr>
+              <a:t>和</a:t>
+            </a:r>
+            <a:r>
+              <a:rPr lang="en-US" altLang="zh-CN" sz="1200" b="0" i="0" kern="1200" dirty="0">
+                <a:solidFill>
+                  <a:schemeClr val="tx1"/>
+                </a:solidFill>
+                <a:effectLst/>
+                <a:latin typeface="+mn-lt"/>
+                <a:ea typeface="+mn-ea"/>
+                <a:cs typeface="+mn-cs"/>
+              </a:rPr>
+              <a:t>beta/gamma</a:t>
+            </a:r>
+            <a:r>
+              <a:rPr lang="zh-CN" altLang="en-US" sz="1200" b="0" i="0" kern="1200" dirty="0">
+                <a:solidFill>
+                  <a:schemeClr val="tx1"/>
+                </a:solidFill>
+                <a:effectLst/>
+                <a:latin typeface="+mn-lt"/>
+                <a:ea typeface="+mn-ea"/>
+                <a:cs typeface="+mn-cs"/>
+              </a:rPr>
+              <a:t>：</a:t>
+            </a:r>
+            <a:r>
+              <a:rPr lang="zh-CN" altLang="zh-CN" sz="1200" b="0" i="0" kern="1200" dirty="0">
+                <a:solidFill>
+                  <a:schemeClr val="tx1"/>
+                </a:solidFill>
+                <a:effectLst/>
+                <a:latin typeface="+mn-lt"/>
+                <a:ea typeface="+mn-ea"/>
+                <a:cs typeface="+mn-cs"/>
+              </a:rPr>
+              <a:t>Theta波又被称为 “</a:t>
+            </a:r>
+            <a:r>
+              <a:rPr lang="zh-CN" altLang="zh-CN" sz="1200" b="1" i="0" kern="1200" dirty="0">
+                <a:solidFill>
+                  <a:schemeClr val="tx1"/>
+                </a:solidFill>
+                <a:effectLst/>
+                <a:latin typeface="+mn-lt"/>
+                <a:ea typeface="+mn-ea"/>
+                <a:cs typeface="+mn-cs"/>
+              </a:rPr>
+              <a:t>受暗示波</a:t>
+            </a:r>
+            <a:r>
+              <a:rPr lang="zh-CN" altLang="zh-CN" sz="1200" b="0" i="0" kern="1200" dirty="0">
+                <a:solidFill>
+                  <a:schemeClr val="tx1"/>
+                </a:solidFill>
+                <a:effectLst/>
+                <a:latin typeface="+mn-lt"/>
+                <a:ea typeface="+mn-ea"/>
+                <a:cs typeface="+mn-cs"/>
+              </a:rPr>
+              <a:t>”，因为它普遍存在于人们</a:t>
+            </a:r>
+            <a:r>
+              <a:rPr lang="zh-CN" altLang="zh-CN" sz="1200" b="1" i="0" kern="1200" dirty="0">
+                <a:solidFill>
+                  <a:schemeClr val="tx1"/>
+                </a:solidFill>
+                <a:effectLst/>
+                <a:latin typeface="+mn-lt"/>
+                <a:ea typeface="+mn-ea"/>
+                <a:cs typeface="+mn-cs"/>
+              </a:rPr>
+              <a:t>精神恍惚或者是催眠状态</a:t>
+            </a:r>
+            <a:r>
+              <a:rPr lang="zh-CN" altLang="zh-CN" sz="1200" b="0" i="0" kern="1200" dirty="0">
+                <a:solidFill>
+                  <a:schemeClr val="tx1"/>
+                </a:solidFill>
+                <a:effectLst/>
+                <a:latin typeface="+mn-lt"/>
+                <a:ea typeface="+mn-ea"/>
+                <a:cs typeface="+mn-cs"/>
+              </a:rPr>
+              <a:t>。而在这种状态下，大脑的Theta波是</a:t>
+            </a:r>
+            <a:r>
+              <a:rPr lang="zh-CN" altLang="zh-CN" sz="1200" b="1" i="0" kern="1200" dirty="0">
+                <a:solidFill>
+                  <a:schemeClr val="tx1"/>
+                </a:solidFill>
+                <a:effectLst/>
+                <a:latin typeface="+mn-lt"/>
+                <a:ea typeface="+mn-ea"/>
+                <a:cs typeface="+mn-cs"/>
+              </a:rPr>
+              <a:t>最佳的</a:t>
+            </a:r>
+            <a:r>
+              <a:rPr lang="zh-CN" altLang="zh-CN" sz="1200" b="0" i="0" kern="1200" dirty="0">
+                <a:solidFill>
+                  <a:schemeClr val="tx1"/>
+                </a:solidFill>
+                <a:effectLst/>
+                <a:latin typeface="+mn-lt"/>
+                <a:ea typeface="+mn-ea"/>
+                <a:cs typeface="+mn-cs"/>
+              </a:rPr>
+              <a:t>，它更方便病人接受催眠和相关的治疗。因为Theta波通常在你</a:t>
+            </a:r>
+            <a:r>
+              <a:rPr lang="zh-CN" altLang="zh-CN" sz="1200" b="1" i="0" kern="1200" dirty="0">
+                <a:solidFill>
+                  <a:schemeClr val="tx1"/>
+                </a:solidFill>
+                <a:effectLst/>
+                <a:latin typeface="+mn-lt"/>
+                <a:ea typeface="+mn-ea"/>
+                <a:cs typeface="+mn-cs"/>
+              </a:rPr>
+              <a:t>做白日梦或将要入睡时出现</a:t>
+            </a:r>
+            <a:r>
+              <a:rPr lang="zh-CN" altLang="zh-CN" sz="1200" b="0" i="0" kern="1200" dirty="0">
+                <a:solidFill>
+                  <a:schemeClr val="tx1"/>
+                </a:solidFill>
+                <a:effectLst/>
+                <a:latin typeface="+mn-lt"/>
+                <a:ea typeface="+mn-ea"/>
+                <a:cs typeface="+mn-cs"/>
+              </a:rPr>
+              <a:t>。Beta波是人们在清醒中最常见的高频波。它在</a:t>
+            </a:r>
+            <a:r>
+              <a:rPr lang="zh-CN" altLang="zh-CN" sz="1200" b="1" i="0" kern="1200" dirty="0">
+                <a:solidFill>
+                  <a:schemeClr val="tx1"/>
+                </a:solidFill>
+                <a:effectLst/>
+                <a:latin typeface="+mn-lt"/>
+                <a:ea typeface="+mn-ea"/>
+                <a:cs typeface="+mn-cs"/>
+              </a:rPr>
+              <a:t>认知推理、计算、阅读、沟通以及思考</a:t>
+            </a:r>
+            <a:r>
+              <a:rPr lang="zh-CN" altLang="zh-CN" sz="1200" b="0" i="0" kern="1200" dirty="0">
+                <a:solidFill>
+                  <a:schemeClr val="tx1"/>
+                </a:solidFill>
+                <a:effectLst/>
+                <a:latin typeface="+mn-lt"/>
+                <a:ea typeface="+mn-ea"/>
+                <a:cs typeface="+mn-cs"/>
+              </a:rPr>
+              <a:t>等有意识的状态下会帮助人们做出完美的</a:t>
+            </a:r>
+            <a:r>
+              <a:rPr lang="zh-CN" altLang="en-US" sz="1200" b="0" i="0" kern="1200" dirty="0">
+                <a:solidFill>
+                  <a:schemeClr val="tx1"/>
+                </a:solidFill>
+                <a:effectLst/>
+                <a:latin typeface="+mn-lt"/>
+                <a:ea typeface="+mn-ea"/>
+                <a:cs typeface="+mn-cs"/>
+              </a:rPr>
+              <a:t>响应</a:t>
+            </a:r>
+            <a:r>
+              <a:rPr lang="zh-CN" altLang="zh-CN" sz="1200" b="0" i="0" kern="1200" dirty="0">
+                <a:solidFill>
+                  <a:schemeClr val="tx1"/>
+                </a:solidFill>
+                <a:effectLst/>
+                <a:latin typeface="+mn-lt"/>
+                <a:ea typeface="+mn-ea"/>
+                <a:cs typeface="+mn-cs"/>
+              </a:rPr>
+              <a:t>。</a:t>
+            </a:r>
+            <a:endParaRPr lang="zh-CN" altLang="en-US" dirty="0"/>
+          </a:p>
+        </p:txBody>
+      </p:sp>
+      <p:sp>
+        <p:nvSpPr>
+          <p:cNvPr id="4" name="灯片编号占位符 3"/>
+          <p:cNvSpPr>
+            <a:spLocks noGrp="1"/>
+          </p:cNvSpPr>
+          <p:nvPr>
+            <p:ph type="sldNum" sz="quarter" idx="5"/>
+          </p:nvPr>
+        </p:nvSpPr>
+        <p:spPr/>
+        <p:txBody>
+          <a:bodyPr/>
+          <a:lstStyle/>
+          <a:p>
+            <a:fld id="{46D80658-9F01-48E8-A529-84FBF04BFF31}" type="slidenum">
+              <a:rPr lang="zh-CN" altLang="en-US" smtClean="0"/>
+              <a:t>3</a:t>
+            </a:fld>
+            <a:endParaRPr lang="zh-CN" altLang="en-US"/>
+          </a:p>
+        </p:txBody>
+      </p:sp>
+    </p:spTree>
+    <p:extLst>
+      <p:ext uri="{BB962C8B-B14F-4D97-AF65-F5344CB8AC3E}">
+        <p14:creationId xmlns:p14="http://schemas.microsoft.com/office/powerpoint/2010/main" val="1677289396"/>
+      </p:ext>
+    </p:extLst>
+  </p:cSld>
+  <p:clrMapOvr>
+    <a:masterClrMapping/>
+  </p:clrMapOvr>
+</p:notes>
+</file>
+
+<file path=ppt/notesSlides/notesSlide4.xml><?xml version="1.0" encoding="utf-8"?>
+<p:notes xmlns:a="http://schemas.openxmlformats.org/drawingml/2006/main" xmlns:r="http://schemas.openxmlformats.org/officeDocument/2006/relationships" xmlns:p="http://schemas.openxmlformats.org/presentationml/2006/main">
+  <p:cSld>
+    <p:spTree>
+      <p:nvGrpSpPr>
+        <p:cNvPr id="1" name=""/>
+        <p:cNvGrpSpPr/>
+        <p:nvPr/>
+      </p:nvGrpSpPr>
+      <p:grpSpPr>
+        <a:xfrm>
+          <a:off x="0" y="0"/>
+          <a:ext cx="0" cy="0"/>
+          <a:chOff x="0" y="0"/>
+          <a:chExt cx="0" cy="0"/>
+        </a:xfrm>
+      </p:grpSpPr>
+      <p:sp>
+        <p:nvSpPr>
+          <p:cNvPr id="2" name="幻灯片图像占位符 1"/>
+          <p:cNvSpPr>
+            <a:spLocks noGrp="1" noRot="1" noChangeAspect="1"/>
+          </p:cNvSpPr>
+          <p:nvPr>
+            <p:ph type="sldImg"/>
+          </p:nvPr>
+        </p:nvSpPr>
+        <p:spPr/>
+      </p:sp>
+      <p:sp>
+        <p:nvSpPr>
+          <p:cNvPr id="3" name="备注占位符 2"/>
+          <p:cNvSpPr>
+            <a:spLocks noGrp="1"/>
+          </p:cNvSpPr>
+          <p:nvPr>
+            <p:ph type="body" idx="1"/>
+          </p:nvPr>
+        </p:nvSpPr>
+        <p:spPr/>
+        <p:txBody>
+          <a:bodyPr/>
+          <a:lstStyle/>
+          <a:p>
+            <a:r>
+              <a:rPr lang="zh-CN" altLang="zh-CN" sz="1200" b="1" i="0" kern="1200" dirty="0">
+                <a:solidFill>
+                  <a:schemeClr val="tx1"/>
+                </a:solidFill>
+                <a:effectLst/>
+                <a:latin typeface="+mn-lt"/>
+                <a:ea typeface="+mn-ea"/>
+                <a:cs typeface="+mn-cs"/>
+              </a:rPr>
+              <a:t>反常的激活条件：</a:t>
+            </a:r>
+            <a:r>
+              <a:rPr lang="zh-CN" altLang="zh-CN" sz="1200" b="0" i="0" kern="1200" dirty="0">
+                <a:solidFill>
+                  <a:schemeClr val="tx1"/>
+                </a:solidFill>
+                <a:effectLst/>
+                <a:latin typeface="+mn-lt"/>
+                <a:ea typeface="+mn-ea"/>
+                <a:cs typeface="+mn-cs"/>
+              </a:rPr>
+              <a:t> 去极化关闭，超极化（越负）越激活。</a:t>
+            </a:r>
+          </a:p>
+          <a:p>
+            <a:r>
+              <a:rPr lang="zh-CN" altLang="zh-CN" sz="1200" b="1" i="0" kern="1200" dirty="0">
+                <a:solidFill>
+                  <a:schemeClr val="tx1"/>
+                </a:solidFill>
+                <a:effectLst/>
+                <a:latin typeface="+mn-lt"/>
+                <a:ea typeface="+mn-ea"/>
+                <a:cs typeface="+mn-cs"/>
+              </a:rPr>
+              <a:t>缓慢的动力学：</a:t>
+            </a:r>
+            <a:r>
+              <a:rPr lang="zh-CN" altLang="zh-CN" sz="1200" b="0" i="0" kern="1200" dirty="0">
+                <a:solidFill>
+                  <a:schemeClr val="tx1"/>
+                </a:solidFill>
+                <a:effectLst/>
+                <a:latin typeface="+mn-lt"/>
+                <a:ea typeface="+mn-ea"/>
+                <a:cs typeface="+mn-cs"/>
+              </a:rPr>
+              <a:t> 它的开关极其缓慢，这相当于在等效电路中引入了一个“感抗（Inductance）”。</a:t>
+            </a:r>
+            <a:endParaRPr lang="en-US" altLang="zh-CN" sz="1200" b="0" i="0" kern="1200" dirty="0">
+              <a:solidFill>
+                <a:schemeClr val="tx1"/>
+              </a:solidFill>
+              <a:effectLst/>
+              <a:latin typeface="+mn-lt"/>
+              <a:ea typeface="+mn-ea"/>
+              <a:cs typeface="+mn-cs"/>
+            </a:endParaRPr>
+          </a:p>
+          <a:p>
+            <a:r>
+              <a:rPr lang="zh-CN" altLang="zh-CN" sz="1200" b="0" i="0" kern="1200" dirty="0">
+                <a:solidFill>
+                  <a:schemeClr val="tx1"/>
+                </a:solidFill>
+                <a:effectLst/>
+                <a:latin typeface="+mn-lt"/>
+                <a:ea typeface="+mn-ea"/>
+                <a:cs typeface="+mn-cs"/>
+              </a:rPr>
+              <a:t>当膜电位</a:t>
+            </a:r>
+            <a:r>
+              <a:rPr lang="zh-CN" altLang="zh-CN" sz="1200" b="1" i="0" kern="1200" dirty="0">
+                <a:solidFill>
+                  <a:schemeClr val="tx1"/>
+                </a:solidFill>
+                <a:effectLst/>
+                <a:latin typeface="+mn-lt"/>
+                <a:ea typeface="+mn-ea"/>
+                <a:cs typeface="+mn-cs"/>
+              </a:rPr>
+              <a:t>超极化</a:t>
+            </a:r>
+            <a:r>
+              <a:rPr lang="zh-CN" altLang="zh-CN" sz="1200" b="0" i="0" kern="1200" dirty="0">
+                <a:solidFill>
+                  <a:schemeClr val="tx1"/>
+                </a:solidFill>
+                <a:effectLst/>
+                <a:latin typeface="+mn-lt"/>
+                <a:ea typeface="+mn-ea"/>
+                <a:cs typeface="+mn-cs"/>
+              </a:rPr>
+              <a:t>（比静息更负，如 -75 mV 或更低）时，HCN 通道打开，允许 Na⁺ 和 K⁺ 流过，这就是 Ih 电流</a:t>
+            </a:r>
+            <a:r>
+              <a:rPr lang="zh-CN" altLang="en-US" sz="1200" b="0" i="0" kern="1200" dirty="0">
+                <a:solidFill>
+                  <a:schemeClr val="tx1"/>
+                </a:solidFill>
+                <a:effectLst/>
+                <a:latin typeface="+mn-lt"/>
+                <a:ea typeface="+mn-ea"/>
+                <a:cs typeface="+mn-cs"/>
+              </a:rPr>
+              <a:t>，</a:t>
+            </a:r>
+            <a:r>
+              <a:rPr lang="zh-CN" altLang="zh-CN" sz="1200" b="0" i="0" kern="1200" dirty="0">
+                <a:solidFill>
+                  <a:schemeClr val="tx1"/>
+                </a:solidFill>
+                <a:effectLst/>
+                <a:latin typeface="+mn-lt"/>
+                <a:ea typeface="+mn-ea"/>
+                <a:cs typeface="+mn-cs"/>
+              </a:rPr>
+              <a:t>超极化激活的阳离子电流</a:t>
+            </a:r>
+            <a:r>
+              <a:rPr lang="zh-CN" altLang="en-US" sz="1200" b="0" i="0" kern="1200" dirty="0">
+                <a:solidFill>
+                  <a:schemeClr val="tx1"/>
+                </a:solidFill>
+                <a:effectLst/>
+                <a:latin typeface="+mn-lt"/>
+                <a:ea typeface="+mn-ea"/>
+                <a:cs typeface="+mn-cs"/>
+              </a:rPr>
+              <a:t>。</a:t>
+            </a:r>
+            <a:r>
+              <a:rPr lang="zh-CN" altLang="zh-CN" sz="1200" b="0" i="0" kern="1200" dirty="0">
+                <a:solidFill>
+                  <a:schemeClr val="tx1"/>
+                </a:solidFill>
+                <a:effectLst/>
+                <a:latin typeface="+mn-lt"/>
+                <a:ea typeface="+mn-ea"/>
+                <a:cs typeface="+mn-cs"/>
+              </a:rPr>
+              <a:t>Ih 是一个缓慢的内向电流，它让膜电位在超极化后缓慢回升，像弹簧一样往回拉。正是这个特性，让神经元能在 Theta 频段产生共振，赋予膜电位“节律弹性”。</a:t>
+            </a:r>
+          </a:p>
+          <a:p>
+            <a:endParaRPr lang="zh-CN" altLang="en-US" dirty="0"/>
+          </a:p>
+        </p:txBody>
+      </p:sp>
+      <p:sp>
+        <p:nvSpPr>
+          <p:cNvPr id="4" name="灯片编号占位符 3"/>
+          <p:cNvSpPr>
+            <a:spLocks noGrp="1"/>
+          </p:cNvSpPr>
+          <p:nvPr>
+            <p:ph type="sldNum" sz="quarter" idx="5"/>
+          </p:nvPr>
+        </p:nvSpPr>
+        <p:spPr/>
+        <p:txBody>
+          <a:bodyPr/>
+          <a:lstStyle/>
+          <a:p>
+            <a:fld id="{46D80658-9F01-48E8-A529-84FBF04BFF31}" type="slidenum">
+              <a:rPr lang="zh-CN" altLang="en-US" smtClean="0"/>
+              <a:t>5</a:t>
+            </a:fld>
+            <a:endParaRPr lang="zh-CN" altLang="en-US"/>
+          </a:p>
+        </p:txBody>
+      </p:sp>
+    </p:spTree>
+    <p:extLst>
+      <p:ext uri="{BB962C8B-B14F-4D97-AF65-F5344CB8AC3E}">
+        <p14:creationId xmlns:p14="http://schemas.microsoft.com/office/powerpoint/2010/main" val="2417511541"/>
+      </p:ext>
+    </p:extLst>
+  </p:cSld>
+  <p:clrMapOvr>
+    <a:masterClrMapping/>
+  </p:clrMapOvr>
+</p:notes>
+</file>
+
+<file path=ppt/notesSlides/notesSlide5.xml><?xml version="1.0" encoding="utf-8"?>
+<p:notes xmlns:a="http://schemas.openxmlformats.org/drawingml/2006/main" xmlns:r="http://schemas.openxmlformats.org/officeDocument/2006/relationships" xmlns:p="http://schemas.openxmlformats.org/presentationml/2006/main">
+  <p:cSld>
+    <p:spTree>
+      <p:nvGrpSpPr>
+        <p:cNvPr id="1" name=""/>
+        <p:cNvGrpSpPr/>
+        <p:nvPr/>
+      </p:nvGrpSpPr>
+      <p:grpSpPr>
+        <a:xfrm>
+          <a:off x="0" y="0"/>
+          <a:ext cx="0" cy="0"/>
+          <a:chOff x="0" y="0"/>
+          <a:chExt cx="0" cy="0"/>
+        </a:xfrm>
+      </p:grpSpPr>
+      <p:sp>
+        <p:nvSpPr>
+          <p:cNvPr id="2" name="幻灯片图像占位符 1"/>
+          <p:cNvSpPr>
+            <a:spLocks noGrp="1" noRot="1" noChangeAspect="1"/>
+          </p:cNvSpPr>
+          <p:nvPr>
+            <p:ph type="sldImg"/>
+          </p:nvPr>
+        </p:nvSpPr>
+        <p:spPr/>
+      </p:sp>
+      <p:sp>
+        <p:nvSpPr>
+          <p:cNvPr id="3" name="备注占位符 2"/>
+          <p:cNvSpPr>
+            <a:spLocks noGrp="1"/>
+          </p:cNvSpPr>
+          <p:nvPr>
+            <p:ph type="body" idx="1"/>
+          </p:nvPr>
+        </p:nvSpPr>
+        <p:spPr/>
+        <p:txBody>
+          <a:bodyPr/>
+          <a:lstStyle/>
+          <a:p>
+            <a:r>
+              <a:rPr lang="zh-CN" altLang="zh-CN" sz="1200" b="0" i="0" kern="1200" dirty="0">
+                <a:solidFill>
+                  <a:schemeClr val="tx1"/>
+                </a:solidFill>
+                <a:effectLst/>
+                <a:latin typeface="+mn-lt"/>
+                <a:ea typeface="+mn-ea"/>
+                <a:cs typeface="+mn-cs"/>
+              </a:rPr>
+              <a:t> 为了量化这一过程，我在 NEURON 中构建了包含胞体和远端树突的形态学模型，严格设置静息工作点在 -75mV 的亚阈值区间，并注入 ZAP 扫频电流进行测试。</a:t>
+            </a:r>
+            <a:endParaRPr lang="en-US" altLang="zh-CN" sz="1200" b="0" i="0" kern="1200" dirty="0">
+              <a:solidFill>
+                <a:schemeClr val="tx1"/>
+              </a:solidFill>
+              <a:effectLst/>
+              <a:latin typeface="+mn-lt"/>
+              <a:ea typeface="+mn-ea"/>
+              <a:cs typeface="+mn-cs"/>
+            </a:endParaRPr>
+          </a:p>
+          <a:p>
+            <a:r>
+              <a:rPr lang="zh-CN" altLang="zh-CN" sz="1200" b="0" i="0" kern="1200" dirty="0">
+                <a:solidFill>
+                  <a:schemeClr val="tx1"/>
+                </a:solidFill>
+                <a:effectLst/>
+                <a:latin typeface="+mn-lt"/>
+                <a:ea typeface="+mn-ea"/>
+                <a:cs typeface="+mn-cs"/>
+              </a:rPr>
+              <a:t>形态学：包含胞体 (Soma) 和树突 (Dendrite 0.8)。</a:t>
+            </a:r>
+          </a:p>
+          <a:p>
+            <a:r>
+              <a:rPr lang="zh-CN" altLang="zh-CN" sz="1200" b="0" i="0" kern="1200" dirty="0">
+                <a:solidFill>
+                  <a:schemeClr val="tx1"/>
+                </a:solidFill>
+                <a:effectLst/>
+                <a:latin typeface="+mn-lt"/>
+                <a:ea typeface="+mn-ea"/>
+                <a:cs typeface="+mn-cs"/>
+              </a:rPr>
+              <a:t>机制：引入了 HH 基础通道和基于真实电生理数据的HCN 通道。</a:t>
+            </a:r>
+          </a:p>
+          <a:p>
+            <a:r>
+              <a:rPr lang="zh-CN" altLang="zh-CN" sz="1200" b="0" i="0" kern="1200" dirty="0">
+                <a:solidFill>
+                  <a:schemeClr val="tx1"/>
+                </a:solidFill>
+                <a:effectLst/>
+                <a:latin typeface="+mn-lt"/>
+                <a:ea typeface="+mn-ea"/>
+                <a:cs typeface="+mn-cs"/>
+              </a:rPr>
+              <a:t>刺激协议：ZAP 扫频电流（0.5-25 Hz）。</a:t>
+            </a:r>
+          </a:p>
+          <a:p>
+            <a:endParaRPr lang="zh-CN" altLang="en-US" dirty="0"/>
+          </a:p>
+        </p:txBody>
+      </p:sp>
+      <p:sp>
+        <p:nvSpPr>
+          <p:cNvPr id="4" name="灯片编号占位符 3"/>
+          <p:cNvSpPr>
+            <a:spLocks noGrp="1"/>
+          </p:cNvSpPr>
+          <p:nvPr>
+            <p:ph type="sldNum" sz="quarter" idx="5"/>
+          </p:nvPr>
+        </p:nvSpPr>
+        <p:spPr/>
+        <p:txBody>
+          <a:bodyPr/>
+          <a:lstStyle/>
+          <a:p>
+            <a:fld id="{46D80658-9F01-48E8-A529-84FBF04BFF31}" type="slidenum">
+              <a:rPr lang="zh-CN" altLang="en-US" smtClean="0"/>
+              <a:t>6</a:t>
+            </a:fld>
+            <a:endParaRPr lang="zh-CN" altLang="en-US"/>
+          </a:p>
+        </p:txBody>
+      </p:sp>
+    </p:spTree>
+    <p:extLst>
+      <p:ext uri="{BB962C8B-B14F-4D97-AF65-F5344CB8AC3E}">
+        <p14:creationId xmlns:p14="http://schemas.microsoft.com/office/powerpoint/2010/main" val="1359733371"/>
+      </p:ext>
+    </p:extLst>
+  </p:cSld>
+  <p:clrMapOvr>
+    <a:masterClrMapping/>
+  </p:clrMapOvr>
+</p:notes>
+</file>
+
+<file path=ppt/notesSlides/notesSlide6.xml><?xml version="1.0" encoding="utf-8"?>
+<p:notes xmlns:a="http://schemas.openxmlformats.org/drawingml/2006/main" xmlns:r="http://schemas.openxmlformats.org/officeDocument/2006/relationships" xmlns:p="http://schemas.openxmlformats.org/presentationml/2006/main">
+  <p:cSld>
+    <p:spTree>
+      <p:nvGrpSpPr>
+        <p:cNvPr id="1" name=""/>
+        <p:cNvGrpSpPr/>
+        <p:nvPr/>
+      </p:nvGrpSpPr>
+      <p:grpSpPr>
+        <a:xfrm>
+          <a:off x="0" y="0"/>
+          <a:ext cx="0" cy="0"/>
+          <a:chOff x="0" y="0"/>
+          <a:chExt cx="0" cy="0"/>
+        </a:xfrm>
+      </p:grpSpPr>
+      <p:sp>
+        <p:nvSpPr>
+          <p:cNvPr id="2" name="幻灯片图像占位符 1"/>
+          <p:cNvSpPr>
+            <a:spLocks noGrp="1" noRot="1" noChangeAspect="1"/>
+          </p:cNvSpPr>
+          <p:nvPr>
+            <p:ph type="sldImg"/>
+          </p:nvPr>
+        </p:nvSpPr>
+        <p:spPr/>
+      </p:sp>
+      <p:sp>
+        <p:nvSpPr>
+          <p:cNvPr id="3" name="备注占位符 2"/>
+          <p:cNvSpPr>
+            <a:spLocks noGrp="1"/>
+          </p:cNvSpPr>
+          <p:nvPr>
+            <p:ph type="body" idx="1"/>
+          </p:nvPr>
+        </p:nvSpPr>
+        <p:spPr/>
+        <p:txBody>
+          <a:bodyPr/>
+          <a:lstStyle/>
+          <a:p>
+            <a:r>
+              <a:rPr lang="zh-CN" altLang="zh-CN" sz="1200" b="0" i="0" kern="1200" dirty="0">
+                <a:solidFill>
+                  <a:schemeClr val="tx1"/>
+                </a:solidFill>
+                <a:effectLst/>
+                <a:latin typeface="+mn-lt"/>
+                <a:ea typeface="+mn-ea"/>
+                <a:cs typeface="+mn-cs"/>
+              </a:rPr>
+              <a:t>此外，我</a:t>
+            </a:r>
+            <a:r>
+              <a:rPr lang="zh-CN" altLang="en-US" sz="1200" b="0" i="0" kern="1200" dirty="0">
+                <a:solidFill>
+                  <a:schemeClr val="tx1"/>
+                </a:solidFill>
+                <a:effectLst/>
+                <a:latin typeface="+mn-lt"/>
+                <a:ea typeface="+mn-ea"/>
+                <a:cs typeface="+mn-cs"/>
+              </a:rPr>
+              <a:t>们</a:t>
+            </a:r>
+            <a:r>
+              <a:rPr lang="zh-CN" altLang="zh-CN" sz="1200" b="0" i="0" kern="1200" dirty="0">
+                <a:solidFill>
+                  <a:schemeClr val="tx1"/>
+                </a:solidFill>
+                <a:effectLst/>
+                <a:latin typeface="+mn-lt"/>
+                <a:ea typeface="+mn-ea"/>
+                <a:cs typeface="+mn-cs"/>
+              </a:rPr>
+              <a:t>的模型还在树突端 (Dend 0.8) 测到了同样的共振。在真实大脑的海马 CA1 区，远端树突的 HCN 密度极高</a:t>
+            </a:r>
+            <a:r>
+              <a:rPr lang="zh-CN" altLang="en-US" sz="1200" b="0" i="0" kern="1200" dirty="0">
+                <a:solidFill>
+                  <a:schemeClr val="tx1"/>
+                </a:solidFill>
+                <a:effectLst/>
+                <a:latin typeface="+mn-lt"/>
+                <a:ea typeface="+mn-ea"/>
+                <a:cs typeface="+mn-cs"/>
+              </a:rPr>
+              <a:t>，我们的模型也定性的考虑了这点，设置了一个线性梯度分布，胞体是</a:t>
+            </a:r>
+            <a:r>
+              <a:rPr lang="en-US" altLang="zh-CN" sz="1200" b="0" i="0" kern="1200" dirty="0">
+                <a:solidFill>
+                  <a:schemeClr val="tx1"/>
+                </a:solidFill>
+                <a:effectLst/>
+                <a:latin typeface="+mn-lt"/>
+                <a:ea typeface="+mn-ea"/>
+                <a:cs typeface="+mn-cs"/>
+              </a:rPr>
+              <a:t>0.25g_h</a:t>
+            </a:r>
+            <a:r>
+              <a:rPr lang="zh-CN" altLang="en-US" sz="1200" b="0" i="0" kern="1200" dirty="0">
+                <a:solidFill>
+                  <a:schemeClr val="tx1"/>
+                </a:solidFill>
+                <a:effectLst/>
+                <a:latin typeface="+mn-lt"/>
+                <a:ea typeface="+mn-ea"/>
+                <a:cs typeface="+mn-cs"/>
+              </a:rPr>
+              <a:t>，远端的密度大约是</a:t>
+            </a:r>
+            <a:r>
+              <a:rPr lang="en-US" altLang="zh-CN" sz="1200" b="0" i="0" kern="1200" dirty="0" err="1">
+                <a:solidFill>
+                  <a:schemeClr val="tx1"/>
+                </a:solidFill>
+                <a:effectLst/>
+                <a:latin typeface="+mn-lt"/>
+                <a:ea typeface="+mn-ea"/>
+                <a:cs typeface="+mn-cs"/>
+              </a:rPr>
+              <a:t>g_h</a:t>
+            </a:r>
+            <a:r>
+              <a:rPr lang="en-US" altLang="zh-CN" sz="1200" b="0" i="0" kern="1200" dirty="0">
+                <a:solidFill>
+                  <a:schemeClr val="tx1"/>
+                </a:solidFill>
+                <a:effectLst/>
+                <a:latin typeface="+mn-lt"/>
+                <a:ea typeface="+mn-ea"/>
+                <a:cs typeface="+mn-cs"/>
+              </a:rPr>
+              <a:t>,</a:t>
+            </a:r>
+            <a:r>
+              <a:rPr lang="zh-CN" altLang="en-US" sz="1200" b="0" i="0" kern="1200" dirty="0">
+                <a:solidFill>
+                  <a:schemeClr val="tx1"/>
+                </a:solidFill>
+                <a:effectLst/>
+                <a:latin typeface="+mn-lt"/>
+                <a:ea typeface="+mn-ea"/>
+                <a:cs typeface="+mn-cs"/>
+              </a:rPr>
+              <a:t>是胞体的四倍，这种分布</a:t>
+            </a:r>
+            <a:r>
+              <a:rPr lang="zh-CN" altLang="zh-CN" sz="1200" b="0" i="0" kern="1200" dirty="0">
+                <a:solidFill>
+                  <a:schemeClr val="tx1"/>
+                </a:solidFill>
+                <a:effectLst/>
+                <a:latin typeface="+mn-lt"/>
+                <a:ea typeface="+mn-ea"/>
+                <a:cs typeface="+mn-cs"/>
+              </a:rPr>
+              <a:t>确保了远端和近端突触输入的公平竞争与时间同步</a:t>
+            </a:r>
+            <a:r>
+              <a:rPr lang="zh-CN" altLang="en-US" sz="1200" b="0" i="0" kern="1200" dirty="0">
+                <a:solidFill>
+                  <a:schemeClr val="tx1"/>
+                </a:solidFill>
+                <a:effectLst/>
+                <a:latin typeface="+mn-lt"/>
+                <a:ea typeface="+mn-ea"/>
+                <a:cs typeface="+mn-cs"/>
+              </a:rPr>
               <a:t>。据我们查找的资料，真实的大脑，远端的密度可能是胞体密度几十倍。</a:t>
             </a:r>
             <a:endParaRPr lang="zh-CN" altLang="en-US" dirty="0"/>
@@ -3040,6 +3055,546 @@
       <p:sp>
         <p:nvSpPr>
           <p:cNvPr id="4" name="灯片编号占位符 3"/>
+          <p:cNvSpPr>
+            <a:spLocks noGrp="1"/>
+          </p:cNvSpPr>
+          <p:nvPr>
+            <p:ph type="sldNum" sz="quarter" idx="5"/>
+          </p:nvPr>
+        </p:nvSpPr>
+        <p:spPr/>
+        <p:txBody>
+          <a:bodyPr/>
+          <a:lstStyle/>
+          <a:p>
+            <a:fld id="{46D80658-9F01-48E8-A529-84FBF04BFF31}" type="slidenum">
+              <a:rPr lang="zh-CN" altLang="en-US" smtClean="0"/>
+              <a:t>7</a:t>
+            </a:fld>
+            <a:endParaRPr lang="zh-CN" altLang="en-US"/>
+          </a:p>
+        </p:txBody>
+      </p:sp>
+    </p:spTree>
+    <p:extLst>
+      <p:ext uri="{BB962C8B-B14F-4D97-AF65-F5344CB8AC3E}">
+        <p14:creationId xmlns:p14="http://schemas.microsoft.com/office/powerpoint/2010/main" val="3070713736"/>
+      </p:ext>
+    </p:extLst>
+  </p:cSld>
+  <p:clrMapOvr>
+    <a:masterClrMapping/>
+  </p:clrMapOvr>
+</p:notes>
+</file>
+
+<file path=ppt/notesSlides/notesSlide7.xml><?xml version="1.0" encoding="utf-8"?>
+<p:notes xmlns:a="http://schemas.openxmlformats.org/drawingml/2006/main" xmlns:r="http://schemas.openxmlformats.org/officeDocument/2006/relationships" xmlns:p="http://schemas.openxmlformats.org/presentationml/2006/main">
+  <p:cSld>
+    <p:spTree>
+      <p:nvGrpSpPr>
+        <p:cNvPr id="1" name=""/>
+        <p:cNvGrpSpPr/>
+        <p:nvPr/>
+      </p:nvGrpSpPr>
+      <p:grpSpPr>
+        <a:xfrm>
+          <a:off x="0" y="0"/>
+          <a:ext cx="0" cy="0"/>
+          <a:chOff x="0" y="0"/>
+          <a:chExt cx="0" cy="0"/>
+        </a:xfrm>
+      </p:grpSpPr>
+      <p:sp>
+        <p:nvSpPr>
+          <p:cNvPr id="2" name="幻灯片图像占位符 1"/>
+          <p:cNvSpPr>
+            <a:spLocks noGrp="1" noRot="1" noChangeAspect="1"/>
+          </p:cNvSpPr>
+          <p:nvPr>
+            <p:ph type="sldImg"/>
+          </p:nvPr>
+        </p:nvSpPr>
+        <p:spPr/>
+      </p:sp>
+      <p:sp>
+        <p:nvSpPr>
+          <p:cNvPr id="3" name="备注占位符 2"/>
+          <p:cNvSpPr>
+            <a:spLocks noGrp="1"/>
+          </p:cNvSpPr>
+          <p:nvPr>
+            <p:ph type="body" idx="1"/>
+          </p:nvPr>
+        </p:nvSpPr>
+        <p:spPr/>
+        <p:txBody>
+          <a:bodyPr/>
+          <a:lstStyle/>
+          <a:p>
+            <a:r>
+              <a:rPr lang="zh-CN" altLang="zh-CN" sz="1200" b="0" i="0" kern="1200" dirty="0">
+                <a:solidFill>
+                  <a:schemeClr val="tx1"/>
+                </a:solidFill>
+                <a:effectLst/>
+                <a:latin typeface="+mn-lt"/>
+                <a:ea typeface="+mn-ea"/>
+                <a:cs typeface="+mn-cs"/>
+              </a:rPr>
+              <a:t>在注入扫频电流前，我先用负向方波电流</a:t>
+            </a:r>
+            <a:r>
+              <a:rPr lang="en-US" altLang="zh-CN" sz="1200" b="0" i="0" kern="1200" dirty="0">
+                <a:solidFill>
+                  <a:schemeClr val="tx1"/>
+                </a:solidFill>
+                <a:effectLst/>
+                <a:latin typeface="+mn-lt"/>
+                <a:ea typeface="+mn-ea"/>
+                <a:cs typeface="+mn-cs"/>
+              </a:rPr>
+              <a:t>-0.05nA</a:t>
+            </a:r>
+            <a:r>
+              <a:rPr lang="zh-CN" altLang="zh-CN" sz="1200" b="0" i="0" kern="1200" dirty="0">
+                <a:solidFill>
+                  <a:schemeClr val="tx1"/>
+                </a:solidFill>
+                <a:effectLst/>
+                <a:latin typeface="+mn-lt"/>
+                <a:ea typeface="+mn-ea"/>
+                <a:cs typeface="+mn-cs"/>
+              </a:rPr>
+              <a:t>验证了通道的合法性。如图所示，红色曲线展现了经典的 Sag 现象，证明 HCN 通道成功充当了对抗超极化的‘电压减震器</a:t>
+            </a:r>
+            <a:r>
+              <a:rPr lang="zh-CN" altLang="en-US" sz="1200" b="0" i="0" kern="1200" dirty="0">
+                <a:solidFill>
+                  <a:schemeClr val="tx1"/>
+                </a:solidFill>
+                <a:effectLst/>
+                <a:latin typeface="+mn-lt"/>
+                <a:ea typeface="+mn-ea"/>
+                <a:cs typeface="+mn-cs"/>
+              </a:rPr>
+              <a:t>。</a:t>
+            </a:r>
+            <a:r>
+              <a:rPr lang="zh-CN" altLang="zh-CN" sz="1200" b="0" i="0" kern="1200" dirty="0">
+                <a:solidFill>
+                  <a:schemeClr val="tx1"/>
+                </a:solidFill>
+                <a:effectLst/>
+                <a:latin typeface="+mn-lt"/>
+                <a:ea typeface="+mn-ea"/>
+                <a:cs typeface="+mn-cs"/>
+              </a:rPr>
+              <a:t>完美复现了 2.0 mV 的 Sag recovery 和回跃去极化。</a:t>
+            </a:r>
+            <a:r>
+              <a:rPr lang="zh-CN" altLang="en-US" sz="1200" b="0" i="0" kern="1200" dirty="0">
+                <a:solidFill>
+                  <a:schemeClr val="tx1"/>
+                </a:solidFill>
+                <a:effectLst/>
+                <a:latin typeface="+mn-lt"/>
+                <a:ea typeface="+mn-ea"/>
+                <a:cs typeface="+mn-cs"/>
+              </a:rPr>
+              <a:t>右边这张图说明了我们外加的扫频电流</a:t>
+            </a:r>
+            <a:r>
+              <a:rPr lang="zh-CN" altLang="zh-CN" sz="1200" b="0" i="0" kern="1200" dirty="0">
+                <a:solidFill>
+                  <a:schemeClr val="tx1"/>
+                </a:solidFill>
+                <a:effectLst/>
+                <a:latin typeface="+mn-lt"/>
+                <a:ea typeface="+mn-ea"/>
+                <a:cs typeface="+mn-cs"/>
+              </a:rPr>
+              <a:t>足够小，细胞完全处于**“亚阈值（Subthreshold）”**状态。只有在这种线性/微扰状态下，后面计算阻抗和共振才在数学上具有合法性</a:t>
+            </a:r>
+            <a:r>
+              <a:rPr lang="zh-CN" altLang="en-US" sz="1200" b="0" i="0" kern="1200" dirty="0">
+                <a:solidFill>
+                  <a:schemeClr val="tx1"/>
+                </a:solidFill>
+                <a:effectLst/>
+                <a:latin typeface="+mn-lt"/>
+                <a:ea typeface="+mn-ea"/>
+                <a:cs typeface="+mn-cs"/>
+              </a:rPr>
+              <a:t>，同时可以发现电压变化会稍微小一点，这是因为额外增加了离子通道。</a:t>
+            </a:r>
+            <a:endParaRPr lang="zh-CN" altLang="en-US" dirty="0"/>
+          </a:p>
+        </p:txBody>
+      </p:sp>
+      <p:sp>
+        <p:nvSpPr>
+          <p:cNvPr id="4" name="灯片编号占位符 3"/>
+          <p:cNvSpPr>
+            <a:spLocks noGrp="1"/>
+          </p:cNvSpPr>
+          <p:nvPr>
+            <p:ph type="sldNum" sz="quarter" idx="5"/>
+          </p:nvPr>
+        </p:nvSpPr>
+        <p:spPr/>
+        <p:txBody>
+          <a:bodyPr/>
+          <a:lstStyle/>
+          <a:p>
+            <a:fld id="{46D80658-9F01-48E8-A529-84FBF04BFF31}" type="slidenum">
+              <a:rPr lang="zh-CN" altLang="en-US" smtClean="0"/>
+              <a:t>8</a:t>
+            </a:fld>
+            <a:endParaRPr lang="zh-CN" altLang="en-US"/>
+          </a:p>
+        </p:txBody>
+      </p:sp>
+    </p:spTree>
+    <p:extLst>
+      <p:ext uri="{BB962C8B-B14F-4D97-AF65-F5344CB8AC3E}">
+        <p14:creationId xmlns:p14="http://schemas.microsoft.com/office/powerpoint/2010/main" val="64001801"/>
+      </p:ext>
+    </p:extLst>
+  </p:cSld>
+  <p:clrMapOvr>
+    <a:masterClrMapping/>
+  </p:clrMapOvr>
+</p:notes>
+</file>
+
+<file path=ppt/notesSlides/notesSlide8.xml><?xml version="1.0" encoding="utf-8"?>
+<p:notes xmlns:a="http://schemas.openxmlformats.org/drawingml/2006/main" xmlns:r="http://schemas.openxmlformats.org/officeDocument/2006/relationships" xmlns:p="http://schemas.openxmlformats.org/presentationml/2006/main">
+  <p:cSld>
+    <p:spTree>
+      <p:nvGrpSpPr>
+        <p:cNvPr id="1" name=""/>
+        <p:cNvGrpSpPr/>
+        <p:nvPr/>
+      </p:nvGrpSpPr>
+      <p:grpSpPr>
+        <a:xfrm>
+          <a:off x="0" y="0"/>
+          <a:ext cx="0" cy="0"/>
+          <a:chOff x="0" y="0"/>
+          <a:chExt cx="0" cy="0"/>
+        </a:xfrm>
+      </p:grpSpPr>
+      <p:sp>
+        <p:nvSpPr>
+          <p:cNvPr id="2" name="幻灯片图像占位符 1"/>
+          <p:cNvSpPr>
+            <a:spLocks noGrp="1" noRot="1" noChangeAspect="1"/>
+          </p:cNvSpPr>
+          <p:nvPr>
+            <p:ph type="sldImg"/>
+          </p:nvPr>
+        </p:nvSpPr>
+        <p:spPr/>
+      </p:sp>
+      <p:sp>
+        <p:nvSpPr>
+          <p:cNvPr id="3" name="备注占位符 2"/>
+          <p:cNvSpPr>
+            <a:spLocks noGrp="1"/>
+          </p:cNvSpPr>
+          <p:nvPr>
+            <p:ph type="body" idx="1"/>
+          </p:nvPr>
+        </p:nvSpPr>
+        <p:spPr/>
+        <p:txBody>
+          <a:bodyPr/>
+          <a:lstStyle/>
+          <a:p>
+            <a:r>
+              <a:rPr lang="zh-CN" altLang="zh-CN" sz="1200" b="0" i="0" kern="1200" dirty="0">
+                <a:solidFill>
+                  <a:schemeClr val="tx1"/>
+                </a:solidFill>
+                <a:effectLst/>
+                <a:latin typeface="+mn-lt"/>
+                <a:ea typeface="+mn-ea"/>
+                <a:cs typeface="+mn-cs"/>
+              </a:rPr>
+              <a:t>对于 RC 电容下凹的衰减曲线，这种算法会不可避免地捕捉到一个 0.036 的数学曲率伪影</a:t>
+            </a:r>
+            <a:r>
+              <a:rPr lang="zh-CN" altLang="en-US" sz="1200" b="0" i="0" kern="1200" dirty="0">
+                <a:solidFill>
+                  <a:schemeClr val="tx1"/>
+                </a:solidFill>
+                <a:effectLst/>
+                <a:latin typeface="+mn-lt"/>
+                <a:ea typeface="+mn-ea"/>
+                <a:cs typeface="+mn-cs"/>
+              </a:rPr>
+              <a:t>。</a:t>
+            </a:r>
+            <a:r>
+              <a:rPr lang="zh-CN" altLang="zh-CN" sz="1200" b="0" i="0" kern="1200" dirty="0">
+                <a:solidFill>
+                  <a:schemeClr val="tx1"/>
+                </a:solidFill>
+                <a:effectLst/>
+                <a:latin typeface="+mn-lt"/>
+                <a:ea typeface="+mn-ea"/>
+                <a:cs typeface="+mn-cs"/>
+              </a:rPr>
+              <a:t>HCN 通道加入后跃升至 0.062，是将共振能力</a:t>
+            </a:r>
+            <a:r>
+              <a:rPr lang="zh-CN" altLang="zh-CN" sz="1200" b="1" i="0" kern="1200" dirty="0">
+                <a:solidFill>
+                  <a:schemeClr val="tx1"/>
+                </a:solidFill>
+                <a:effectLst/>
+                <a:latin typeface="+mn-lt"/>
+                <a:ea typeface="+mn-ea"/>
+                <a:cs typeface="+mn-cs"/>
+              </a:rPr>
+              <a:t>绝对翻倍</a:t>
+            </a:r>
+            <a:r>
+              <a:rPr lang="zh-CN" altLang="zh-CN" sz="1200" b="0" i="0" kern="1200" dirty="0">
+                <a:solidFill>
+                  <a:schemeClr val="tx1"/>
+                </a:solidFill>
+                <a:effectLst/>
+                <a:latin typeface="+mn-lt"/>
+                <a:ea typeface="+mn-ea"/>
+                <a:cs typeface="+mn-cs"/>
+              </a:rPr>
+              <a:t>的真实生物学效应。配合非线性的动作电位阈值，这微小的亚阈值放大足以决定神经元是否</a:t>
+            </a:r>
+            <a:r>
+              <a:rPr lang="en-US" altLang="zh-CN" sz="1200" b="0" i="0" kern="1200" dirty="0">
+                <a:solidFill>
+                  <a:schemeClr val="tx1"/>
+                </a:solidFill>
+                <a:effectLst/>
+                <a:latin typeface="+mn-lt"/>
+                <a:ea typeface="+mn-ea"/>
+                <a:cs typeface="+mn-cs"/>
+              </a:rPr>
+              <a:t>fire</a:t>
+            </a:r>
+            <a:r>
+              <a:rPr lang="zh-CN" altLang="en-US" sz="1200" b="0" i="0" kern="1200" dirty="0">
+                <a:solidFill>
+                  <a:schemeClr val="tx1"/>
+                </a:solidFill>
+                <a:effectLst/>
+                <a:latin typeface="+mn-lt"/>
+                <a:ea typeface="+mn-ea"/>
+                <a:cs typeface="+mn-cs"/>
+              </a:rPr>
+              <a:t>。</a:t>
+            </a:r>
+            <a:endParaRPr lang="zh-CN" altLang="en-US" dirty="0"/>
+          </a:p>
+        </p:txBody>
+      </p:sp>
+      <p:sp>
+        <p:nvSpPr>
+          <p:cNvPr id="4" name="灯片编号占位符 3"/>
+          <p:cNvSpPr>
+            <a:spLocks noGrp="1"/>
+          </p:cNvSpPr>
+          <p:nvPr>
+            <p:ph type="sldNum" sz="quarter" idx="5"/>
+          </p:nvPr>
+        </p:nvSpPr>
+        <p:spPr/>
+        <p:txBody>
+          <a:bodyPr/>
+          <a:lstStyle/>
+          <a:p>
+            <a:fld id="{46D80658-9F01-48E8-A529-84FBF04BFF31}" type="slidenum">
+              <a:rPr lang="zh-CN" altLang="en-US" smtClean="0"/>
+              <a:t>9</a:t>
+            </a:fld>
+            <a:endParaRPr lang="zh-CN" altLang="en-US"/>
+          </a:p>
+        </p:txBody>
+      </p:sp>
+    </p:spTree>
+    <p:extLst>
+      <p:ext uri="{BB962C8B-B14F-4D97-AF65-F5344CB8AC3E}">
+        <p14:creationId xmlns:p14="http://schemas.microsoft.com/office/powerpoint/2010/main" val="453243283"/>
+      </p:ext>
+    </p:extLst>
+  </p:cSld>
+  <p:clrMapOvr>
+    <a:masterClrMapping/>
+  </p:clrMapOvr>
+</p:notes>
+</file>
+
+<file path=ppt/notesSlides/notesSlide9.xml><?xml version="1.0" encoding="utf-8"?>
+<p:notes xmlns:a="http://schemas.openxmlformats.org/drawingml/2006/main" xmlns:r="http://schemas.openxmlformats.org/officeDocument/2006/relationships" xmlns:p="http://schemas.openxmlformats.org/presentationml/2006/main">
+  <p:cSld>
+    <p:spTree>
+      <p:nvGrpSpPr>
+        <p:cNvPr id="1" name="">
+          <a:extLst>
+            <a:ext uri="{FF2B5EF4-FFF2-40B4-BE49-F238E27FC236}">
+              <a16:creationId xmlns:a16="http://schemas.microsoft.com/office/drawing/2014/main" id="{A16B6A9A-C7BD-3396-E80B-9FFAFDF2BAC8}"/>
+            </a:ext>
+          </a:extLst>
+        </p:cNvPr>
+        <p:cNvGrpSpPr/>
+        <p:nvPr/>
+      </p:nvGrpSpPr>
+      <p:grpSpPr>
+        <a:xfrm>
+          <a:off x="0" y="0"/>
+          <a:ext cx="0" cy="0"/>
+          <a:chOff x="0" y="0"/>
+          <a:chExt cx="0" cy="0"/>
+        </a:xfrm>
+      </p:grpSpPr>
+      <p:sp>
+        <p:nvSpPr>
+          <p:cNvPr id="2" name="幻灯片图像占位符 1">
+            <a:extLst>
+              <a:ext uri="{FF2B5EF4-FFF2-40B4-BE49-F238E27FC236}">
+                <a16:creationId xmlns:a16="http://schemas.microsoft.com/office/drawing/2014/main" id="{C9D7D4BB-3371-A5E7-5EE2-7A5951011C4D}"/>
+              </a:ext>
+            </a:extLst>
+          </p:cNvPr>
+          <p:cNvSpPr>
+            <a:spLocks noGrp="1" noRot="1" noChangeAspect="1"/>
+          </p:cNvSpPr>
+          <p:nvPr>
+            <p:ph type="sldImg"/>
+          </p:nvPr>
+        </p:nvSpPr>
+        <p:spPr/>
+      </p:sp>
+      <p:sp>
+        <p:nvSpPr>
+          <p:cNvPr id="3" name="备注占位符 2">
+            <a:extLst>
+              <a:ext uri="{FF2B5EF4-FFF2-40B4-BE49-F238E27FC236}">
+                <a16:creationId xmlns:a16="http://schemas.microsoft.com/office/drawing/2014/main" id="{05CD17FC-DAA5-0FE8-EE26-3AB3ADCB0EEF}"/>
+              </a:ext>
+            </a:extLst>
+          </p:cNvPr>
+          <p:cNvSpPr>
+            <a:spLocks noGrp="1"/>
+          </p:cNvSpPr>
+          <p:nvPr>
+            <p:ph type="body" idx="1"/>
+          </p:nvPr>
+        </p:nvSpPr>
+        <p:spPr/>
+        <p:txBody>
+          <a:bodyPr/>
+          <a:lstStyle/>
+          <a:p>
+            <a:r>
+              <a:rPr lang="zh-CN" altLang="zh-CN" sz="1200" b="0" i="0" kern="1200" dirty="0">
+                <a:solidFill>
+                  <a:schemeClr val="tx1"/>
+                </a:solidFill>
+                <a:effectLst/>
+                <a:latin typeface="+mn-lt"/>
+                <a:ea typeface="+mn-ea"/>
+                <a:cs typeface="+mn-cs"/>
+              </a:rPr>
+              <a:t>对于 RC 电容下凹的衰减曲线，这种算法会不可避免地捕捉到一个 0.036 的数学曲率伪影</a:t>
+            </a:r>
+            <a:r>
+              <a:rPr lang="zh-CN" altLang="en-US" sz="1200" b="0" i="0" kern="1200" dirty="0">
+                <a:solidFill>
+                  <a:schemeClr val="tx1"/>
+                </a:solidFill>
+                <a:effectLst/>
+                <a:latin typeface="+mn-lt"/>
+                <a:ea typeface="+mn-ea"/>
+                <a:cs typeface="+mn-cs"/>
+              </a:rPr>
+              <a:t>。</a:t>
+            </a:r>
+            <a:r>
+              <a:rPr lang="zh-CN" altLang="zh-CN" sz="1200" b="0" i="0" kern="1200" dirty="0">
+                <a:solidFill>
+                  <a:schemeClr val="tx1"/>
+                </a:solidFill>
+                <a:effectLst/>
+                <a:latin typeface="+mn-lt"/>
+                <a:ea typeface="+mn-ea"/>
+                <a:cs typeface="+mn-cs"/>
+              </a:rPr>
+              <a:t>HCN 通道加入后跃升至 0.062，是将共振能力</a:t>
+            </a:r>
+            <a:r>
+              <a:rPr lang="zh-CN" altLang="zh-CN" sz="1200" b="1" i="0" kern="1200" dirty="0">
+                <a:solidFill>
+                  <a:schemeClr val="tx1"/>
+                </a:solidFill>
+                <a:effectLst/>
+                <a:latin typeface="+mn-lt"/>
+                <a:ea typeface="+mn-ea"/>
+                <a:cs typeface="+mn-cs"/>
+              </a:rPr>
+              <a:t>绝对翻倍</a:t>
+            </a:r>
+            <a:r>
+              <a:rPr lang="zh-CN" altLang="zh-CN" sz="1200" b="0" i="0" kern="1200" dirty="0">
+                <a:solidFill>
+                  <a:schemeClr val="tx1"/>
+                </a:solidFill>
+                <a:effectLst/>
+                <a:latin typeface="+mn-lt"/>
+                <a:ea typeface="+mn-ea"/>
+                <a:cs typeface="+mn-cs"/>
+              </a:rPr>
+              <a:t>的真实生物学效应。配合非线性的动作电位阈值，这微小的亚阈值放大足以决定神经元是否</a:t>
+            </a:r>
+            <a:r>
+              <a:rPr lang="en-US" altLang="zh-CN" sz="1200" b="0" i="0" kern="1200" dirty="0">
+                <a:solidFill>
+                  <a:schemeClr val="tx1"/>
+                </a:solidFill>
+                <a:effectLst/>
+                <a:latin typeface="+mn-lt"/>
+                <a:ea typeface="+mn-ea"/>
+                <a:cs typeface="+mn-cs"/>
+              </a:rPr>
+              <a:t>fire</a:t>
+            </a:r>
+            <a:r>
+              <a:rPr lang="zh-CN" altLang="en-US" sz="1200" b="0" i="0" kern="1200" dirty="0">
+                <a:solidFill>
+                  <a:schemeClr val="tx1"/>
+                </a:solidFill>
+                <a:effectLst/>
+                <a:latin typeface="+mn-lt"/>
+                <a:ea typeface="+mn-ea"/>
+                <a:cs typeface="+mn-cs"/>
+              </a:rPr>
+              <a:t>。</a:t>
+            </a:r>
+            <a:endParaRPr lang="zh-CN" altLang="en-US" dirty="0"/>
+          </a:p>
+        </p:txBody>
+      </p:sp>
+      <p:sp>
+        <p:nvSpPr>
+          <p:cNvPr id="4" name="灯片编号占位符 3">
+            <a:extLst>
+              <a:ext uri="{FF2B5EF4-FFF2-40B4-BE49-F238E27FC236}">
+                <a16:creationId xmlns:a16="http://schemas.microsoft.com/office/drawing/2014/main" id="{EF7F8EDB-7FAA-BFC9-8522-C6C61227FB30}"/>
+              </a:ext>
+            </a:extLst>
+          </p:cNvPr>
           <p:cNvSpPr>
             <a:spLocks noGrp="1"/>
           </p:cNvSpPr>
@@ -3063,7 +3618,7 @@
     </p:spTree>
     <p:extLst>
       <p:ext uri="{BB962C8B-B14F-4D97-AF65-F5344CB8AC3E}">
-        <p14:creationId xmlns:p14="http://schemas.microsoft.com/office/powerpoint/2010/main" val="3070713736"/>
+        <p14:creationId xmlns:p14="http://schemas.microsoft.com/office/powerpoint/2010/main" val="143261351"/>
       </p:ext>
     </p:extLst>
   </p:cSld>
@@ -3220,7 +3775,7 @@
           <a:p>
             <a:fld id="{73DEAA0B-170A-4D33-B5AB-2BB9271AD51B}" type="datetimeFigureOut">
               <a:rPr lang="zh-CN" altLang="en-US" smtClean="0"/>
-              <a:t>2026/5/30</a:t>
+              <a:t>2026/6/2</a:t>
             </a:fld>
             <a:endParaRPr lang="zh-CN" altLang="en-US"/>
           </a:p>
@@ -3418,7 +3973,7 @@
           <a:p>
             <a:fld id="{73DEAA0B-170A-4D33-B5AB-2BB9271AD51B}" type="datetimeFigureOut">
               <a:rPr lang="zh-CN" altLang="en-US" smtClean="0"/>
-              <a:t>2026/5/30</a:t>
+              <a:t>2026/6/2</a:t>
             </a:fld>
             <a:endParaRPr lang="zh-CN" altLang="en-US"/>
           </a:p>
@@ -3626,7 +4181,7 @@
           <a:p>
             <a:fld id="{73DEAA0B-170A-4D33-B5AB-2BB9271AD51B}" type="datetimeFigureOut">
               <a:rPr lang="zh-CN" altLang="en-US" smtClean="0"/>
-              <a:t>2026/5/30</a:t>
+              <a:t>2026/6/2</a:t>
             </a:fld>
             <a:endParaRPr lang="zh-CN" altLang="en-US"/>
           </a:p>
@@ -3824,7 +4379,7 @@
           <a:p>
             <a:fld id="{73DEAA0B-170A-4D33-B5AB-2BB9271AD51B}" type="datetimeFigureOut">
               <a:rPr lang="zh-CN" altLang="en-US" smtClean="0"/>
-              <a:t>2026/5/30</a:t>
+              <a:t>2026/6/2</a:t>
             </a:fld>
             <a:endParaRPr lang="zh-CN" altLang="en-US"/>
           </a:p>
@@ -4099,7 +4654,7 @@
           <a:p>
             <a:fld id="{73DEAA0B-170A-4D33-B5AB-2BB9271AD51B}" type="datetimeFigureOut">
               <a:rPr lang="zh-CN" altLang="en-US" smtClean="0"/>
-              <a:t>2026/5/30</a:t>
+              <a:t>2026/6/2</a:t>
             </a:fld>
             <a:endParaRPr lang="zh-CN" altLang="en-US"/>
           </a:p>
@@ -4364,7 +4919,7 @@
           <a:p>
             <a:fld id="{73DEAA0B-170A-4D33-B5AB-2BB9271AD51B}" type="datetimeFigureOut">
               <a:rPr lang="zh-CN" altLang="en-US" smtClean="0"/>
-              <a:t>2026/5/30</a:t>
+              <a:t>2026/6/2</a:t>
             </a:fld>
             <a:endParaRPr lang="zh-CN" altLang="en-US"/>
           </a:p>
@@ -4776,7 +5331,7 @@
           <a:p>
             <a:fld id="{73DEAA0B-170A-4D33-B5AB-2BB9271AD51B}" type="datetimeFigureOut">
               <a:rPr lang="zh-CN" altLang="en-US" smtClean="0"/>
-              <a:t>2026/5/30</a:t>
+              <a:t>2026/6/2</a:t>
             </a:fld>
             <a:endParaRPr lang="zh-CN" altLang="en-US"/>
           </a:p>
@@ -4917,7 +5472,7 @@
           <a:p>
             <a:fld id="{73DEAA0B-170A-4D33-B5AB-2BB9271AD51B}" type="datetimeFigureOut">
               <a:rPr lang="zh-CN" altLang="en-US" smtClean="0"/>
-              <a:t>2026/5/30</a:t>
+              <a:t>2026/6/2</a:t>
             </a:fld>
             <a:endParaRPr lang="zh-CN" altLang="en-US"/>
           </a:p>
@@ -5030,7 +5585,7 @@
           <a:p>
             <a:fld id="{73DEAA0B-170A-4D33-B5AB-2BB9271AD51B}" type="datetimeFigureOut">
               <a:rPr lang="zh-CN" altLang="en-US" smtClean="0"/>
-              <a:t>2026/5/30</a:t>
+              <a:t>2026/6/2</a:t>
             </a:fld>
             <a:endParaRPr lang="zh-CN" altLang="en-US"/>
           </a:p>
@@ -5341,7 +5896,7 @@
           <a:p>
             <a:fld id="{73DEAA0B-170A-4D33-B5AB-2BB9271AD51B}" type="datetimeFigureOut">
               <a:rPr lang="zh-CN" altLang="en-US" smtClean="0"/>
-              <a:t>2026/5/30</a:t>
+              <a:t>2026/6/2</a:t>
             </a:fld>
             <a:endParaRPr lang="zh-CN" altLang="en-US"/>
           </a:p>
@@ -5629,7 +6184,7 @@
           <a:p>
             <a:fld id="{73DEAA0B-170A-4D33-B5AB-2BB9271AD51B}" type="datetimeFigureOut">
               <a:rPr lang="zh-CN" altLang="en-US" smtClean="0"/>
-              <a:t>2026/5/30</a:t>
+              <a:t>2026/6/2</a:t>
             </a:fld>
             <a:endParaRPr lang="zh-CN" altLang="en-US"/>
           </a:p>
@@ -5870,7 +6425,7 @@
           <a:p>
             <a:fld id="{73DEAA0B-170A-4D33-B5AB-2BB9271AD51B}" type="datetimeFigureOut">
               <a:rPr lang="zh-CN" altLang="en-US" smtClean="0"/>
-              <a:t>2026/5/30</a:t>
+              <a:t>2026/6/2</a:t>
             </a:fld>
             <a:endParaRPr lang="zh-CN" altLang="en-US"/>
           </a:p>
@@ -6305,8 +6860,145 @@
         </p:nvSpPr>
         <p:spPr>
           <a:xfrm>
-            <a:off x="1451429" y="1230085"/>
-            <a:ext cx="9035143" cy="2387600"/>
+            <a:off x="822029" y="1090897"/>
+            <a:ext cx="10547941" cy="3507221"/>
+          </a:xfrm>
+        </p:spPr>
+        <p:txBody>
+          <a:bodyPr>
+            <a:normAutofit fontScale="90000"/>
+          </a:bodyPr>
+          <a:lstStyle/>
+          <a:p>
+            <a:pPr>
+              <a:lnSpc>
+                <a:spcPct val="150000"/>
+              </a:lnSpc>
+            </a:pPr>
+            <a:r>
+              <a:rPr lang="zh-CN" altLang="zh-CN" sz="7300" b="1" dirty="0">
+                <a:latin typeface="黑体" panose="02010609060101010101" pitchFamily="49" charset="-122"/>
+                <a:ea typeface="黑体" panose="02010609060101010101" pitchFamily="49" charset="-122"/>
+              </a:rPr>
+              <a:t>大脑的动态调谐器</a:t>
+            </a:r>
+            <a:br>
+              <a:rPr lang="en-US" altLang="zh-CN" sz="7300" b="1" dirty="0">
+                <a:latin typeface="黑体" panose="02010609060101010101" pitchFamily="49" charset="-122"/>
+                <a:ea typeface="黑体" panose="02010609060101010101" pitchFamily="49" charset="-122"/>
+              </a:rPr>
+            </a:br>
+            <a:r>
+              <a:rPr lang="en-US" altLang="zh-CN" sz="2700" b="1" dirty="0">
+                <a:effectLst>
+                  <a:outerShdw blurRad="38100" dist="38100" dir="2700000" algn="tl">
+                    <a:srgbClr val="000000">
+                      <a:alpha val="43137"/>
+                    </a:srgbClr>
+                  </a:outerShdw>
+                </a:effectLst>
+              </a:rPr>
+              <a:t>——</a:t>
+            </a:r>
+            <a:r>
+              <a:rPr lang="zh-CN" altLang="en-US" sz="2700" b="1" dirty="0">
+                <a:effectLst>
+                  <a:outerShdw blurRad="38100" dist="38100" dir="2700000" algn="tl">
+                    <a:srgbClr val="000000">
+                      <a:alpha val="43137"/>
+                    </a:srgbClr>
+                  </a:outerShdw>
+                </a:effectLst>
+              </a:rPr>
+              <a:t>以</a:t>
+            </a:r>
+            <a:r>
+              <a:rPr lang="en-US" altLang="zh-CN" sz="2700" b="1" dirty="0">
+                <a:effectLst>
+                  <a:outerShdw blurRad="38100" dist="38100" dir="2700000" algn="tl">
+                    <a:srgbClr val="000000">
+                      <a:alpha val="43137"/>
+                    </a:srgbClr>
+                  </a:outerShdw>
+                </a:effectLst>
+              </a:rPr>
+              <a:t>HCN</a:t>
+            </a:r>
+            <a:r>
+              <a:rPr lang="zh-CN" altLang="en-US" sz="2700" b="1" dirty="0">
+                <a:effectLst>
+                  <a:outerShdw blurRad="38100" dist="38100" dir="2700000" algn="tl">
+                    <a:srgbClr val="000000">
+                      <a:alpha val="43137"/>
+                    </a:srgbClr>
+                  </a:outerShdw>
+                </a:effectLst>
+              </a:rPr>
+              <a:t>通道的亚阈值共振为切片，</a:t>
+            </a:r>
+            <a:br>
+              <a:rPr lang="en-US" altLang="zh-CN" sz="2700" b="1" dirty="0">
+                <a:effectLst>
+                  <a:outerShdw blurRad="38100" dist="38100" dir="2700000" algn="tl">
+                    <a:srgbClr val="000000">
+                      <a:alpha val="43137"/>
+                    </a:srgbClr>
+                  </a:outerShdw>
+                </a:effectLst>
+              </a:rPr>
+            </a:br>
+            <a:r>
+              <a:rPr lang="zh-CN" altLang="en-US" sz="2700" b="1" dirty="0">
+                <a:effectLst>
+                  <a:outerShdw blurRad="38100" dist="38100" dir="2700000" algn="tl">
+                    <a:srgbClr val="000000">
+                      <a:alpha val="43137"/>
+                    </a:srgbClr>
+                  </a:outerShdw>
+                </a:effectLst>
+              </a:rPr>
+              <a:t>看神经元频率选择性的电生理机制</a:t>
+            </a:r>
+            <a:br>
+              <a:rPr lang="en-US" altLang="zh-CN" sz="2400" dirty="0"/>
+            </a:br>
+            <a:br>
+              <a:rPr lang="en-US" altLang="zh-CN" sz="2400" dirty="0"/>
+            </a:br>
+            <a:r>
+              <a:rPr lang="zh-CN" altLang="zh-CN" sz="2700" b="1" dirty="0">
+                <a:latin typeface="黑体" panose="02010609060101010101" pitchFamily="49" charset="-122"/>
+                <a:ea typeface="黑体" panose="02010609060101010101" pitchFamily="49" charset="-122"/>
+              </a:rPr>
+              <a:t>生物智能导论 - 讨论项目汇报</a:t>
+            </a:r>
+            <a:endParaRPr lang="zh-CN" altLang="en-US" sz="2400" b="1" dirty="0">
+              <a:latin typeface="黑体" panose="02010609060101010101" pitchFamily="49" charset="-122"/>
+              <a:ea typeface="黑体" panose="02010609060101010101" pitchFamily="49" charset="-122"/>
+            </a:endParaRPr>
+          </a:p>
+        </p:txBody>
+      </p:sp>
+      <p:sp>
+        <p:nvSpPr>
+          <p:cNvPr id="3" name="副标题 2">
+            <a:extLst>
+              <a:ext uri="{FF2B5EF4-FFF2-40B4-BE49-F238E27FC236}">
+                <a16:creationId xmlns:a16="http://schemas.microsoft.com/office/drawing/2014/main" id="{86CB7FF7-E9B7-0E55-FCF0-A0EF377DF240}"/>
+              </a:ext>
+            </a:extLst>
+          </p:cNvPr>
+          <p:cNvSpPr>
+            <a:spLocks noGrp="1"/>
+          </p:cNvSpPr>
+          <p:nvPr>
+            <p:ph type="subTitle" idx="1"/>
+          </p:nvPr>
+        </p:nvSpPr>
+        <p:spPr>
+          <a:xfrm>
+            <a:off x="1641674" y="4837457"/>
+            <a:ext cx="9144000" cy="1655762"/>
           </a:xfrm>
         </p:spPr>
         <p:txBody>
@@ -6316,52 +7008,18 @@
           <a:lstStyle/>
           <a:p>
             <a:r>
-              <a:rPr lang="zh-CN" altLang="zh-CN" sz="3600" b="1" dirty="0"/>
-              <a:t>大脑的动态调谐器：HCN 通道介导的亚阈值共振与神经信息编码</a:t>
-            </a:r>
-            <a:br>
-              <a:rPr lang="en-US" altLang="zh-CN" sz="3200" dirty="0"/>
-            </a:br>
-            <a:br>
-              <a:rPr lang="en-US" altLang="zh-CN" sz="3200" dirty="0"/>
-            </a:br>
-            <a:r>
-              <a:rPr lang="zh-CN" altLang="zh-CN" sz="2400" b="1" dirty="0"/>
-              <a:t>生物智能导论 - 讨论项目汇报</a:t>
-            </a:r>
-            <a:endParaRPr lang="zh-CN" altLang="en-US" sz="2400" b="1" dirty="0"/>
-          </a:p>
-        </p:txBody>
-      </p:sp>
-      <p:sp>
-        <p:nvSpPr>
-          <p:cNvPr id="3" name="副标题 2">
-            <a:extLst>
-              <a:ext uri="{FF2B5EF4-FFF2-40B4-BE49-F238E27FC236}">
-                <a16:creationId xmlns:a16="http://schemas.microsoft.com/office/drawing/2014/main" id="{86CB7FF7-E9B7-0E55-FCF0-A0EF377DF240}"/>
-              </a:ext>
-            </a:extLst>
-          </p:cNvPr>
-          <p:cNvSpPr>
-            <a:spLocks noGrp="1"/>
-          </p:cNvSpPr>
-          <p:nvPr>
-            <p:ph type="subTitle" idx="1"/>
-          </p:nvPr>
-        </p:nvSpPr>
-        <p:spPr>
-          <a:xfrm>
-            <a:off x="1451429" y="3972153"/>
-            <a:ext cx="9144000" cy="1655762"/>
-          </a:xfrm>
-        </p:spPr>
-        <p:txBody>
-          <a:bodyPr/>
-          <a:lstStyle/>
-          <a:p>
-            <a:r>
-              <a:rPr lang="zh-CN" altLang="en-US" dirty="0"/>
-              <a:t>组员：徐梓航 洪玮骏 李沂桉</a:t>
+              <a:rPr lang="zh-CN" altLang="en-US" sz="2000" dirty="0"/>
+              <a:t>组员：</a:t>
+            </a:r>
+            <a:endParaRPr lang="en-US" altLang="zh-CN" sz="2000" dirty="0"/>
+          </a:p>
+          <a:p>
+            <a:r>
+              <a:rPr lang="zh-CN" altLang="en-US" sz="2000" b="1" dirty="0">
+                <a:latin typeface="华文宋体" panose="02010600040101010101" pitchFamily="2" charset="-122"/>
+                <a:ea typeface="华文宋体" panose="02010600040101010101" pitchFamily="2" charset="-122"/>
+              </a:rPr>
+              <a:t>徐梓航  洪玮骏 李沂桉</a:t>
             </a:r>
           </a:p>
         </p:txBody>
@@ -6376,6 +7034,18 @@
   <p:clrMapOvr>
     <a:masterClrMapping/>
   </p:clrMapOvr>
+  <mc:AlternateContent xmlns:mc="http://schemas.openxmlformats.org/markup-compatibility/2006">
+    <mc:Choice xmlns:p159="http://schemas.microsoft.com/office/powerpoint/2015/09/main" Requires="p159">
+      <p:transition xmlns:p14="http://schemas.microsoft.com/office/powerpoint/2010/main" spd="slow" p14:dur="2000">
+        <p159:morph option="byObject"/>
+      </p:transition>
+    </mc:Choice>
+    <mc:Fallback>
+      <p:transition spd="slow">
+        <p:fade/>
+      </p:transition>
+    </mc:Fallback>
+  </mc:AlternateContent>
 </p:sld>
 </file>
 
@@ -6384,7 +7054,13 @@
   <p:cSld>
     <p:spTree>
       <p:nvGrpSpPr>
-        <p:cNvPr id="1" name=""/>
+        <p:cNvPr id="1" name="">
+          <a:extLst>
+            <a:ext uri="{FF2B5EF4-FFF2-40B4-BE49-F238E27FC236}">
+              <a16:creationId xmlns:a16="http://schemas.microsoft.com/office/drawing/2014/main" id="{F96846CF-8FA4-71E7-0C83-3554B3DDD7AC}"/>
+            </a:ext>
+          </a:extLst>
+        </p:cNvPr>
         <p:cNvGrpSpPr/>
         <p:nvPr/>
       </p:nvGrpSpPr>
@@ -6401,7 +7077,7 @@
           <p:cNvPr id="2" name="标题 1">
             <a:extLst>
               <a:ext uri="{FF2B5EF4-FFF2-40B4-BE49-F238E27FC236}">
-                <a16:creationId xmlns:a16="http://schemas.microsoft.com/office/drawing/2014/main" id="{C95E79E9-37B8-D744-62D8-0F678190A91A}"/>
+                <a16:creationId xmlns:a16="http://schemas.microsoft.com/office/drawing/2014/main" id="{674AC601-658E-2F6B-D296-D5F56D0C36CB}"/>
               </a:ext>
             </a:extLst>
           </p:cNvPr>
@@ -6412,188 +7088,31 @@
             <p:ph type="title"/>
           </p:nvPr>
         </p:nvSpPr>
-        <p:spPr/>
-        <p:txBody>
-          <a:bodyPr/>
-          <a:lstStyle/>
-          <a:p>
-            <a:r>
-              <a:rPr lang="zh-CN" altLang="zh-CN" dirty="0"/>
-              <a:t>树突的独立计算与空间编码</a:t>
-            </a:r>
-            <a:endParaRPr lang="zh-CN" altLang="en-US" dirty="0"/>
-          </a:p>
-        </p:txBody>
-      </p:sp>
-      <p:pic>
-        <p:nvPicPr>
-          <p:cNvPr id="5" name="内容占位符 4">
-            <a:extLst>
-              <a:ext uri="{FF2B5EF4-FFF2-40B4-BE49-F238E27FC236}">
-                <a16:creationId xmlns:a16="http://schemas.microsoft.com/office/drawing/2014/main" id="{00AC73C7-4900-95AB-400E-0AE85C3BF397}"/>
-              </a:ext>
-            </a:extLst>
-          </p:cNvPr>
-          <p:cNvPicPr>
-            <a:picLocks noGrp="1" noChangeAspect="1"/>
-          </p:cNvPicPr>
-          <p:nvPr>
-            <p:ph idx="1"/>
-          </p:nvPr>
-        </p:nvPicPr>
-        <p:blipFill>
-          <a:blip r:embed="rId3">
-            <a:extLst>
-              <a:ext uri="{28A0092B-C50C-407E-A947-70E740481C1C}">
-                <a14:useLocalDpi xmlns:a14="http://schemas.microsoft.com/office/drawing/2010/main" val="0"/>
-              </a:ext>
-            </a:extLst>
-          </a:blip>
-          <a:stretch>
-            <a:fillRect/>
-          </a:stretch>
-        </p:blipFill>
         <p:spPr>
           <a:xfrm>
-            <a:off x="1647362" y="1512090"/>
-            <a:ext cx="9144019" cy="3657607"/>
-          </a:xfrm>
-          <a:prstGeom prst="rect">
-            <a:avLst/>
-          </a:prstGeom>
-        </p:spPr>
-      </p:pic>
-    </p:spTree>
-    <p:extLst>
-      <p:ext uri="{BB962C8B-B14F-4D97-AF65-F5344CB8AC3E}">
-        <p14:creationId xmlns:p14="http://schemas.microsoft.com/office/powerpoint/2010/main" val="4015620254"/>
-      </p:ext>
-    </p:extLst>
-  </p:cSld>
-  <p:clrMapOvr>
-    <a:masterClrMapping/>
-  </p:clrMapOvr>
-</p:sld>
-</file>
-
-<file path=ppt/slides/slide11.xml><?xml version="1.0" encoding="utf-8"?>
-<p:sld xmlns:a="http://schemas.openxmlformats.org/drawingml/2006/main" xmlns:r="http://schemas.openxmlformats.org/officeDocument/2006/relationships" xmlns:p="http://schemas.openxmlformats.org/presentationml/2006/main">
-  <p:cSld>
-    <p:spTree>
-      <p:nvGrpSpPr>
-        <p:cNvPr id="1" name=""/>
-        <p:cNvGrpSpPr/>
-        <p:nvPr/>
-      </p:nvGrpSpPr>
-      <p:grpSpPr>
-        <a:xfrm>
-          <a:off x="0" y="0"/>
-          <a:ext cx="0" cy="0"/>
-          <a:chOff x="0" y="0"/>
-          <a:chExt cx="0" cy="0"/>
-        </a:xfrm>
-      </p:grpSpPr>
-      <p:sp>
-        <p:nvSpPr>
-          <p:cNvPr id="2" name="标题 1">
-            <a:extLst>
-              <a:ext uri="{FF2B5EF4-FFF2-40B4-BE49-F238E27FC236}">
-                <a16:creationId xmlns:a16="http://schemas.microsoft.com/office/drawing/2014/main" id="{F6116DF1-BD7F-6451-B58D-F3DC47E05956}"/>
-              </a:ext>
-            </a:extLst>
-          </p:cNvPr>
-          <p:cNvSpPr>
-            <a:spLocks noGrp="1"/>
-          </p:cNvSpPr>
-          <p:nvPr>
-            <p:ph type="title"/>
-          </p:nvPr>
-        </p:nvSpPr>
-        <p:spPr>
-          <a:xfrm>
-            <a:off x="757381" y="60325"/>
+            <a:off x="522669" y="305034"/>
             <a:ext cx="10515600" cy="1325563"/>
           </a:xfrm>
         </p:spPr>
         <p:txBody>
-          <a:bodyPr/>
+          <a:bodyPr>
+            <a:normAutofit/>
+          </a:bodyPr>
           <a:lstStyle/>
           <a:p>
             <a:r>
-              <a:rPr lang="zh-CN" altLang="zh-CN" dirty="0"/>
-              <a:t>临床联系：早发性婴儿癫痫脑病（EIEE24）</a:t>
-            </a:r>
-            <a:endParaRPr lang="zh-CN" altLang="en-US" dirty="0"/>
-          </a:p>
-        </p:txBody>
-      </p:sp>
-      <p:sp>
-        <p:nvSpPr>
-          <p:cNvPr id="3" name="内容占位符 2">
-            <a:extLst>
-              <a:ext uri="{FF2B5EF4-FFF2-40B4-BE49-F238E27FC236}">
-                <a16:creationId xmlns:a16="http://schemas.microsoft.com/office/drawing/2014/main" id="{AAD32CA5-AB07-1C94-CD38-CD8FAC34DC75}"/>
-              </a:ext>
-            </a:extLst>
-          </p:cNvPr>
-          <p:cNvSpPr>
-            <a:spLocks noGrp="1"/>
-          </p:cNvSpPr>
-          <p:nvPr>
-            <p:ph idx="1"/>
-          </p:nvPr>
-        </p:nvSpPr>
-        <p:spPr>
-          <a:xfrm>
-            <a:off x="674254" y="1184997"/>
-            <a:ext cx="10515600" cy="4351338"/>
-          </a:xfrm>
-        </p:spPr>
-        <p:txBody>
-          <a:bodyPr/>
-          <a:lstStyle/>
-          <a:p>
-            <a:r>
-              <a:rPr lang="zh-CN" altLang="zh-CN" dirty="0"/>
-              <a:t>由 </a:t>
-            </a:r>
-            <a:r>
-              <a:rPr lang="zh-CN" altLang="zh-CN" b="1" dirty="0"/>
-              <a:t>HCN1 基因新生杂合突变</a:t>
-            </a:r>
-            <a:r>
-              <a:rPr lang="zh-CN" altLang="zh-CN" dirty="0"/>
-              <a:t> 引起的一种严重发育性癫痫脑病</a:t>
-            </a:r>
-            <a:endParaRPr lang="en-US" altLang="zh-CN" dirty="0"/>
-          </a:p>
-          <a:p>
-            <a:r>
-              <a:rPr lang="zh-CN" altLang="zh-CN" b="1" dirty="0"/>
-              <a:t>脑电图：</a:t>
-            </a:r>
-            <a:r>
-              <a:rPr lang="zh-CN" altLang="zh-CN" dirty="0"/>
-              <a:t>背景活动严重紊乱，缺乏正常的睡眠纺锤波和 Theta 节律</a:t>
-            </a:r>
-            <a:r>
-              <a:rPr lang="zh-CN" altLang="en-US" dirty="0"/>
-              <a:t>，</a:t>
-            </a:r>
-            <a:r>
-              <a:rPr lang="zh-CN" altLang="zh-CN" dirty="0"/>
-              <a:t>大量棘‑慢复合波爆发</a:t>
-            </a:r>
-            <a:endParaRPr lang="zh-CN" altLang="en-US" dirty="0"/>
+              <a:rPr lang="zh-CN" altLang="en-US" sz="3600" dirty="0"/>
+              <a:t>超极化情形下的结果</a:t>
+            </a:r>
           </a:p>
         </p:txBody>
       </p:sp>
       <p:pic>
         <p:nvPicPr>
-          <p:cNvPr id="5" name="图片 4">
-            <a:extLst>
-              <a:ext uri="{FF2B5EF4-FFF2-40B4-BE49-F238E27FC236}">
-                <a16:creationId xmlns:a16="http://schemas.microsoft.com/office/drawing/2014/main" id="{76A61578-C176-CA6C-DD37-7563778FCBFA}"/>
+          <p:cNvPr id="8" name="图片 7">
+            <a:extLst>
+              <a:ext uri="{FF2B5EF4-FFF2-40B4-BE49-F238E27FC236}">
+                <a16:creationId xmlns:a16="http://schemas.microsoft.com/office/drawing/2014/main" id="{AF8E919C-78A0-B3BC-D30D-7B28A9491004}"/>
               </a:ext>
             </a:extLst>
           </p:cNvPr>
@@ -6610,8 +7129,8 @@
         </p:blipFill>
         <p:spPr>
           <a:xfrm>
-            <a:off x="1002146" y="2510560"/>
-            <a:ext cx="4560454" cy="3688850"/>
+            <a:off x="419120" y="1830214"/>
+            <a:ext cx="3801577" cy="2900855"/>
           </a:xfrm>
           <a:prstGeom prst="rect">
             <a:avLst/>
@@ -6620,10 +7139,10 @@
       </p:pic>
       <p:pic>
         <p:nvPicPr>
-          <p:cNvPr id="6" name="内容占位符 4">
-            <a:extLst>
-              <a:ext uri="{FF2B5EF4-FFF2-40B4-BE49-F238E27FC236}">
-                <a16:creationId xmlns:a16="http://schemas.microsoft.com/office/drawing/2014/main" id="{427BB2D9-74DE-BD54-DC19-E2D6E9E2D430}"/>
+          <p:cNvPr id="10" name="图片 9">
+            <a:extLst>
+              <a:ext uri="{FF2B5EF4-FFF2-40B4-BE49-F238E27FC236}">
+                <a16:creationId xmlns:a16="http://schemas.microsoft.com/office/drawing/2014/main" id="{82966627-FFB1-1926-409C-0418F4857CD7}"/>
               </a:ext>
             </a:extLst>
           </p:cNvPr>
@@ -6633,33 +7152,57 @@
           <p:nvPr/>
         </p:nvPicPr>
         <p:blipFill>
-          <a:blip r:embed="rId4">
-            <a:extLst>
-              <a:ext uri="{28A0092B-C50C-407E-A947-70E740481C1C}">
-                <a14:useLocalDpi xmlns:a14="http://schemas.microsoft.com/office/drawing/2010/main" val="0"/>
-              </a:ext>
-            </a:extLst>
-          </a:blip>
+          <a:blip r:embed="rId4"/>
           <a:stretch>
             <a:fillRect/>
           </a:stretch>
         </p:blipFill>
         <p:spPr>
           <a:xfrm>
-            <a:off x="6206837" y="2325877"/>
-            <a:ext cx="4915586" cy="4058216"/>
+            <a:off x="4220697" y="1645359"/>
+            <a:ext cx="3979640" cy="3144984"/>
           </a:xfrm>
           <a:prstGeom prst="rect">
             <a:avLst/>
           </a:prstGeom>
         </p:spPr>
       </p:pic>
-      <p:sp>
-        <p:nvSpPr>
-          <p:cNvPr id="8" name="文本框 7">
-            <a:extLst>
-              <a:ext uri="{FF2B5EF4-FFF2-40B4-BE49-F238E27FC236}">
-                <a16:creationId xmlns:a16="http://schemas.microsoft.com/office/drawing/2014/main" id="{48A8B8F0-B92E-FF31-F084-8B5FF50E3426}"/>
+      <p:pic>
+        <p:nvPicPr>
+          <p:cNvPr id="12" name="图片 11">
+            <a:extLst>
+              <a:ext uri="{FF2B5EF4-FFF2-40B4-BE49-F238E27FC236}">
+                <a16:creationId xmlns:a16="http://schemas.microsoft.com/office/drawing/2014/main" id="{15768AEC-ADCB-132B-1DE9-04975E58E858}"/>
+              </a:ext>
+            </a:extLst>
+          </p:cNvPr>
+          <p:cNvPicPr>
+            <a:picLocks noChangeAspect="1"/>
+          </p:cNvPicPr>
+          <p:nvPr/>
+        </p:nvPicPr>
+        <p:blipFill>
+          <a:blip r:embed="rId5"/>
+          <a:stretch>
+            <a:fillRect/>
+          </a:stretch>
+        </p:blipFill>
+        <p:spPr>
+          <a:xfrm>
+            <a:off x="8293039" y="1717309"/>
+            <a:ext cx="3795105" cy="3013760"/>
+          </a:xfrm>
+          <a:prstGeom prst="rect">
+            <a:avLst/>
+          </a:prstGeom>
+        </p:spPr>
+      </p:pic>
+      <p:sp>
+        <p:nvSpPr>
+          <p:cNvPr id="14" name="文本框 13">
+            <a:extLst>
+              <a:ext uri="{FF2B5EF4-FFF2-40B4-BE49-F238E27FC236}">
+                <a16:creationId xmlns:a16="http://schemas.microsoft.com/office/drawing/2014/main" id="{EF5E5AEA-6517-648C-2938-EC3BD2DB79B7}"/>
               </a:ext>
             </a:extLst>
           </p:cNvPr>
@@ -6668,8 +7211,8 @@
         </p:nvSpPr>
         <p:spPr>
           <a:xfrm>
-            <a:off x="1235528" y="6211669"/>
-            <a:ext cx="9720943" cy="646331"/>
+            <a:off x="1720939" y="5388257"/>
+            <a:ext cx="9451484" cy="400110"/>
           </a:xfrm>
           <a:prstGeom prst="rect">
             <a:avLst/>
@@ -6677,45 +7220,458 @@
           <a:noFill/>
         </p:spPr>
         <p:txBody>
-          <a:bodyPr wrap="square" rtlCol="0">
+          <a:bodyPr wrap="square">
             <a:spAutoFit/>
           </a:bodyPr>
           <a:lstStyle/>
           <a:p>
             <a:r>
-              <a:rPr lang="zh-CN" altLang="zh-CN" b="1" dirty="0"/>
-              <a:t>Marini et al. (2018)</a:t>
-            </a:r>
-            <a:r>
-              <a:rPr lang="zh-CN" altLang="zh-CN" dirty="0"/>
-              <a:t> </a:t>
-            </a:r>
-            <a:r>
-              <a:rPr lang="zh-CN" altLang="zh-CN" i="1" dirty="0"/>
-              <a:t>HCN1 mutation spectrum: from neonatal epileptic encephalopathy to benign generalized epilepsy and beyond.</a:t>
-            </a:r>
-            <a:r>
-              <a:rPr lang="zh-CN" altLang="zh-CN" dirty="0"/>
-              <a:t> </a:t>
-            </a:r>
-            <a:r>
-              <a:rPr lang="zh-CN" altLang="zh-CN" b="1" dirty="0"/>
-              <a:t>Brain</a:t>
-            </a:r>
-            <a:endParaRPr lang="zh-CN" altLang="en-US" dirty="0"/>
+              <a:rPr lang="zh-CN" altLang="zh-CN" sz="2000" b="1" dirty="0">
+                <a:effectLst/>
+                <a:ea typeface="等线" panose="02010600030101010101" pitchFamily="2" charset="-122"/>
+                <a:cs typeface="Times New Roman" panose="02020603050405020304" pitchFamily="18" charset="0"/>
+              </a:rPr>
+              <a:t>随着超极化程度增加，</a:t>
+            </a:r>
+            <a:r>
+              <a:rPr lang="en-US" altLang="zh-CN" sz="2000" b="1" dirty="0">
+                <a:effectLst/>
+                <a:ea typeface="等线" panose="02010600030101010101" pitchFamily="2" charset="-122"/>
+                <a:cs typeface="Times New Roman" panose="02020603050405020304" pitchFamily="18" charset="0"/>
+              </a:rPr>
+              <a:t>HCN</a:t>
+            </a:r>
+            <a:r>
+              <a:rPr lang="zh-CN" altLang="zh-CN" sz="2000" b="1" dirty="0">
+                <a:effectLst/>
+                <a:ea typeface="等线" panose="02010600030101010101" pitchFamily="2" charset="-122"/>
+                <a:cs typeface="Times New Roman" panose="02020603050405020304" pitchFamily="18" charset="0"/>
+              </a:rPr>
+              <a:t>的</a:t>
+            </a:r>
+            <a:r>
+              <a:rPr lang="en-US" altLang="zh-CN" sz="2000" b="1" dirty="0">
+                <a:effectLst/>
+                <a:ea typeface="等线" panose="02010600030101010101" pitchFamily="2" charset="-122"/>
+                <a:cs typeface="Times New Roman" panose="02020603050405020304" pitchFamily="18" charset="0"/>
+              </a:rPr>
+              <a:t>sag</a:t>
+            </a:r>
+            <a:r>
+              <a:rPr lang="zh-CN" altLang="zh-CN" sz="2000" b="1" dirty="0">
+                <a:effectLst/>
+                <a:ea typeface="等线" panose="02010600030101010101" pitchFamily="2" charset="-122"/>
+                <a:cs typeface="Times New Roman" panose="02020603050405020304" pitchFamily="18" charset="0"/>
+              </a:rPr>
+              <a:t>效应以及</a:t>
+            </a:r>
+            <a:r>
+              <a:rPr lang="en-US" altLang="zh-CN" sz="2000" b="1" dirty="0">
+                <a:effectLst/>
+                <a:ea typeface="等线" panose="02010600030101010101" pitchFamily="2" charset="-122"/>
+                <a:cs typeface="Times New Roman" panose="02020603050405020304" pitchFamily="18" charset="0"/>
+              </a:rPr>
+              <a:t>recovery-rebound</a:t>
+            </a:r>
+            <a:r>
+              <a:rPr lang="zh-CN" altLang="zh-CN" sz="2000" b="1" dirty="0">
+                <a:effectLst/>
+                <a:ea typeface="等线" panose="02010600030101010101" pitchFamily="2" charset="-122"/>
+                <a:cs typeface="Times New Roman" panose="02020603050405020304" pitchFamily="18" charset="0"/>
+              </a:rPr>
+              <a:t>的效果也逐渐明显</a:t>
+            </a:r>
+            <a:endParaRPr lang="zh-CN" altLang="en-US" sz="2000" b="1" dirty="0"/>
           </a:p>
         </p:txBody>
       </p:sp>
     </p:spTree>
     <p:extLst>
       <p:ext uri="{BB962C8B-B14F-4D97-AF65-F5344CB8AC3E}">
-        <p14:creationId xmlns:p14="http://schemas.microsoft.com/office/powerpoint/2010/main" val="2106372733"/>
+        <p14:creationId xmlns:p14="http://schemas.microsoft.com/office/powerpoint/2010/main" val="2772338204"/>
       </p:ext>
     </p:extLst>
   </p:cSld>
   <p:clrMapOvr>
     <a:masterClrMapping/>
   </p:clrMapOvr>
+  <mc:AlternateContent xmlns:mc="http://schemas.openxmlformats.org/markup-compatibility/2006">
+    <mc:Choice xmlns:p159="http://schemas.microsoft.com/office/powerpoint/2015/09/main" Requires="p159">
+      <p:transition xmlns:p14="http://schemas.microsoft.com/office/powerpoint/2010/main" spd="slow" p14:dur="2000">
+        <p159:morph option="byObject"/>
+      </p:transition>
+    </mc:Choice>
+    <mc:Fallback>
+      <p:transition spd="slow">
+        <p:fade/>
+      </p:transition>
+    </mc:Fallback>
+  </mc:AlternateContent>
+</p:sld>
+</file>
+
+<file path=ppt/slides/slide11.xml><?xml version="1.0" encoding="utf-8"?>
+<p:sld xmlns:a="http://schemas.openxmlformats.org/drawingml/2006/main" xmlns:r="http://schemas.openxmlformats.org/officeDocument/2006/relationships" xmlns:p="http://schemas.openxmlformats.org/presentationml/2006/main">
+  <p:cSld>
+    <p:spTree>
+      <p:nvGrpSpPr>
+        <p:cNvPr id="1" name="">
+          <a:extLst>
+            <a:ext uri="{FF2B5EF4-FFF2-40B4-BE49-F238E27FC236}">
+              <a16:creationId xmlns:a16="http://schemas.microsoft.com/office/drawing/2014/main" id="{8A88355A-B88C-DF5E-B42A-3011CA8971B1}"/>
+            </a:ext>
+          </a:extLst>
+        </p:cNvPr>
+        <p:cNvGrpSpPr/>
+        <p:nvPr/>
+      </p:nvGrpSpPr>
+      <p:grpSpPr>
+        <a:xfrm>
+          <a:off x="0" y="0"/>
+          <a:ext cx="0" cy="0"/>
+          <a:chOff x="0" y="0"/>
+          <a:chExt cx="0" cy="0"/>
+        </a:xfrm>
+      </p:grpSpPr>
+      <p:sp>
+        <p:nvSpPr>
+          <p:cNvPr id="2" name="标题 1">
+            <a:extLst>
+              <a:ext uri="{FF2B5EF4-FFF2-40B4-BE49-F238E27FC236}">
+                <a16:creationId xmlns:a16="http://schemas.microsoft.com/office/drawing/2014/main" id="{FAC3E289-541E-AB65-2B32-E803707E86DE}"/>
+              </a:ext>
+            </a:extLst>
+          </p:cNvPr>
+          <p:cNvSpPr>
+            <a:spLocks noGrp="1"/>
+          </p:cNvSpPr>
+          <p:nvPr>
+            <p:ph type="title"/>
+          </p:nvPr>
+        </p:nvSpPr>
+        <p:spPr>
+          <a:xfrm>
+            <a:off x="522669" y="17171"/>
+            <a:ext cx="10515600" cy="1325563"/>
+          </a:xfrm>
+        </p:spPr>
+        <p:txBody>
+          <a:bodyPr>
+            <a:normAutofit/>
+          </a:bodyPr>
+          <a:lstStyle/>
+          <a:p>
+            <a:r>
+              <a:rPr lang="zh-CN" altLang="en-US" sz="3600" dirty="0"/>
+              <a:t>超极化情形下的结果</a:t>
+            </a:r>
+          </a:p>
+        </p:txBody>
+      </p:sp>
+      <p:pic>
+        <p:nvPicPr>
+          <p:cNvPr id="4" name="图片 3">
+            <a:extLst>
+              <a:ext uri="{FF2B5EF4-FFF2-40B4-BE49-F238E27FC236}">
+                <a16:creationId xmlns:a16="http://schemas.microsoft.com/office/drawing/2014/main" id="{E2C29142-78C6-5C27-A1D3-12AC0A71AC3F}"/>
+              </a:ext>
+            </a:extLst>
+          </p:cNvPr>
+          <p:cNvPicPr>
+            <a:picLocks noChangeAspect="1"/>
+          </p:cNvPicPr>
+          <p:nvPr/>
+        </p:nvPicPr>
+        <p:blipFill>
+          <a:blip r:embed="rId3"/>
+          <a:stretch>
+            <a:fillRect/>
+          </a:stretch>
+        </p:blipFill>
+        <p:spPr>
+          <a:xfrm>
+            <a:off x="214209" y="1298852"/>
+            <a:ext cx="5881791" cy="2312327"/>
+          </a:xfrm>
+          <a:prstGeom prst="rect">
+            <a:avLst/>
+          </a:prstGeom>
+        </p:spPr>
+      </p:pic>
+      <p:pic>
+        <p:nvPicPr>
+          <p:cNvPr id="6" name="图片 5">
+            <a:extLst>
+              <a:ext uri="{FF2B5EF4-FFF2-40B4-BE49-F238E27FC236}">
+                <a16:creationId xmlns:a16="http://schemas.microsoft.com/office/drawing/2014/main" id="{13193265-B057-E96B-2BA4-3510B6FAF6AE}"/>
+              </a:ext>
+            </a:extLst>
+          </p:cNvPr>
+          <p:cNvPicPr>
+            <a:picLocks noChangeAspect="1"/>
+          </p:cNvPicPr>
+          <p:nvPr/>
+        </p:nvPicPr>
+        <p:blipFill>
+          <a:blip r:embed="rId4"/>
+          <a:stretch>
+            <a:fillRect/>
+          </a:stretch>
+        </p:blipFill>
+        <p:spPr>
+          <a:xfrm>
+            <a:off x="3126229" y="4119175"/>
+            <a:ext cx="6181092" cy="2399344"/>
+          </a:xfrm>
+          <a:prstGeom prst="rect">
+            <a:avLst/>
+          </a:prstGeom>
+        </p:spPr>
+      </p:pic>
+      <p:cxnSp>
+        <p:nvCxnSpPr>
+          <p:cNvPr id="9" name="直接箭头连接符 8">
+            <a:extLst>
+              <a:ext uri="{FF2B5EF4-FFF2-40B4-BE49-F238E27FC236}">
+                <a16:creationId xmlns:a16="http://schemas.microsoft.com/office/drawing/2014/main" id="{EDB8DF08-52D2-E045-4F4B-5A70FF596BD3}"/>
+              </a:ext>
+            </a:extLst>
+          </p:cNvPr>
+          <p:cNvCxnSpPr>
+            <a:cxnSpLocks/>
+            <a:endCxn id="6" idx="1"/>
+          </p:cNvCxnSpPr>
+          <p:nvPr/>
+        </p:nvCxnSpPr>
+        <p:spPr>
+          <a:xfrm>
+            <a:off x="2339045" y="3611179"/>
+            <a:ext cx="787184" cy="1707668"/>
+          </a:xfrm>
+          <a:prstGeom prst="straightConnector1">
+            <a:avLst/>
+          </a:prstGeom>
+          <a:ln>
+            <a:tailEnd type="triangle"/>
+          </a:ln>
+        </p:spPr>
+        <p:style>
+          <a:lnRef idx="1">
+            <a:schemeClr val="accent1"/>
+          </a:lnRef>
+          <a:fillRef idx="0">
+            <a:schemeClr val="accent1"/>
+          </a:fillRef>
+          <a:effectRef idx="0">
+            <a:schemeClr val="accent1"/>
+          </a:effectRef>
+          <a:fontRef idx="minor">
+            <a:schemeClr val="tx1"/>
+          </a:fontRef>
+        </p:style>
+      </p:cxnSp>
+      <p:pic>
+        <p:nvPicPr>
+          <p:cNvPr id="12" name="图片 11">
+            <a:extLst>
+              <a:ext uri="{FF2B5EF4-FFF2-40B4-BE49-F238E27FC236}">
+                <a16:creationId xmlns:a16="http://schemas.microsoft.com/office/drawing/2014/main" id="{6C0E7B8A-6FFA-F84B-BA65-D4FC0A4EB73D}"/>
+              </a:ext>
+            </a:extLst>
+          </p:cNvPr>
+          <p:cNvPicPr>
+            <a:picLocks noChangeAspect="1"/>
+          </p:cNvPicPr>
+          <p:nvPr/>
+        </p:nvPicPr>
+        <p:blipFill>
+          <a:blip r:embed="rId5"/>
+          <a:stretch>
+            <a:fillRect/>
+          </a:stretch>
+        </p:blipFill>
+        <p:spPr>
+          <a:xfrm>
+            <a:off x="6035224" y="390178"/>
+            <a:ext cx="6032940" cy="2399344"/>
+          </a:xfrm>
+          <a:prstGeom prst="rect">
+            <a:avLst/>
+          </a:prstGeom>
+        </p:spPr>
+      </p:pic>
+      <p:cxnSp>
+        <p:nvCxnSpPr>
+          <p:cNvPr id="14" name="直接箭头连接符 13">
+            <a:extLst>
+              <a:ext uri="{FF2B5EF4-FFF2-40B4-BE49-F238E27FC236}">
+                <a16:creationId xmlns:a16="http://schemas.microsoft.com/office/drawing/2014/main" id="{2829D1E0-CF7A-FA51-9B02-D1253D7E86F3}"/>
+              </a:ext>
+            </a:extLst>
+          </p:cNvPr>
+          <p:cNvCxnSpPr>
+            <a:stCxn id="6" idx="0"/>
+            <a:endCxn id="12" idx="2"/>
+          </p:cNvCxnSpPr>
+          <p:nvPr/>
+        </p:nvCxnSpPr>
+        <p:spPr>
+          <a:xfrm flipV="1">
+            <a:off x="6216775" y="2789522"/>
+            <a:ext cx="2834919" cy="1329653"/>
+          </a:xfrm>
+          <a:prstGeom prst="straightConnector1">
+            <a:avLst/>
+          </a:prstGeom>
+          <a:ln>
+            <a:tailEnd type="triangle"/>
+          </a:ln>
+        </p:spPr>
+        <p:style>
+          <a:lnRef idx="1">
+            <a:schemeClr val="accent1"/>
+          </a:lnRef>
+          <a:fillRef idx="0">
+            <a:schemeClr val="accent1"/>
+          </a:fillRef>
+          <a:effectRef idx="0">
+            <a:schemeClr val="accent1"/>
+          </a:effectRef>
+          <a:fontRef idx="minor">
+            <a:schemeClr val="tx1"/>
+          </a:fontRef>
+        </p:style>
+      </p:cxnSp>
+      <p:sp>
+        <p:nvSpPr>
+          <p:cNvPr id="15" name="文本框 14">
+            <a:extLst>
+              <a:ext uri="{FF2B5EF4-FFF2-40B4-BE49-F238E27FC236}">
+                <a16:creationId xmlns:a16="http://schemas.microsoft.com/office/drawing/2014/main" id="{A9988AEE-5B3A-8BB8-6986-57DD3184BE3E}"/>
+              </a:ext>
+            </a:extLst>
+          </p:cNvPr>
+          <p:cNvSpPr txBox="1"/>
+          <p:nvPr/>
+        </p:nvSpPr>
+        <p:spPr>
+          <a:xfrm>
+            <a:off x="10016543" y="2738685"/>
+            <a:ext cx="1783725" cy="461665"/>
+          </a:xfrm>
+          <a:prstGeom prst="rect">
+            <a:avLst/>
+          </a:prstGeom>
+          <a:noFill/>
+        </p:spPr>
+        <p:txBody>
+          <a:bodyPr wrap="square" rtlCol="0">
+            <a:spAutoFit/>
+          </a:bodyPr>
+          <a:lstStyle/>
+          <a:p>
+            <a:r>
+              <a:rPr lang="en-US" altLang="zh-CN" sz="2400" b="1" dirty="0"/>
+              <a:t>-130mV</a:t>
+            </a:r>
+            <a:endParaRPr lang="zh-CN" altLang="en-US" sz="2400" b="1" dirty="0"/>
+          </a:p>
+        </p:txBody>
+      </p:sp>
+      <p:sp>
+        <p:nvSpPr>
+          <p:cNvPr id="18" name="文本框 17">
+            <a:extLst>
+              <a:ext uri="{FF2B5EF4-FFF2-40B4-BE49-F238E27FC236}">
+                <a16:creationId xmlns:a16="http://schemas.microsoft.com/office/drawing/2014/main" id="{01E7316A-EF14-62DE-FB7D-C1F0C62D65CB}"/>
+              </a:ext>
+            </a:extLst>
+          </p:cNvPr>
+          <p:cNvSpPr txBox="1"/>
+          <p:nvPr/>
+        </p:nvSpPr>
+        <p:spPr>
+          <a:xfrm>
+            <a:off x="9832253" y="5311985"/>
+            <a:ext cx="1783725" cy="461665"/>
+          </a:xfrm>
+          <a:prstGeom prst="rect">
+            <a:avLst/>
+          </a:prstGeom>
+          <a:noFill/>
+        </p:spPr>
+        <p:txBody>
+          <a:bodyPr wrap="square" rtlCol="0">
+            <a:spAutoFit/>
+          </a:bodyPr>
+          <a:lstStyle/>
+          <a:p>
+            <a:r>
+              <a:rPr lang="en-US" altLang="zh-CN" sz="2400" b="1" dirty="0"/>
+              <a:t>-110mV</a:t>
+            </a:r>
+            <a:endParaRPr lang="zh-CN" altLang="en-US" sz="2400" b="1" dirty="0"/>
+          </a:p>
+        </p:txBody>
+      </p:sp>
+      <p:sp>
+        <p:nvSpPr>
+          <p:cNvPr id="19" name="文本框 18">
+            <a:extLst>
+              <a:ext uri="{FF2B5EF4-FFF2-40B4-BE49-F238E27FC236}">
+                <a16:creationId xmlns:a16="http://schemas.microsoft.com/office/drawing/2014/main" id="{A4CDBDE5-6E46-17E5-5DDE-3A58C0C327F9}"/>
+              </a:ext>
+            </a:extLst>
+          </p:cNvPr>
+          <p:cNvSpPr txBox="1"/>
+          <p:nvPr/>
+        </p:nvSpPr>
+        <p:spPr>
+          <a:xfrm>
+            <a:off x="1001251" y="3657510"/>
+            <a:ext cx="1783725" cy="461665"/>
+          </a:xfrm>
+          <a:prstGeom prst="rect">
+            <a:avLst/>
+          </a:prstGeom>
+          <a:noFill/>
+        </p:spPr>
+        <p:txBody>
+          <a:bodyPr wrap="square" rtlCol="0">
+            <a:spAutoFit/>
+          </a:bodyPr>
+          <a:lstStyle/>
+          <a:p>
+            <a:r>
+              <a:rPr lang="en-US" altLang="zh-CN" sz="2400" b="1" dirty="0"/>
+              <a:t>-90mV</a:t>
+            </a:r>
+            <a:endParaRPr lang="zh-CN" altLang="en-US" sz="2400" b="1" dirty="0"/>
+          </a:p>
+        </p:txBody>
+      </p:sp>
+    </p:spTree>
+    <p:extLst>
+      <p:ext uri="{BB962C8B-B14F-4D97-AF65-F5344CB8AC3E}">
+        <p14:creationId xmlns:p14="http://schemas.microsoft.com/office/powerpoint/2010/main" val="711666526"/>
+      </p:ext>
+    </p:extLst>
+  </p:cSld>
+  <p:clrMapOvr>
+    <a:masterClrMapping/>
+  </p:clrMapOvr>
+  <mc:AlternateContent xmlns:mc="http://schemas.openxmlformats.org/markup-compatibility/2006">
+    <mc:Choice xmlns:p159="http://schemas.microsoft.com/office/powerpoint/2015/09/main" Requires="p159">
+      <p:transition xmlns:p14="http://schemas.microsoft.com/office/powerpoint/2010/main" spd="slow" p14:dur="2000">
+        <p159:morph option="byObject"/>
+      </p:transition>
+    </mc:Choice>
+    <mc:Fallback>
+      <p:transition spd="slow">
+        <p:fade/>
+      </p:transition>
+    </mc:Fallback>
+  </mc:AlternateContent>
 </p:sld>
 </file>
 
@@ -6741,7 +7697,7 @@
           <p:cNvPr id="2" name="标题 1">
             <a:extLst>
               <a:ext uri="{FF2B5EF4-FFF2-40B4-BE49-F238E27FC236}">
-                <a16:creationId xmlns:a16="http://schemas.microsoft.com/office/drawing/2014/main" id="{05B6E3FA-F5D8-A7B8-CD01-B6AF67CA3CB1}"/>
+                <a16:creationId xmlns:a16="http://schemas.microsoft.com/office/drawing/2014/main" id="{6CD92AD2-A0BA-E1A6-C107-06FD69E33E00}"/>
               </a:ext>
             </a:extLst>
           </p:cNvPr>
@@ -6752,38 +7708,161 @@
             <p:ph type="title"/>
           </p:nvPr>
         </p:nvSpPr>
-        <p:spPr/>
+        <p:spPr>
+          <a:xfrm>
+            <a:off x="838200" y="212725"/>
+            <a:ext cx="10515600" cy="1325563"/>
+          </a:xfrm>
+        </p:spPr>
         <p:txBody>
           <a:bodyPr/>
           <a:lstStyle/>
           <a:p>
             <a:r>
+              <a:rPr lang="zh-CN" altLang="zh-CN" dirty="0"/>
+              <a:t> 进阶发现：</a:t>
+            </a:r>
+            <a:r>
+              <a:rPr lang="en-US" altLang="zh-CN" dirty="0"/>
+              <a:t>naive-HH model</a:t>
+            </a:r>
+            <a:r>
               <a:rPr lang="zh-CN" altLang="en-US" dirty="0"/>
-              <a:t>总结</a:t>
-            </a:r>
-          </a:p>
-        </p:txBody>
-      </p:sp>
-      <p:sp>
-        <p:nvSpPr>
-          <p:cNvPr id="3" name="内容占位符 2">
-            <a:extLst>
-              <a:ext uri="{FF2B5EF4-FFF2-40B4-BE49-F238E27FC236}">
-                <a16:creationId xmlns:a16="http://schemas.microsoft.com/office/drawing/2014/main" id="{5777699A-E33D-6642-3818-3BC68F9CACC3}"/>
-              </a:ext>
-            </a:extLst>
-          </p:cNvPr>
-          <p:cNvSpPr>
-            <a:spLocks noGrp="1"/>
-          </p:cNvSpPr>
+              <a:t>的共振现象</a:t>
+            </a:r>
+            <a:r>
+              <a:rPr lang="zh-CN" altLang="zh-CN" dirty="0"/>
+              <a:t>？</a:t>
+            </a:r>
+            <a:endParaRPr lang="zh-CN" altLang="en-US" dirty="0"/>
+          </a:p>
+        </p:txBody>
+      </p:sp>
+      <p:pic>
+        <p:nvPicPr>
+          <p:cNvPr id="5" name="内容占位符 4">
+            <a:extLst>
+              <a:ext uri="{FF2B5EF4-FFF2-40B4-BE49-F238E27FC236}">
+                <a16:creationId xmlns:a16="http://schemas.microsoft.com/office/drawing/2014/main" id="{3919539E-3846-A60B-54CF-1EDCAAA19A4E}"/>
+              </a:ext>
+            </a:extLst>
+          </p:cNvPr>
+          <p:cNvPicPr>
+            <a:picLocks noGrp="1" noChangeAspect="1"/>
+          </p:cNvPicPr>
           <p:nvPr>
             <p:ph idx="1"/>
           </p:nvPr>
-        </p:nvSpPr>
+        </p:nvPicPr>
+        <p:blipFill>
+          <a:blip r:embed="rId3"/>
+          <a:stretch>
+            <a:fillRect/>
+          </a:stretch>
+        </p:blipFill>
         <p:spPr>
           <a:xfrm>
-            <a:off x="838200" y="1690688"/>
-            <a:ext cx="10515600" cy="1962604"/>
+            <a:off x="1004707" y="1687624"/>
+            <a:ext cx="5477024" cy="4351338"/>
+          </a:xfrm>
+          <a:prstGeom prst="rect">
+            <a:avLst/>
+          </a:prstGeom>
+        </p:spPr>
+      </p:pic>
+      <p:pic>
+        <p:nvPicPr>
+          <p:cNvPr id="4" name="图片 3">
+            <a:extLst>
+              <a:ext uri="{FF2B5EF4-FFF2-40B4-BE49-F238E27FC236}">
+                <a16:creationId xmlns:a16="http://schemas.microsoft.com/office/drawing/2014/main" id="{91FDF521-763E-0251-5056-B295B23C3209}"/>
+              </a:ext>
+            </a:extLst>
+          </p:cNvPr>
+          <p:cNvPicPr>
+            <a:picLocks noChangeAspect="1"/>
+          </p:cNvPicPr>
+          <p:nvPr/>
+        </p:nvPicPr>
+        <p:blipFill>
+          <a:blip r:embed="rId4"/>
+          <a:srcRect t="15790"/>
+          <a:stretch>
+            <a:fillRect/>
+          </a:stretch>
+        </p:blipFill>
+        <p:spPr>
+          <a:xfrm>
+            <a:off x="6634357" y="2427072"/>
+            <a:ext cx="5233607" cy="2872441"/>
+          </a:xfrm>
+          <a:prstGeom prst="rect">
+            <a:avLst/>
+          </a:prstGeom>
+        </p:spPr>
+      </p:pic>
+    </p:spTree>
+    <p:extLst>
+      <p:ext uri="{BB962C8B-B14F-4D97-AF65-F5344CB8AC3E}">
+        <p14:creationId xmlns:p14="http://schemas.microsoft.com/office/powerpoint/2010/main" val="1301971201"/>
+      </p:ext>
+    </p:extLst>
+  </p:cSld>
+  <p:clrMapOvr>
+    <a:masterClrMapping/>
+  </p:clrMapOvr>
+  <mc:AlternateContent xmlns:mc="http://schemas.openxmlformats.org/markup-compatibility/2006">
+    <mc:Choice xmlns:p159="http://schemas.microsoft.com/office/powerpoint/2015/09/main" Requires="p159">
+      <p:transition xmlns:p14="http://schemas.microsoft.com/office/powerpoint/2010/main" spd="slow" p14:dur="2000">
+        <p159:morph option="byObject"/>
+      </p:transition>
+    </mc:Choice>
+    <mc:Fallback>
+      <p:transition spd="slow">
+        <p:fade/>
+      </p:transition>
+    </mc:Fallback>
+  </mc:AlternateContent>
+</p:sld>
+</file>
+
+<file path=ppt/slides/slide13.xml><?xml version="1.0" encoding="utf-8"?>
+<p:sld xmlns:a="http://schemas.openxmlformats.org/drawingml/2006/main" xmlns:r="http://schemas.openxmlformats.org/officeDocument/2006/relationships" xmlns:p="http://schemas.openxmlformats.org/presentationml/2006/main">
+  <p:cSld>
+    <p:spTree>
+      <p:nvGrpSpPr>
+        <p:cNvPr id="1" name=""/>
+        <p:cNvGrpSpPr/>
+        <p:nvPr/>
+      </p:nvGrpSpPr>
+      <p:grpSpPr>
+        <a:xfrm>
+          <a:off x="0" y="0"/>
+          <a:ext cx="0" cy="0"/>
+          <a:chOff x="0" y="0"/>
+          <a:chExt cx="0" cy="0"/>
+        </a:xfrm>
+      </p:grpSpPr>
+      <p:sp>
+        <p:nvSpPr>
+          <p:cNvPr id="2" name="标题 1">
+            <a:extLst>
+              <a:ext uri="{FF2B5EF4-FFF2-40B4-BE49-F238E27FC236}">
+                <a16:creationId xmlns:a16="http://schemas.microsoft.com/office/drawing/2014/main" id="{34B2A1BD-A1D0-4DBD-B7ED-DD36921F00AE}"/>
+              </a:ext>
+            </a:extLst>
+          </p:cNvPr>
+          <p:cNvSpPr>
+            <a:spLocks noGrp="1"/>
+          </p:cNvSpPr>
+          <p:nvPr>
+            <p:ph type="title"/>
+          </p:nvPr>
+        </p:nvSpPr>
+        <p:spPr>
+          <a:xfrm>
+            <a:off x="342364" y="68915"/>
+            <a:ext cx="10515600" cy="1325563"/>
           </a:xfrm>
         </p:spPr>
         <p:txBody>
@@ -6792,43 +7871,79 @@
           <a:p>
             <a:r>
               <a:rPr lang="zh-CN" altLang="en-US" dirty="0"/>
-              <a:t>核心结论：</a:t>
-            </a:r>
-            <a:endParaRPr lang="en-US" altLang="zh-CN" dirty="0"/>
-          </a:p>
-          <a:p>
-            <a:pPr lvl="1"/>
-            <a:r>
-              <a:rPr lang="zh-CN" altLang="zh-CN" dirty="0"/>
-              <a:t>神经元并非简单的被动积分器，而是具有状态依赖性（State-dependent）的主动带通滤波器。</a:t>
-            </a:r>
-          </a:p>
-          <a:p>
-            <a:pPr lvl="1"/>
-            <a:r>
-              <a:rPr lang="zh-CN" altLang="zh-CN" dirty="0"/>
-              <a:t>HCN 与其它离子通道协同作用，构成了大脑处理宏观脑电信息的微观细胞基础。</a:t>
-            </a:r>
-            <a:endParaRPr lang="en-US" altLang="zh-CN" dirty="0"/>
-          </a:p>
-          <a:p>
-            <a:pPr marL="457200" lvl="1" indent="0">
-              <a:buNone/>
-            </a:pPr>
-            <a:endParaRPr lang="zh-CN" altLang="zh-CN" dirty="0"/>
-          </a:p>
-          <a:p>
-            <a:pPr lvl="1"/>
-            <a:endParaRPr lang="zh-CN" altLang="en-US" dirty="0"/>
-          </a:p>
-        </p:txBody>
-      </p:sp>
-      <p:sp>
-        <p:nvSpPr>
-          <p:cNvPr id="4" name="文本框 3">
-            <a:extLst>
-              <a:ext uri="{FF2B5EF4-FFF2-40B4-BE49-F238E27FC236}">
-                <a16:creationId xmlns:a16="http://schemas.microsoft.com/office/drawing/2014/main" id="{4C3E4DD3-EC57-99F9-4519-82AF475895E2}"/>
+              <a:t>可能的原因：钾离子通道</a:t>
+            </a:r>
+          </a:p>
+        </p:txBody>
+      </p:sp>
+      <p:pic>
+        <p:nvPicPr>
+          <p:cNvPr id="9" name="内容占位符 8">
+            <a:extLst>
+              <a:ext uri="{FF2B5EF4-FFF2-40B4-BE49-F238E27FC236}">
+                <a16:creationId xmlns:a16="http://schemas.microsoft.com/office/drawing/2014/main" id="{8FAEEC33-4426-F0B6-5FCB-16A9B7BDE212}"/>
+              </a:ext>
+            </a:extLst>
+          </p:cNvPr>
+          <p:cNvPicPr>
+            <a:picLocks noGrp="1" noChangeAspect="1"/>
+          </p:cNvPicPr>
+          <p:nvPr>
+            <p:ph idx="1"/>
+          </p:nvPr>
+        </p:nvPicPr>
+        <p:blipFill>
+          <a:blip r:embed="rId3"/>
+          <a:stretch>
+            <a:fillRect/>
+          </a:stretch>
+        </p:blipFill>
+        <p:spPr>
+          <a:xfrm>
+            <a:off x="768220" y="1234687"/>
+            <a:ext cx="3571960" cy="2805613"/>
+          </a:xfrm>
+          <a:prstGeom prst="rect">
+            <a:avLst/>
+          </a:prstGeom>
+        </p:spPr>
+      </p:pic>
+      <p:pic>
+        <p:nvPicPr>
+          <p:cNvPr id="11" name="图片 10">
+            <a:extLst>
+              <a:ext uri="{FF2B5EF4-FFF2-40B4-BE49-F238E27FC236}">
+                <a16:creationId xmlns:a16="http://schemas.microsoft.com/office/drawing/2014/main" id="{029ABE1C-80FA-76CB-5197-9E183C758971}"/>
+              </a:ext>
+            </a:extLst>
+          </p:cNvPr>
+          <p:cNvPicPr>
+            <a:picLocks noChangeAspect="1"/>
+          </p:cNvPicPr>
+          <p:nvPr/>
+        </p:nvPicPr>
+        <p:blipFill>
+          <a:blip r:embed="rId4"/>
+          <a:stretch>
+            <a:fillRect/>
+          </a:stretch>
+        </p:blipFill>
+        <p:spPr>
+          <a:xfrm>
+            <a:off x="4673601" y="1394478"/>
+            <a:ext cx="6680199" cy="2597169"/>
+          </a:xfrm>
+          <a:prstGeom prst="rect">
+            <a:avLst/>
+          </a:prstGeom>
+        </p:spPr>
+      </p:pic>
+      <p:sp>
+        <p:nvSpPr>
+          <p:cNvPr id="12" name="文本框 11">
+            <a:extLst>
+              <a:ext uri="{FF2B5EF4-FFF2-40B4-BE49-F238E27FC236}">
+                <a16:creationId xmlns:a16="http://schemas.microsoft.com/office/drawing/2014/main" id="{7C530ABC-BC76-117A-57C2-573B0B19CADC}"/>
               </a:ext>
             </a:extLst>
           </p:cNvPr>
@@ -6837,8 +7952,8 @@
         </p:nvSpPr>
         <p:spPr>
           <a:xfrm>
-            <a:off x="1299029" y="4361543"/>
-            <a:ext cx="9136742" cy="646331"/>
+            <a:off x="768220" y="4104130"/>
+            <a:ext cx="10939272" cy="2215991"/>
           </a:xfrm>
           <a:prstGeom prst="rect">
             <a:avLst/>
@@ -6851,9 +7966,753 @@
           </a:bodyPr>
           <a:lstStyle/>
           <a:p>
+            <a:r>
+              <a:rPr lang="zh-CN" altLang="en-US" sz="2000" dirty="0"/>
+              <a:t>抑制</a:t>
+            </a:r>
+            <a:r>
+              <a:rPr lang="en-US" altLang="zh-CN" sz="2000" dirty="0"/>
+              <a:t>/</a:t>
+            </a:r>
+            <a:r>
+              <a:rPr lang="zh-CN" altLang="en-US" sz="2000" dirty="0"/>
+              <a:t>超极化</a:t>
+            </a:r>
+            <a:r>
+              <a:rPr lang="zh-CN" altLang="zh-CN" sz="2000" dirty="0"/>
+              <a:t> (-</a:t>
+            </a:r>
+            <a:r>
+              <a:rPr lang="en-US" altLang="zh-CN" sz="2000" dirty="0"/>
+              <a:t>75</a:t>
+            </a:r>
+            <a:r>
+              <a:rPr lang="zh-CN" altLang="zh-CN" sz="2000" dirty="0"/>
+              <a:t>mV</a:t>
+            </a:r>
+            <a:r>
+              <a:rPr lang="en-US" altLang="zh-CN" sz="2000" dirty="0"/>
+              <a:t> and lower</a:t>
+            </a:r>
+            <a:r>
+              <a:rPr lang="zh-CN" altLang="zh-CN" sz="2000" dirty="0"/>
+              <a:t>)：HCN 通道</a:t>
+            </a:r>
+            <a:r>
+              <a:rPr lang="zh-CN" altLang="en-US" sz="2000" dirty="0"/>
+              <a:t>大量开放，</a:t>
+            </a:r>
+            <a:r>
+              <a:rPr lang="en-US" altLang="zh-CN" sz="2000" dirty="0"/>
+              <a:t>sag</a:t>
+            </a:r>
+            <a:r>
+              <a:rPr lang="zh-CN" altLang="en-US" sz="2000" dirty="0"/>
+              <a:t>效应明显</a:t>
+            </a:r>
+            <a:r>
+              <a:rPr lang="zh-CN" altLang="zh-CN" sz="2000" dirty="0"/>
+              <a:t>。</a:t>
+            </a:r>
+            <a:endParaRPr lang="en-US" altLang="zh-CN" sz="2000" dirty="0"/>
+          </a:p>
+          <a:p>
+            <a:endParaRPr lang="en-US" altLang="zh-CN" sz="2000" dirty="0"/>
+          </a:p>
+          <a:p>
+            <a:r>
+              <a:rPr lang="zh-CN" altLang="en-US" sz="2000" dirty="0"/>
+              <a:t>睡眠</a:t>
+            </a:r>
+            <a:r>
+              <a:rPr lang="en-US" altLang="zh-CN" sz="2000" dirty="0"/>
+              <a:t>/</a:t>
+            </a:r>
+            <a:r>
+              <a:rPr lang="zh-CN" altLang="en-US" sz="2000" dirty="0"/>
+              <a:t>静息 </a:t>
+            </a:r>
+            <a:r>
+              <a:rPr lang="en-US" altLang="zh-CN" sz="2000" dirty="0"/>
+              <a:t>(-75mV to -65mV)</a:t>
+            </a:r>
+            <a:r>
+              <a:rPr lang="zh-CN" altLang="en-US" sz="2000" dirty="0"/>
+              <a:t>：</a:t>
+            </a:r>
+            <a:r>
+              <a:rPr lang="en-US" altLang="zh-CN" sz="2000" dirty="0"/>
+              <a:t>HCN</a:t>
+            </a:r>
+            <a:r>
+              <a:rPr lang="zh-CN" altLang="en-US" sz="2000" dirty="0"/>
+              <a:t>通道起到</a:t>
+            </a:r>
+            <a:r>
+              <a:rPr lang="en-US" altLang="zh-CN" sz="2000" dirty="0"/>
+              <a:t>theta</a:t>
+            </a:r>
+            <a:r>
+              <a:rPr lang="zh-CN" altLang="en-US" sz="2000" dirty="0"/>
+              <a:t>波段的调谐作用。</a:t>
+            </a:r>
+            <a:endParaRPr lang="en-US" altLang="zh-CN" sz="2000" dirty="0"/>
+          </a:p>
+          <a:p>
+            <a:endParaRPr lang="zh-CN" altLang="zh-CN" sz="2000" dirty="0"/>
+          </a:p>
+          <a:p>
+            <a:r>
+              <a:rPr lang="zh-CN" altLang="zh-CN" sz="2000" dirty="0"/>
+              <a:t>警觉/活跃 (-65mV)：</a:t>
+            </a:r>
+            <a:r>
+              <a:rPr lang="zh-CN" altLang="en-US" sz="2000" dirty="0"/>
+              <a:t>这个电位 </a:t>
+            </a:r>
+            <a:r>
+              <a:rPr lang="zh-CN" altLang="zh-CN" sz="2000" dirty="0"/>
+              <a:t>HCN</a:t>
+            </a:r>
+            <a:r>
+              <a:rPr lang="en-US" altLang="zh-CN" sz="2000" dirty="0"/>
+              <a:t> </a:t>
+            </a:r>
+            <a:r>
+              <a:rPr lang="zh-CN" altLang="en-US" sz="2000" dirty="0"/>
+              <a:t>通道几乎关闭</a:t>
+            </a:r>
+            <a:r>
+              <a:rPr lang="zh-CN" altLang="zh-CN" sz="2000" dirty="0"/>
+              <a:t>，</a:t>
+            </a:r>
+            <a:r>
+              <a:rPr lang="zh-CN" altLang="en-US" sz="2000" dirty="0"/>
+              <a:t>但是</a:t>
+            </a:r>
+            <a:r>
+              <a:rPr lang="zh-CN" altLang="zh-CN" sz="2000" dirty="0"/>
+              <a:t>钾</a:t>
+            </a:r>
+            <a:r>
+              <a:rPr lang="zh-CN" altLang="en-US" sz="2000" dirty="0"/>
+              <a:t>离子</a:t>
+            </a:r>
+            <a:r>
+              <a:rPr lang="zh-CN" altLang="zh-CN" sz="2000" dirty="0"/>
+              <a:t>通道</a:t>
+            </a:r>
+            <a:r>
+              <a:rPr lang="zh-CN" altLang="en-US" sz="2000" dirty="0"/>
+              <a:t>因为电位变化被部分激活，其响应速度同样慢于</a:t>
+            </a:r>
+            <a:r>
+              <a:rPr lang="en-US" altLang="zh-CN" sz="2000" dirty="0"/>
+              <a:t>Na+</a:t>
+            </a:r>
+            <a:r>
+              <a:rPr lang="zh-CN" altLang="en-US" sz="2000" dirty="0"/>
+              <a:t>（约等于感抗的作用）</a:t>
+            </a:r>
+            <a:r>
+              <a:rPr lang="zh-CN" altLang="zh-CN" sz="2000" dirty="0"/>
+              <a:t>，</a:t>
+            </a:r>
+            <a:r>
+              <a:rPr lang="zh-CN" altLang="en-US" sz="2000" dirty="0"/>
+              <a:t>起到了共振效果，</a:t>
+            </a:r>
+            <a:r>
+              <a:rPr lang="zh-CN" altLang="zh-CN" sz="2000" dirty="0"/>
+              <a:t>调谐 Beta/Gamma 波</a:t>
+            </a:r>
+            <a:r>
+              <a:rPr lang="zh-CN" altLang="en-US" sz="2000" dirty="0"/>
+              <a:t>。</a:t>
+            </a:r>
+            <a:endParaRPr lang="zh-CN" altLang="zh-CN" sz="2000" dirty="0"/>
+          </a:p>
+          <a:p>
+            <a:endParaRPr lang="zh-CN" altLang="en-US" dirty="0"/>
+          </a:p>
+        </p:txBody>
+      </p:sp>
+    </p:spTree>
+    <p:extLst>
+      <p:ext uri="{BB962C8B-B14F-4D97-AF65-F5344CB8AC3E}">
+        <p14:creationId xmlns:p14="http://schemas.microsoft.com/office/powerpoint/2010/main" val="4078803702"/>
+      </p:ext>
+    </p:extLst>
+  </p:cSld>
+  <p:clrMapOvr>
+    <a:masterClrMapping/>
+  </p:clrMapOvr>
+  <mc:AlternateContent xmlns:mc="http://schemas.openxmlformats.org/markup-compatibility/2006">
+    <mc:Choice xmlns:p159="http://schemas.microsoft.com/office/powerpoint/2015/09/main" Requires="p159">
+      <p:transition xmlns:p14="http://schemas.microsoft.com/office/powerpoint/2010/main" spd="slow" p14:dur="2000">
+        <p159:morph option="byObject"/>
+      </p:transition>
+    </mc:Choice>
+    <mc:Fallback>
+      <p:transition spd="slow">
+        <p:fade/>
+      </p:transition>
+    </mc:Fallback>
+  </mc:AlternateContent>
+</p:sld>
+</file>
+
+<file path=ppt/slides/slide14.xml><?xml version="1.0" encoding="utf-8"?>
+<p:sld xmlns:a="http://schemas.openxmlformats.org/drawingml/2006/main" xmlns:r="http://schemas.openxmlformats.org/officeDocument/2006/relationships" xmlns:p="http://schemas.openxmlformats.org/presentationml/2006/main">
+  <p:cSld>
+    <p:spTree>
+      <p:nvGrpSpPr>
+        <p:cNvPr id="1" name=""/>
+        <p:cNvGrpSpPr/>
+        <p:nvPr/>
+      </p:nvGrpSpPr>
+      <p:grpSpPr>
+        <a:xfrm>
+          <a:off x="0" y="0"/>
+          <a:ext cx="0" cy="0"/>
+          <a:chOff x="0" y="0"/>
+          <a:chExt cx="0" cy="0"/>
+        </a:xfrm>
+      </p:grpSpPr>
+      <p:sp>
+        <p:nvSpPr>
+          <p:cNvPr id="2" name="标题 1">
+            <a:extLst>
+              <a:ext uri="{FF2B5EF4-FFF2-40B4-BE49-F238E27FC236}">
+                <a16:creationId xmlns:a16="http://schemas.microsoft.com/office/drawing/2014/main" id="{F6116DF1-BD7F-6451-B58D-F3DC47E05956}"/>
+              </a:ext>
+            </a:extLst>
+          </p:cNvPr>
+          <p:cNvSpPr>
+            <a:spLocks noGrp="1"/>
+          </p:cNvSpPr>
+          <p:nvPr>
+            <p:ph type="title"/>
+          </p:nvPr>
+        </p:nvSpPr>
+        <p:spPr>
+          <a:xfrm>
+            <a:off x="757381" y="60325"/>
+            <a:ext cx="10515600" cy="1325563"/>
+          </a:xfrm>
+        </p:spPr>
+        <p:txBody>
+          <a:bodyPr/>
+          <a:lstStyle/>
+          <a:p>
+            <a:r>
+              <a:rPr lang="zh-CN" altLang="zh-CN" dirty="0"/>
+              <a:t>临床联系：早发性婴儿癫痫脑病（EIEE24）</a:t>
+            </a:r>
+            <a:endParaRPr lang="zh-CN" altLang="en-US" dirty="0"/>
+          </a:p>
+        </p:txBody>
+      </p:sp>
+      <p:sp>
+        <p:nvSpPr>
+          <p:cNvPr id="3" name="内容占位符 2">
+            <a:extLst>
+              <a:ext uri="{FF2B5EF4-FFF2-40B4-BE49-F238E27FC236}">
+                <a16:creationId xmlns:a16="http://schemas.microsoft.com/office/drawing/2014/main" id="{AAD32CA5-AB07-1C94-CD38-CD8FAC34DC75}"/>
+              </a:ext>
+            </a:extLst>
+          </p:cNvPr>
+          <p:cNvSpPr>
+            <a:spLocks noGrp="1"/>
+          </p:cNvSpPr>
+          <p:nvPr>
+            <p:ph idx="1"/>
+          </p:nvPr>
+        </p:nvSpPr>
+        <p:spPr>
+          <a:xfrm>
+            <a:off x="674254" y="1184997"/>
+            <a:ext cx="10515600" cy="4351338"/>
+          </a:xfrm>
+        </p:spPr>
+        <p:txBody>
+          <a:bodyPr>
+            <a:normAutofit/>
+          </a:bodyPr>
+          <a:lstStyle/>
+          <a:p>
+            <a:r>
+              <a:rPr lang="zh-CN" altLang="zh-CN" sz="2400" dirty="0"/>
+              <a:t>由 </a:t>
+            </a:r>
+            <a:r>
+              <a:rPr lang="zh-CN" altLang="zh-CN" sz="2400" b="1" dirty="0"/>
+              <a:t>HCN1 基因新生杂合突变</a:t>
+            </a:r>
+            <a:r>
+              <a:rPr lang="zh-CN" altLang="zh-CN" sz="2400" dirty="0"/>
+              <a:t> 引起的一种严重发育性癫痫脑病</a:t>
+            </a:r>
+            <a:endParaRPr lang="en-US" altLang="zh-CN" sz="2400" dirty="0"/>
+          </a:p>
+          <a:p>
+            <a:r>
+              <a:rPr lang="zh-CN" altLang="zh-CN" sz="2400" b="1" dirty="0"/>
+              <a:t>脑电图：</a:t>
+            </a:r>
+            <a:r>
+              <a:rPr lang="zh-CN" altLang="zh-CN" sz="2400" dirty="0"/>
+              <a:t>背景活动严重紊乱，缺乏正常的睡眠纺锤波和 Theta 节律</a:t>
+            </a:r>
+            <a:r>
+              <a:rPr lang="zh-CN" altLang="en-US" sz="2400" dirty="0"/>
+              <a:t>，</a:t>
+            </a:r>
+            <a:r>
+              <a:rPr lang="zh-CN" altLang="zh-CN" sz="2400" dirty="0"/>
+              <a:t>大量棘‑慢复合波爆发</a:t>
+            </a:r>
+            <a:endParaRPr lang="zh-CN" altLang="en-US" sz="2400" dirty="0"/>
+          </a:p>
+        </p:txBody>
+      </p:sp>
+      <p:pic>
+        <p:nvPicPr>
+          <p:cNvPr id="5" name="图片 4">
+            <a:extLst>
+              <a:ext uri="{FF2B5EF4-FFF2-40B4-BE49-F238E27FC236}">
+                <a16:creationId xmlns:a16="http://schemas.microsoft.com/office/drawing/2014/main" id="{76A61578-C176-CA6C-DD37-7563778FCBFA}"/>
+              </a:ext>
+            </a:extLst>
+          </p:cNvPr>
+          <p:cNvPicPr>
+            <a:picLocks noChangeAspect="1"/>
+          </p:cNvPicPr>
+          <p:nvPr/>
+        </p:nvPicPr>
+        <p:blipFill>
+          <a:blip r:embed="rId3"/>
+          <a:stretch>
+            <a:fillRect/>
+          </a:stretch>
+        </p:blipFill>
+        <p:spPr>
+          <a:xfrm>
+            <a:off x="1052944" y="2346876"/>
+            <a:ext cx="4560454" cy="3688850"/>
+          </a:xfrm>
+          <a:prstGeom prst="rect">
+            <a:avLst/>
+          </a:prstGeom>
+        </p:spPr>
+      </p:pic>
+      <p:pic>
+        <p:nvPicPr>
+          <p:cNvPr id="6" name="内容占位符 4">
+            <a:extLst>
+              <a:ext uri="{FF2B5EF4-FFF2-40B4-BE49-F238E27FC236}">
+                <a16:creationId xmlns:a16="http://schemas.microsoft.com/office/drawing/2014/main" id="{427BB2D9-74DE-BD54-DC19-E2D6E9E2D430}"/>
+              </a:ext>
+            </a:extLst>
+          </p:cNvPr>
+          <p:cNvPicPr>
+            <a:picLocks noChangeAspect="1"/>
+          </p:cNvPicPr>
+          <p:nvPr/>
+        </p:nvPicPr>
+        <p:blipFill>
+          <a:blip r:embed="rId4">
+            <a:extLst>
+              <a:ext uri="{28A0092B-C50C-407E-A947-70E740481C1C}">
+                <a14:useLocalDpi xmlns:a14="http://schemas.microsoft.com/office/drawing/2010/main" val="0"/>
+              </a:ext>
+            </a:extLst>
+          </a:blip>
+          <a:stretch>
+            <a:fillRect/>
+          </a:stretch>
+        </p:blipFill>
+        <p:spPr>
+          <a:xfrm>
+            <a:off x="5986705" y="2162193"/>
+            <a:ext cx="4915586" cy="4058216"/>
+          </a:xfrm>
+          <a:prstGeom prst="rect">
+            <a:avLst/>
+          </a:prstGeom>
+        </p:spPr>
+      </p:pic>
+      <p:sp>
+        <p:nvSpPr>
+          <p:cNvPr id="8" name="文本框 7">
+            <a:extLst>
+              <a:ext uri="{FF2B5EF4-FFF2-40B4-BE49-F238E27FC236}">
+                <a16:creationId xmlns:a16="http://schemas.microsoft.com/office/drawing/2014/main" id="{48A8B8F0-B92E-FF31-F084-8B5FF50E3426}"/>
+              </a:ext>
+            </a:extLst>
+          </p:cNvPr>
+          <p:cNvSpPr txBox="1"/>
+          <p:nvPr/>
+        </p:nvSpPr>
+        <p:spPr>
+          <a:xfrm>
+            <a:off x="1241172" y="6087493"/>
+            <a:ext cx="9720943" cy="646331"/>
+          </a:xfrm>
+          <a:prstGeom prst="rect">
+            <a:avLst/>
+          </a:prstGeom>
+          <a:noFill/>
+        </p:spPr>
+        <p:txBody>
+          <a:bodyPr wrap="square" rtlCol="0">
+            <a:spAutoFit/>
+          </a:bodyPr>
+          <a:lstStyle/>
+          <a:p>
+            <a:r>
+              <a:rPr lang="zh-CN" altLang="zh-CN" b="1" dirty="0">
+                <a:solidFill>
+                  <a:schemeClr val="bg2">
+                    <a:lumMod val="75000"/>
+                  </a:schemeClr>
+                </a:solidFill>
+              </a:rPr>
+              <a:t>Marini et al. (2018)</a:t>
+            </a:r>
+            <a:r>
+              <a:rPr lang="zh-CN" altLang="zh-CN" dirty="0">
+                <a:solidFill>
+                  <a:schemeClr val="bg2">
+                    <a:lumMod val="75000"/>
+                  </a:schemeClr>
+                </a:solidFill>
+              </a:rPr>
+              <a:t> </a:t>
+            </a:r>
+            <a:r>
+              <a:rPr lang="zh-CN" altLang="zh-CN" i="1" dirty="0">
+                <a:solidFill>
+                  <a:schemeClr val="bg2">
+                    <a:lumMod val="75000"/>
+                  </a:schemeClr>
+                </a:solidFill>
+              </a:rPr>
+              <a:t>HCN1 mutation spectrum: from neonatal epileptic encephalopathy to benign generalized epilepsy and beyond.</a:t>
+            </a:r>
+            <a:r>
+              <a:rPr lang="zh-CN" altLang="zh-CN" dirty="0">
+                <a:solidFill>
+                  <a:schemeClr val="bg2">
+                    <a:lumMod val="75000"/>
+                  </a:schemeClr>
+                </a:solidFill>
+              </a:rPr>
+              <a:t> </a:t>
+            </a:r>
+            <a:r>
+              <a:rPr lang="zh-CN" altLang="zh-CN" b="1" dirty="0">
+                <a:solidFill>
+                  <a:schemeClr val="bg2">
+                    <a:lumMod val="75000"/>
+                  </a:schemeClr>
+                </a:solidFill>
+              </a:rPr>
+              <a:t>Brain</a:t>
+            </a:r>
+            <a:endParaRPr lang="zh-CN" altLang="en-US" dirty="0">
+              <a:solidFill>
+                <a:schemeClr val="bg2">
+                  <a:lumMod val="75000"/>
+                </a:schemeClr>
+              </a:solidFill>
+            </a:endParaRPr>
+          </a:p>
+        </p:txBody>
+      </p:sp>
+    </p:spTree>
+    <p:extLst>
+      <p:ext uri="{BB962C8B-B14F-4D97-AF65-F5344CB8AC3E}">
+        <p14:creationId xmlns:p14="http://schemas.microsoft.com/office/powerpoint/2010/main" val="2106372733"/>
+      </p:ext>
+    </p:extLst>
+  </p:cSld>
+  <p:clrMapOvr>
+    <a:masterClrMapping/>
+  </p:clrMapOvr>
+  <mc:AlternateContent xmlns:mc="http://schemas.openxmlformats.org/markup-compatibility/2006">
+    <mc:Choice xmlns:p159="http://schemas.microsoft.com/office/powerpoint/2015/09/main" Requires="p159">
+      <p:transition xmlns:p14="http://schemas.microsoft.com/office/powerpoint/2010/main" spd="slow" p14:dur="2000">
+        <p159:morph option="byObject"/>
+      </p:transition>
+    </mc:Choice>
+    <mc:Fallback>
+      <p:transition spd="slow">
+        <p:fade/>
+      </p:transition>
+    </mc:Fallback>
+  </mc:AlternateContent>
+</p:sld>
+</file>
+
+<file path=ppt/slides/slide15.xml><?xml version="1.0" encoding="utf-8"?>
+<p:sld xmlns:a="http://schemas.openxmlformats.org/drawingml/2006/main" xmlns:r="http://schemas.openxmlformats.org/officeDocument/2006/relationships" xmlns:p="http://schemas.openxmlformats.org/presentationml/2006/main">
+  <p:cSld>
+    <p:spTree>
+      <p:nvGrpSpPr>
+        <p:cNvPr id="1" name=""/>
+        <p:cNvGrpSpPr/>
+        <p:nvPr/>
+      </p:nvGrpSpPr>
+      <p:grpSpPr>
+        <a:xfrm>
+          <a:off x="0" y="0"/>
+          <a:ext cx="0" cy="0"/>
+          <a:chOff x="0" y="0"/>
+          <a:chExt cx="0" cy="0"/>
+        </a:xfrm>
+      </p:grpSpPr>
+      <p:sp>
+        <p:nvSpPr>
+          <p:cNvPr id="2" name="标题 1">
+            <a:extLst>
+              <a:ext uri="{FF2B5EF4-FFF2-40B4-BE49-F238E27FC236}">
+                <a16:creationId xmlns:a16="http://schemas.microsoft.com/office/drawing/2014/main" id="{05B6E3FA-F5D8-A7B8-CD01-B6AF67CA3CB1}"/>
+              </a:ext>
+            </a:extLst>
+          </p:cNvPr>
+          <p:cNvSpPr>
+            <a:spLocks noGrp="1"/>
+          </p:cNvSpPr>
+          <p:nvPr>
+            <p:ph type="title"/>
+          </p:nvPr>
+        </p:nvSpPr>
+        <p:spPr/>
+        <p:txBody>
+          <a:bodyPr/>
+          <a:lstStyle/>
+          <a:p>
+            <a:r>
+              <a:rPr lang="en-US" altLang="zh-CN" dirty="0"/>
+              <a:t>Takeaways</a:t>
+            </a:r>
+            <a:endParaRPr lang="zh-CN" altLang="en-US" dirty="0"/>
+          </a:p>
+        </p:txBody>
+      </p:sp>
+      <p:sp>
+        <p:nvSpPr>
+          <p:cNvPr id="3" name="内容占位符 2">
+            <a:extLst>
+              <a:ext uri="{FF2B5EF4-FFF2-40B4-BE49-F238E27FC236}">
+                <a16:creationId xmlns:a16="http://schemas.microsoft.com/office/drawing/2014/main" id="{5777699A-E33D-6642-3818-3BC68F9CACC3}"/>
+              </a:ext>
+            </a:extLst>
+          </p:cNvPr>
+          <p:cNvSpPr>
+            <a:spLocks noGrp="1"/>
+          </p:cNvSpPr>
+          <p:nvPr>
+            <p:ph idx="1"/>
+          </p:nvPr>
+        </p:nvSpPr>
+        <p:spPr>
+          <a:xfrm>
+            <a:off x="925945" y="647498"/>
+            <a:ext cx="10515600" cy="5623479"/>
+          </a:xfrm>
+        </p:spPr>
+        <p:txBody>
+          <a:bodyPr>
+            <a:normAutofit/>
+          </a:bodyPr>
+          <a:lstStyle/>
+          <a:p>
+            <a:pPr>
+              <a:lnSpc>
+                <a:spcPct val="160000"/>
+              </a:lnSpc>
+            </a:pPr>
+            <a:endParaRPr lang="en-US" altLang="zh-CN" dirty="0"/>
+          </a:p>
+          <a:p>
+            <a:pPr lvl="1">
+              <a:lnSpc>
+                <a:spcPct val="160000"/>
+              </a:lnSpc>
+            </a:pPr>
+            <a:r>
+              <a:rPr lang="zh-CN" altLang="zh-CN" dirty="0"/>
+              <a:t>神经元不是固定滤波器，而是“状态依赖的频率调谐器”</a:t>
+            </a:r>
+            <a:endParaRPr lang="en-US" altLang="zh-CN" dirty="0"/>
+          </a:p>
+          <a:p>
+            <a:pPr lvl="1">
+              <a:lnSpc>
+                <a:spcPct val="160000"/>
+              </a:lnSpc>
+            </a:pPr>
+            <a:r>
+              <a:rPr lang="zh-CN" altLang="zh-CN" dirty="0"/>
+              <a:t>HCN 通道能够</a:t>
+            </a:r>
+            <a:r>
+              <a:rPr lang="zh-CN" altLang="en-US" dirty="0"/>
+              <a:t>通过</a:t>
+            </a:r>
+            <a:r>
+              <a:rPr lang="en-US" altLang="zh-CN" dirty="0" err="1"/>
+              <a:t>lh</a:t>
+            </a:r>
+            <a:r>
+              <a:rPr lang="zh-CN" altLang="en-US" dirty="0"/>
+              <a:t>电流</a:t>
+            </a:r>
+            <a:r>
+              <a:rPr lang="zh-CN" altLang="zh-CN" dirty="0"/>
+              <a:t>缓解超极化幅度</a:t>
+            </a:r>
+            <a:r>
+              <a:rPr lang="zh-CN" altLang="en-US" dirty="0"/>
+              <a:t>，</a:t>
+            </a:r>
+            <a:r>
+              <a:rPr lang="zh-CN" altLang="zh-CN" dirty="0"/>
+              <a:t>使膜电位变化更加平缓</a:t>
+            </a:r>
+            <a:endParaRPr lang="en-US" altLang="zh-CN" dirty="0"/>
+          </a:p>
+          <a:p>
+            <a:pPr lvl="1">
+              <a:lnSpc>
+                <a:spcPct val="160000"/>
+              </a:lnSpc>
+            </a:pPr>
+            <a:r>
+              <a:rPr lang="zh-CN" altLang="zh-CN" dirty="0"/>
+              <a:t>HCN 负责</a:t>
+            </a:r>
+            <a:r>
+              <a:rPr lang="zh-CN" altLang="en-US" dirty="0"/>
+              <a:t>静息态下</a:t>
+            </a:r>
+            <a:r>
+              <a:rPr lang="zh-CN" altLang="zh-CN" dirty="0"/>
+              <a:t>低频（theta）共振窗口的建立与稳定</a:t>
+            </a:r>
+            <a:r>
+              <a:rPr lang="zh-CN" altLang="en-US" dirty="0"/>
+              <a:t>（通过带通滤波使得</a:t>
+            </a:r>
+            <a:r>
+              <a:rPr lang="en-US" altLang="zh-CN" dirty="0"/>
+              <a:t>theta</a:t>
+            </a:r>
+            <a:r>
+              <a:rPr lang="zh-CN" altLang="en-US" dirty="0"/>
+              <a:t>波段可以因共振稳定存在，而过滤其它波段）</a:t>
+            </a:r>
+            <a:endParaRPr lang="en-US" altLang="zh-CN" dirty="0"/>
+          </a:p>
+          <a:p>
+            <a:pPr lvl="1">
+              <a:lnSpc>
+                <a:spcPct val="160000"/>
+              </a:lnSpc>
+            </a:pPr>
+            <a:r>
+              <a:rPr lang="zh-CN" altLang="zh-CN" dirty="0"/>
+              <a:t>频率选择性来自“多机制竞争”，不是单一</a:t>
+            </a:r>
+            <a:r>
+              <a:rPr lang="en-US" altLang="zh-CN" dirty="0"/>
+              <a:t>HCN</a:t>
+            </a:r>
+            <a:r>
+              <a:rPr lang="zh-CN" altLang="zh-CN" dirty="0"/>
+              <a:t>通道</a:t>
+            </a:r>
+            <a:r>
+              <a:rPr lang="zh-CN" altLang="en-US" dirty="0"/>
+              <a:t>可以解释的（</a:t>
+            </a:r>
+            <a:r>
+              <a:rPr lang="en-US" altLang="zh-CN" dirty="0"/>
+              <a:t>HH-Model</a:t>
+            </a:r>
+            <a:r>
+              <a:rPr lang="zh-CN" altLang="en-US" dirty="0"/>
+              <a:t>，甚至</a:t>
+            </a:r>
+            <a:r>
+              <a:rPr lang="en-US" altLang="zh-CN" dirty="0"/>
+              <a:t>KCNQ</a:t>
+            </a:r>
+            <a:r>
+              <a:rPr lang="zh-CN" altLang="en-US" dirty="0"/>
+              <a:t>等复杂机制都会引入</a:t>
+            </a:r>
+            <a:r>
+              <a:rPr lang="en-US" altLang="zh-CN" dirty="0"/>
+              <a:t>resonance</a:t>
+            </a:r>
+            <a:r>
+              <a:rPr lang="zh-CN" altLang="en-US" dirty="0"/>
+              <a:t>）</a:t>
+            </a:r>
+            <a:endParaRPr lang="en-US" altLang="zh-CN" dirty="0"/>
+          </a:p>
+          <a:p>
+            <a:pPr lvl="1">
+              <a:lnSpc>
+                <a:spcPct val="160000"/>
+              </a:lnSpc>
+            </a:pPr>
+            <a:endParaRPr lang="zh-CN" altLang="zh-CN" dirty="0"/>
+          </a:p>
+          <a:p>
+            <a:pPr lvl="1">
+              <a:lnSpc>
+                <a:spcPct val="160000"/>
+              </a:lnSpc>
+            </a:pPr>
+            <a:endParaRPr lang="zh-CN" altLang="en-US" dirty="0"/>
+          </a:p>
+        </p:txBody>
+      </p:sp>
+      <p:sp>
+        <p:nvSpPr>
+          <p:cNvPr id="4" name="文本框 3">
+            <a:extLst>
+              <a:ext uri="{FF2B5EF4-FFF2-40B4-BE49-F238E27FC236}">
+                <a16:creationId xmlns:a16="http://schemas.microsoft.com/office/drawing/2014/main" id="{4C3E4DD3-EC57-99F9-4519-82AF475895E2}"/>
+              </a:ext>
+            </a:extLst>
+          </p:cNvPr>
+          <p:cNvSpPr txBox="1"/>
+          <p:nvPr/>
+        </p:nvSpPr>
+        <p:spPr>
+          <a:xfrm>
+            <a:off x="1527629" y="5648838"/>
+            <a:ext cx="9136742" cy="707886"/>
+          </a:xfrm>
+          <a:prstGeom prst="rect">
+            <a:avLst/>
+          </a:prstGeom>
+          <a:noFill/>
+        </p:spPr>
+        <p:txBody>
+          <a:bodyPr wrap="square" rtlCol="0">
+            <a:spAutoFit/>
+          </a:bodyPr>
+          <a:lstStyle/>
+          <a:p>
             <a:pPr algn="ctr"/>
             <a:r>
-              <a:rPr lang="zh-CN" altLang="en-US" sz="3600" dirty="0"/>
+              <a:rPr lang="zh-CN" altLang="en-US" sz="4000" b="1" dirty="0"/>
               <a:t>谢谢！欢迎批评指正！</a:t>
             </a:r>
           </a:p>
@@ -6869,6 +8728,18 @@
   <p:clrMapOvr>
     <a:masterClrMapping/>
   </p:clrMapOvr>
+  <mc:AlternateContent xmlns:mc="http://schemas.openxmlformats.org/markup-compatibility/2006">
+    <mc:Choice xmlns:p159="http://schemas.microsoft.com/office/powerpoint/2015/09/main" Requires="p159">
+      <p:transition xmlns:p14="http://schemas.microsoft.com/office/powerpoint/2010/main" spd="slow" p14:dur="2000">
+        <p159:morph option="byObject"/>
+      </p:transition>
+    </mc:Choice>
+    <mc:Fallback>
+      <p:transition spd="slow">
+        <p:fade/>
+      </p:transition>
+    </mc:Fallback>
+  </mc:AlternateContent>
 </p:sld>
 </file>
 
@@ -6907,7 +8778,7 @@
         </p:nvSpPr>
         <p:spPr>
           <a:xfrm>
-            <a:off x="264886" y="0"/>
+            <a:off x="547188" y="220932"/>
             <a:ext cx="10515600" cy="1325563"/>
           </a:xfrm>
         </p:spPr>
@@ -6952,7 +8823,7 @@
         </p:blipFill>
         <p:spPr>
           <a:xfrm>
-            <a:off x="1302255" y="1472575"/>
+            <a:off x="1584557" y="1693507"/>
             <a:ext cx="9162546" cy="4108714"/>
           </a:xfrm>
           <a:prstGeom prst="rect">
@@ -6970,6 +8841,18 @@
   <p:clrMapOvr>
     <a:masterClrMapping/>
   </p:clrMapOvr>
+  <mc:AlternateContent xmlns:mc="http://schemas.openxmlformats.org/markup-compatibility/2006">
+    <mc:Choice xmlns:p159="http://schemas.microsoft.com/office/powerpoint/2015/09/main" Requires="p159">
+      <p:transition xmlns:p14="http://schemas.microsoft.com/office/powerpoint/2010/main" spd="slow" p14:dur="2000">
+        <p159:morph option="byObject"/>
+      </p:transition>
+    </mc:Choice>
+    <mc:Fallback>
+      <p:transition spd="slow">
+        <p:fade/>
+      </p:transition>
+    </mc:Fallback>
+  </mc:AlternateContent>
 </p:sld>
 </file>
 
@@ -7106,6 +8989,18 @@
   <p:clrMapOvr>
     <a:masterClrMapping/>
   </p:clrMapOvr>
+  <mc:AlternateContent xmlns:mc="http://schemas.openxmlformats.org/markup-compatibility/2006">
+    <mc:Choice xmlns:p159="http://schemas.microsoft.com/office/powerpoint/2015/09/main" Requires="p159">
+      <p:transition xmlns:p14="http://schemas.microsoft.com/office/powerpoint/2010/main" spd="slow" p14:dur="2000">
+        <p159:morph option="byObject"/>
+      </p:transition>
+    </mc:Choice>
+    <mc:Fallback>
+      <p:transition spd="slow">
+        <p:fade/>
+      </p:transition>
+    </mc:Fallback>
+  </mc:AlternateContent>
 </p:sld>
 </file>
 
@@ -7131,7 +9026,7 @@
           <p:cNvPr id="2" name="标题 1">
             <a:extLst>
               <a:ext uri="{FF2B5EF4-FFF2-40B4-BE49-F238E27FC236}">
-                <a16:creationId xmlns:a16="http://schemas.microsoft.com/office/drawing/2014/main" id="{5E8F461D-B282-1388-29B2-8985F1744424}"/>
+                <a16:creationId xmlns:a16="http://schemas.microsoft.com/office/drawing/2014/main" id="{5BC86B4E-A7AA-46FC-624B-9D490A3A9B0C}"/>
               </a:ext>
             </a:extLst>
           </p:cNvPr>
@@ -7142,53 +9037,213 @@
             <p:ph type="title"/>
           </p:nvPr>
         </p:nvSpPr>
-        <p:spPr/>
-        <p:txBody>
-          <a:bodyPr>
-            <a:normAutofit/>
-          </a:bodyPr>
+        <p:spPr>
+          <a:xfrm>
+            <a:off x="443443" y="126686"/>
+            <a:ext cx="10515600" cy="1325563"/>
+          </a:xfrm>
+        </p:spPr>
+        <p:txBody>
+          <a:bodyPr/>
           <a:lstStyle/>
           <a:p>
             <a:r>
-              <a:rPr lang="zh-CN" altLang="zh-CN" dirty="0"/>
-              <a:t>HCN 通道</a:t>
-            </a:r>
-            <a:endParaRPr lang="zh-CN" altLang="en-US" dirty="0"/>
+              <a:rPr lang="en-US" altLang="zh-CN" dirty="0"/>
+              <a:t>HCN</a:t>
+            </a:r>
+            <a:r>
+              <a:rPr lang="zh-CN" altLang="en-US" dirty="0"/>
+              <a:t>通道：功能与结构</a:t>
+            </a:r>
           </a:p>
         </p:txBody>
       </p:sp>
       <p:pic>
         <p:nvPicPr>
-          <p:cNvPr id="5" name="内容占位符 4">
-            <a:extLst>
-              <a:ext uri="{FF2B5EF4-FFF2-40B4-BE49-F238E27FC236}">
-                <a16:creationId xmlns:a16="http://schemas.microsoft.com/office/drawing/2014/main" id="{B7C39CEF-83C8-EAF8-A965-FAC6D62191E5}"/>
+          <p:cNvPr id="5" name="图片 4">
+            <a:extLst>
+              <a:ext uri="{FF2B5EF4-FFF2-40B4-BE49-F238E27FC236}">
+                <a16:creationId xmlns:a16="http://schemas.microsoft.com/office/drawing/2014/main" id="{77AE5646-45DB-61BD-F3A0-A7BC4E5BA380}"/>
               </a:ext>
             </a:extLst>
           </p:cNvPr>
           <p:cNvPicPr>
-            <a:picLocks noGrp="1" noChangeAspect="1"/>
+            <a:picLocks noChangeAspect="1"/>
           </p:cNvPicPr>
-          <p:nvPr>
-            <p:ph idx="1"/>
-          </p:nvPr>
+          <p:nvPr/>
         </p:nvPicPr>
         <p:blipFill>
-          <a:blip r:embed="rId3">
-            <a:extLst>
-              <a:ext uri="{28A0092B-C50C-407E-A947-70E740481C1C}">
-                <a14:useLocalDpi xmlns:a14="http://schemas.microsoft.com/office/drawing/2010/main" val="0"/>
-              </a:ext>
-            </a:extLst>
-          </a:blip>
+          <a:blip r:embed="rId2"/>
           <a:stretch>
             <a:fillRect/>
           </a:stretch>
         </p:blipFill>
         <p:spPr>
           <a:xfrm>
-            <a:off x="1012279" y="1690688"/>
-            <a:ext cx="10443211" cy="4351338"/>
+            <a:off x="1082509" y="2058175"/>
+            <a:ext cx="4330000" cy="3738920"/>
+          </a:xfrm>
+          <a:prstGeom prst="rect">
+            <a:avLst/>
+          </a:prstGeom>
+        </p:spPr>
+      </p:pic>
+      <p:sp>
+        <p:nvSpPr>
+          <p:cNvPr id="6" name="文本框 5">
+            <a:extLst>
+              <a:ext uri="{FF2B5EF4-FFF2-40B4-BE49-F238E27FC236}">
+                <a16:creationId xmlns:a16="http://schemas.microsoft.com/office/drawing/2014/main" id="{9E46C74F-E15E-D062-4BEF-8D83E2243811}"/>
+              </a:ext>
+            </a:extLst>
+          </p:cNvPr>
+          <p:cNvSpPr txBox="1"/>
+          <p:nvPr/>
+        </p:nvSpPr>
+        <p:spPr>
+          <a:xfrm>
+            <a:off x="766618" y="5975639"/>
+            <a:ext cx="9217891" cy="646331"/>
+          </a:xfrm>
+          <a:prstGeom prst="rect">
+            <a:avLst/>
+          </a:prstGeom>
+          <a:noFill/>
+        </p:spPr>
+        <p:txBody>
+          <a:bodyPr wrap="square" rtlCol="0">
+            <a:spAutoFit/>
+          </a:bodyPr>
+          <a:lstStyle/>
+          <a:p>
+            <a:r>
+              <a:rPr lang="zh-CN" altLang="zh-CN" dirty="0">
+                <a:solidFill>
+                  <a:schemeClr val="bg2">
+                    <a:lumMod val="75000"/>
+                  </a:schemeClr>
+                </a:solidFill>
+              </a:rPr>
+              <a:t>Mishra P, Narayanan R. The enigmatic HCN channels: A cellular neurophysiology perspective. </a:t>
+            </a:r>
+            <a:r>
+              <a:rPr lang="zh-CN" altLang="zh-CN" i="1" dirty="0">
+                <a:solidFill>
+                  <a:schemeClr val="bg2">
+                    <a:lumMod val="75000"/>
+                  </a:schemeClr>
+                </a:solidFill>
+              </a:rPr>
+              <a:t>Proteins</a:t>
+            </a:r>
+            <a:r>
+              <a:rPr lang="zh-CN" altLang="zh-CN" dirty="0">
+                <a:solidFill>
+                  <a:schemeClr val="bg2">
+                    <a:lumMod val="75000"/>
+                  </a:schemeClr>
+                </a:solidFill>
+              </a:rPr>
+              <a:t>. 2025; 93(1): 72-92. doi:</a:t>
+            </a:r>
+            <a:r>
+              <a:rPr lang="zh-CN" altLang="zh-CN" dirty="0">
+                <a:solidFill>
+                  <a:schemeClr val="bg2">
+                    <a:lumMod val="75000"/>
+                  </a:schemeClr>
+                </a:solidFill>
+                <a:hlinkClick r:id="rId3" tooltip="Link to external resource: 10.1002/prot.26643">
+                  <a:extLst>
+                    <a:ext uri="{A12FA001-AC4F-418D-AE19-62706E023703}">
+                      <ahyp:hlinkClr xmlns:ahyp="http://schemas.microsoft.com/office/drawing/2018/hyperlinkcolor" val="tx"/>
+                    </a:ext>
+                  </a:extLst>
+                </a:hlinkClick>
+              </a:rPr>
+              <a:t>10.1002/prot.26643</a:t>
+            </a:r>
+            <a:endParaRPr lang="zh-CN" altLang="en-US" dirty="0">
+              <a:solidFill>
+                <a:schemeClr val="bg2">
+                  <a:lumMod val="75000"/>
+                </a:schemeClr>
+              </a:solidFill>
+            </a:endParaRPr>
+          </a:p>
+        </p:txBody>
+      </p:sp>
+      <p:sp>
+        <p:nvSpPr>
+          <p:cNvPr id="8" name="文本框 7">
+            <a:extLst>
+              <a:ext uri="{FF2B5EF4-FFF2-40B4-BE49-F238E27FC236}">
+                <a16:creationId xmlns:a16="http://schemas.microsoft.com/office/drawing/2014/main" id="{5E7EEAAB-F6C8-23FB-D2AE-DEDBB3CF516E}"/>
+              </a:ext>
+            </a:extLst>
+          </p:cNvPr>
+          <p:cNvSpPr txBox="1"/>
+          <p:nvPr/>
+        </p:nvSpPr>
+        <p:spPr>
+          <a:xfrm>
+            <a:off x="905163" y="1306549"/>
+            <a:ext cx="10904667" cy="523220"/>
+          </a:xfrm>
+          <a:prstGeom prst="rect">
+            <a:avLst/>
+          </a:prstGeom>
+          <a:noFill/>
+        </p:spPr>
+        <p:txBody>
+          <a:bodyPr wrap="square">
+            <a:spAutoFit/>
+          </a:bodyPr>
+          <a:lstStyle/>
+          <a:p>
+            <a:r>
+              <a:rPr lang="zh-CN" altLang="zh-CN" sz="2800" b="1" dirty="0">
+                <a:latin typeface="Times New Roman" panose="02020603050405020304" pitchFamily="18" charset="0"/>
+                <a:cs typeface="Times New Roman" panose="02020603050405020304" pitchFamily="18" charset="0"/>
+              </a:rPr>
+              <a:t>Hyperpolarization</a:t>
+            </a:r>
+            <a:r>
+              <a:rPr lang="zh-CN" altLang="zh-CN" sz="2800" b="1" dirty="0">
+                <a:latin typeface="Constantia" panose="02030602050306030303" pitchFamily="18" charset="0"/>
+              </a:rPr>
+              <a:t>-activated Cyclic Nucleotide-gated channels</a:t>
+            </a:r>
+            <a:endParaRPr lang="zh-CN" altLang="en-US" sz="2800" b="1" dirty="0">
+              <a:latin typeface="Constantia" panose="02030602050306030303" pitchFamily="18" charset="0"/>
+            </a:endParaRPr>
+          </a:p>
+        </p:txBody>
+      </p:sp>
+      <p:pic>
+        <p:nvPicPr>
+          <p:cNvPr id="10" name="图片 9">
+            <a:extLst>
+              <a:ext uri="{FF2B5EF4-FFF2-40B4-BE49-F238E27FC236}">
+                <a16:creationId xmlns:a16="http://schemas.microsoft.com/office/drawing/2014/main" id="{C01AA856-8CB1-48D0-2977-338C2DE573A8}"/>
+              </a:ext>
+            </a:extLst>
+          </p:cNvPr>
+          <p:cNvPicPr>
+            <a:picLocks noChangeAspect="1"/>
+          </p:cNvPicPr>
+          <p:nvPr/>
+        </p:nvPicPr>
+        <p:blipFill>
+          <a:blip r:embed="rId4"/>
+          <a:stretch>
+            <a:fillRect/>
+          </a:stretch>
+        </p:blipFill>
+        <p:spPr>
+          <a:xfrm>
+            <a:off x="6659417" y="2016196"/>
+            <a:ext cx="4051005" cy="3666695"/>
           </a:xfrm>
           <a:prstGeom prst="rect">
             <a:avLst/>
@@ -7198,13 +9253,25 @@
     </p:spTree>
     <p:extLst>
       <p:ext uri="{BB962C8B-B14F-4D97-AF65-F5344CB8AC3E}">
-        <p14:creationId xmlns:p14="http://schemas.microsoft.com/office/powerpoint/2010/main" val="1334815293"/>
+        <p14:creationId xmlns:p14="http://schemas.microsoft.com/office/powerpoint/2010/main" val="604377842"/>
       </p:ext>
     </p:extLst>
   </p:cSld>
   <p:clrMapOvr>
     <a:masterClrMapping/>
   </p:clrMapOvr>
+  <mc:AlternateContent xmlns:mc="http://schemas.openxmlformats.org/markup-compatibility/2006">
+    <mc:Choice xmlns:p159="http://schemas.microsoft.com/office/powerpoint/2015/09/main" Requires="p159">
+      <p:transition xmlns:p14="http://schemas.microsoft.com/office/powerpoint/2010/main" spd="slow" p14:dur="2000">
+        <p159:morph option="byObject"/>
+      </p:transition>
+    </mc:Choice>
+    <mc:Fallback>
+      <p:transition spd="slow">
+        <p:fade/>
+      </p:transition>
+    </mc:Fallback>
+  </mc:AlternateContent>
 </p:sld>
 </file>
 
@@ -7230,6 +9297,228 @@
           <p:cNvPr id="2" name="标题 1">
             <a:extLst>
               <a:ext uri="{FF2B5EF4-FFF2-40B4-BE49-F238E27FC236}">
+                <a16:creationId xmlns:a16="http://schemas.microsoft.com/office/drawing/2014/main" id="{5E8F461D-B282-1388-29B2-8985F1744424}"/>
+              </a:ext>
+            </a:extLst>
+          </p:cNvPr>
+          <p:cNvSpPr>
+            <a:spLocks noGrp="1"/>
+          </p:cNvSpPr>
+          <p:nvPr>
+            <p:ph type="title"/>
+          </p:nvPr>
+        </p:nvSpPr>
+        <p:spPr/>
+        <p:txBody>
+          <a:bodyPr>
+            <a:normAutofit/>
+          </a:bodyPr>
+          <a:lstStyle/>
+          <a:p>
+            <a:r>
+              <a:rPr lang="zh-CN" altLang="zh-CN" dirty="0"/>
+              <a:t>HCN 通道</a:t>
+            </a:r>
+            <a:r>
+              <a:rPr lang="zh-CN" altLang="en-US" dirty="0"/>
+              <a:t>：电生理特性</a:t>
+            </a:r>
+          </a:p>
+        </p:txBody>
+      </p:sp>
+      <p:sp>
+        <p:nvSpPr>
+          <p:cNvPr id="7" name="文本框 6">
+            <a:extLst>
+              <a:ext uri="{FF2B5EF4-FFF2-40B4-BE49-F238E27FC236}">
+                <a16:creationId xmlns:a16="http://schemas.microsoft.com/office/drawing/2014/main" id="{2CABF047-6A36-9374-71AC-C5E971FA316F}"/>
+              </a:ext>
+            </a:extLst>
+          </p:cNvPr>
+          <p:cNvSpPr txBox="1"/>
+          <p:nvPr/>
+        </p:nvSpPr>
+        <p:spPr>
+          <a:xfrm>
+            <a:off x="1119226" y="5846544"/>
+            <a:ext cx="8962948" cy="646331"/>
+          </a:xfrm>
+          <a:prstGeom prst="rect">
+            <a:avLst/>
+          </a:prstGeom>
+          <a:noFill/>
+        </p:spPr>
+        <p:txBody>
+          <a:bodyPr wrap="square">
+            <a:spAutoFit/>
+          </a:bodyPr>
+          <a:lstStyle/>
+          <a:p>
+            <a:r>
+              <a:rPr lang="zh-CN" altLang="zh-CN" dirty="0">
+                <a:solidFill>
+                  <a:schemeClr val="bg2">
+                    <a:lumMod val="75000"/>
+                  </a:schemeClr>
+                </a:solidFill>
+              </a:rPr>
+              <a:t>Mishra P, Narayanan R. The enigmatic HCN channels: A cellular neurophysiology perspective. </a:t>
+            </a:r>
+            <a:r>
+              <a:rPr lang="zh-CN" altLang="zh-CN" i="1" dirty="0">
+                <a:solidFill>
+                  <a:schemeClr val="bg2">
+                    <a:lumMod val="75000"/>
+                  </a:schemeClr>
+                </a:solidFill>
+              </a:rPr>
+              <a:t>Proteins</a:t>
+            </a:r>
+            <a:r>
+              <a:rPr lang="zh-CN" altLang="zh-CN" dirty="0">
+                <a:solidFill>
+                  <a:schemeClr val="bg2">
+                    <a:lumMod val="75000"/>
+                  </a:schemeClr>
+                </a:solidFill>
+              </a:rPr>
+              <a:t>. 2025; 93(1): 72-92. doi:</a:t>
+            </a:r>
+            <a:r>
+              <a:rPr lang="zh-CN" altLang="zh-CN" dirty="0">
+                <a:solidFill>
+                  <a:schemeClr val="bg2">
+                    <a:lumMod val="75000"/>
+                  </a:schemeClr>
+                </a:solidFill>
+                <a:hlinkClick r:id="rId3" tooltip="Link to external resource: 10.1002/prot.26643">
+                  <a:extLst>
+                    <a:ext uri="{A12FA001-AC4F-418D-AE19-62706E023703}">
+                      <ahyp:hlinkClr xmlns:ahyp="http://schemas.microsoft.com/office/drawing/2018/hyperlinkcolor" val="tx"/>
+                    </a:ext>
+                  </a:extLst>
+                </a:hlinkClick>
+              </a:rPr>
+              <a:t>10.1002/prot.26643</a:t>
+            </a:r>
+            <a:endParaRPr lang="zh-CN" altLang="en-US" dirty="0">
+              <a:solidFill>
+                <a:schemeClr val="bg2">
+                  <a:lumMod val="75000"/>
+                </a:schemeClr>
+              </a:solidFill>
+            </a:endParaRPr>
+          </a:p>
+        </p:txBody>
+      </p:sp>
+      <p:pic>
+        <p:nvPicPr>
+          <p:cNvPr id="12" name="图片 11">
+            <a:extLst>
+              <a:ext uri="{FF2B5EF4-FFF2-40B4-BE49-F238E27FC236}">
+                <a16:creationId xmlns:a16="http://schemas.microsoft.com/office/drawing/2014/main" id="{623ABEF3-3CA9-61E5-2F7F-FA09BB7DDD5F}"/>
+              </a:ext>
+            </a:extLst>
+          </p:cNvPr>
+          <p:cNvPicPr>
+            <a:picLocks noChangeAspect="1"/>
+          </p:cNvPicPr>
+          <p:nvPr/>
+        </p:nvPicPr>
+        <p:blipFill>
+          <a:blip r:embed="rId4"/>
+          <a:stretch>
+            <a:fillRect/>
+          </a:stretch>
+        </p:blipFill>
+        <p:spPr>
+          <a:xfrm>
+            <a:off x="9196245" y="660445"/>
+            <a:ext cx="2028315" cy="4803316"/>
+          </a:xfrm>
+          <a:prstGeom prst="rect">
+            <a:avLst/>
+          </a:prstGeom>
+        </p:spPr>
+      </p:pic>
+      <p:pic>
+        <p:nvPicPr>
+          <p:cNvPr id="16" name="图片 15">
+            <a:extLst>
+              <a:ext uri="{FF2B5EF4-FFF2-40B4-BE49-F238E27FC236}">
+                <a16:creationId xmlns:a16="http://schemas.microsoft.com/office/drawing/2014/main" id="{2ECA49DD-9F1C-2422-0553-690DFDF01CCD}"/>
+              </a:ext>
+            </a:extLst>
+          </p:cNvPr>
+          <p:cNvPicPr>
+            <a:picLocks noChangeAspect="1"/>
+          </p:cNvPicPr>
+          <p:nvPr/>
+        </p:nvPicPr>
+        <p:blipFill>
+          <a:blip r:embed="rId5"/>
+          <a:srcRect t="15790"/>
+          <a:stretch>
+            <a:fillRect/>
+          </a:stretch>
+        </p:blipFill>
+        <p:spPr>
+          <a:xfrm>
+            <a:off x="1236133" y="1601229"/>
+            <a:ext cx="7386275" cy="4053923"/>
+          </a:xfrm>
+          <a:prstGeom prst="rect">
+            <a:avLst/>
+          </a:prstGeom>
+        </p:spPr>
+      </p:pic>
+    </p:spTree>
+    <p:extLst>
+      <p:ext uri="{BB962C8B-B14F-4D97-AF65-F5344CB8AC3E}">
+        <p14:creationId xmlns:p14="http://schemas.microsoft.com/office/powerpoint/2010/main" val="1334815293"/>
+      </p:ext>
+    </p:extLst>
+  </p:cSld>
+  <p:clrMapOvr>
+    <a:masterClrMapping/>
+  </p:clrMapOvr>
+  <mc:AlternateContent xmlns:mc="http://schemas.openxmlformats.org/markup-compatibility/2006">
+    <mc:Choice xmlns:p159="http://schemas.microsoft.com/office/powerpoint/2015/09/main" Requires="p159">
+      <p:transition xmlns:p14="http://schemas.microsoft.com/office/powerpoint/2010/main" spd="slow" p14:dur="2000">
+        <p159:morph option="byObject"/>
+      </p:transition>
+    </mc:Choice>
+    <mc:Fallback>
+      <p:transition spd="slow">
+        <p:fade/>
+      </p:transition>
+    </mc:Fallback>
+  </mc:AlternateContent>
+</p:sld>
+</file>
+
+<file path=ppt/slides/slide6.xml><?xml version="1.0" encoding="utf-8"?>
+<p:sld xmlns:a="http://schemas.openxmlformats.org/drawingml/2006/main" xmlns:r="http://schemas.openxmlformats.org/officeDocument/2006/relationships" xmlns:p="http://schemas.openxmlformats.org/presentationml/2006/main">
+  <p:cSld>
+    <p:spTree>
+      <p:nvGrpSpPr>
+        <p:cNvPr id="1" name=""/>
+        <p:cNvGrpSpPr/>
+        <p:nvPr/>
+      </p:nvGrpSpPr>
+      <p:grpSpPr>
+        <a:xfrm>
+          <a:off x="0" y="0"/>
+          <a:ext cx="0" cy="0"/>
+          <a:chOff x="0" y="0"/>
+          <a:chExt cx="0" cy="0"/>
+        </a:xfrm>
+      </p:grpSpPr>
+      <p:sp>
+        <p:nvSpPr>
+          <p:cNvPr id="2" name="标题 1">
+            <a:extLst>
+              <a:ext uri="{FF2B5EF4-FFF2-40B4-BE49-F238E27FC236}">
                 <a16:creationId xmlns:a16="http://schemas.microsoft.com/office/drawing/2014/main" id="{98478677-4918-606F-E276-3D158586593E}"/>
               </a:ext>
             </a:extLst>
@@ -7283,8 +9572,8 @@
         </p:blipFill>
         <p:spPr>
           <a:xfrm>
-            <a:off x="1010577" y="3839665"/>
-            <a:ext cx="7413051" cy="2843631"/>
+            <a:off x="1029281" y="3369905"/>
+            <a:ext cx="7552392" cy="2897082"/>
           </a:xfrm>
           <a:prstGeom prst="rect">
             <a:avLst/>
@@ -7319,8 +9608,8 @@
         </p:blipFill>
         <p:spPr>
           <a:xfrm>
-            <a:off x="1095750" y="1221425"/>
-            <a:ext cx="7242707" cy="2897082"/>
+            <a:off x="3488224" y="1169180"/>
+            <a:ext cx="7674495" cy="3069797"/>
           </a:xfrm>
           <a:prstGeom prst="rect">
             <a:avLst/>
@@ -7337,10 +9626,131 @@
   <p:clrMapOvr>
     <a:masterClrMapping/>
   </p:clrMapOvr>
+  <mc:AlternateContent xmlns:mc="http://schemas.openxmlformats.org/markup-compatibility/2006">
+    <mc:Choice xmlns:p159="http://schemas.microsoft.com/office/powerpoint/2015/09/main" Requires="p159">
+      <p:transition xmlns:p14="http://schemas.microsoft.com/office/powerpoint/2010/main" spd="slow" p14:dur="2000">
+        <p159:morph option="byObject"/>
+      </p:transition>
+    </mc:Choice>
+    <mc:Fallback>
+      <p:transition spd="slow">
+        <p:fade/>
+      </p:transition>
+    </mc:Fallback>
+  </mc:AlternateContent>
 </p:sld>
 </file>
 
-<file path=ppt/slides/slide6.xml><?xml version="1.0" encoding="utf-8"?>
+<file path=ppt/slides/slide7.xml><?xml version="1.0" encoding="utf-8"?>
+<p:sld xmlns:a="http://schemas.openxmlformats.org/drawingml/2006/main" xmlns:r="http://schemas.openxmlformats.org/officeDocument/2006/relationships" xmlns:p="http://schemas.openxmlformats.org/presentationml/2006/main">
+  <p:cSld>
+    <p:spTree>
+      <p:nvGrpSpPr>
+        <p:cNvPr id="1" name=""/>
+        <p:cNvGrpSpPr/>
+        <p:nvPr/>
+      </p:nvGrpSpPr>
+      <p:grpSpPr>
+        <a:xfrm>
+          <a:off x="0" y="0"/>
+          <a:ext cx="0" cy="0"/>
+          <a:chOff x="0" y="0"/>
+          <a:chExt cx="0" cy="0"/>
+        </a:xfrm>
+      </p:grpSpPr>
+      <p:sp>
+        <p:nvSpPr>
+          <p:cNvPr id="2" name="标题 1">
+            <a:extLst>
+              <a:ext uri="{FF2B5EF4-FFF2-40B4-BE49-F238E27FC236}">
+                <a16:creationId xmlns:a16="http://schemas.microsoft.com/office/drawing/2014/main" id="{C95E79E9-37B8-D744-62D8-0F678190A91A}"/>
+              </a:ext>
+            </a:extLst>
+          </p:cNvPr>
+          <p:cNvSpPr>
+            <a:spLocks noGrp="1"/>
+          </p:cNvSpPr>
+          <p:nvPr>
+            <p:ph type="title"/>
+          </p:nvPr>
+        </p:nvSpPr>
+        <p:spPr/>
+        <p:txBody>
+          <a:bodyPr/>
+          <a:lstStyle/>
+          <a:p>
+            <a:r>
+              <a:rPr lang="zh-CN" altLang="zh-CN" dirty="0"/>
+              <a:t>树突的独立计算与空间编码</a:t>
+            </a:r>
+            <a:endParaRPr lang="zh-CN" altLang="en-US" dirty="0"/>
+          </a:p>
+        </p:txBody>
+      </p:sp>
+      <p:pic>
+        <p:nvPicPr>
+          <p:cNvPr id="5" name="内容占位符 4">
+            <a:extLst>
+              <a:ext uri="{FF2B5EF4-FFF2-40B4-BE49-F238E27FC236}">
+                <a16:creationId xmlns:a16="http://schemas.microsoft.com/office/drawing/2014/main" id="{00AC73C7-4900-95AB-400E-0AE85C3BF397}"/>
+              </a:ext>
+            </a:extLst>
+          </p:cNvPr>
+          <p:cNvPicPr>
+            <a:picLocks noGrp="1" noChangeAspect="1"/>
+          </p:cNvPicPr>
+          <p:nvPr>
+            <p:ph idx="1"/>
+          </p:nvPr>
+        </p:nvPicPr>
+        <p:blipFill>
+          <a:blip r:embed="rId3">
+            <a:extLst>
+              <a:ext uri="{28A0092B-C50C-407E-A947-70E740481C1C}">
+                <a14:useLocalDpi xmlns:a14="http://schemas.microsoft.com/office/drawing/2010/main" val="0"/>
+              </a:ext>
+            </a:extLst>
+          </a:blip>
+          <a:stretch>
+            <a:fillRect/>
+          </a:stretch>
+        </p:blipFill>
+        <p:spPr>
+          <a:xfrm>
+            <a:off x="1647362" y="1512090"/>
+            <a:ext cx="9144019" cy="3657607"/>
+          </a:xfrm>
+          <a:prstGeom prst="rect">
+            <a:avLst/>
+          </a:prstGeom>
+        </p:spPr>
+      </p:pic>
+    </p:spTree>
+    <p:extLst>
+      <p:ext uri="{BB962C8B-B14F-4D97-AF65-F5344CB8AC3E}">
+        <p14:creationId xmlns:p14="http://schemas.microsoft.com/office/powerpoint/2010/main" val="4015620254"/>
+      </p:ext>
+    </p:extLst>
+  </p:cSld>
+  <p:clrMapOvr>
+    <a:masterClrMapping/>
+  </p:clrMapOvr>
+  <mc:AlternateContent xmlns:mc="http://schemas.openxmlformats.org/markup-compatibility/2006">
+    <mc:Choice xmlns:p159="http://schemas.microsoft.com/office/powerpoint/2015/09/main" Requires="p159">
+      <p:transition xmlns:p14="http://schemas.microsoft.com/office/powerpoint/2010/main" spd="slow" p14:dur="2000">
+        <p159:morph option="byObject"/>
+      </p:transition>
+    </mc:Choice>
+    <mc:Fallback>
+      <p:transition spd="slow">
+        <p:fade/>
+      </p:transition>
+    </mc:Fallback>
+  </mc:AlternateContent>
+</p:sld>
+</file>
+
+<file path=ppt/slides/slide8.xml><?xml version="1.0" encoding="utf-8"?>
 <p:sld xmlns:a="http://schemas.openxmlformats.org/drawingml/2006/main" xmlns:r="http://schemas.openxmlformats.org/officeDocument/2006/relationships" xmlns:p="http://schemas.openxmlformats.org/presentationml/2006/main">
   <p:cSld>
     <p:spTree>
@@ -7428,236 +9838,18 @@
   <p:clrMapOvr>
     <a:masterClrMapping/>
   </p:clrMapOvr>
-</p:sld>
-</file>
-
-<file path=ppt/slides/slide7.xml><?xml version="1.0" encoding="utf-8"?>
-<p:sld xmlns:a="http://schemas.openxmlformats.org/drawingml/2006/main" xmlns:r="http://schemas.openxmlformats.org/officeDocument/2006/relationships" xmlns:p="http://schemas.openxmlformats.org/presentationml/2006/main">
-  <p:cSld>
-    <p:spTree>
-      <p:nvGrpSpPr>
-        <p:cNvPr id="1" name=""/>
-        <p:cNvGrpSpPr/>
-        <p:nvPr/>
-      </p:nvGrpSpPr>
-      <p:grpSpPr>
-        <a:xfrm>
-          <a:off x="0" y="0"/>
-          <a:ext cx="0" cy="0"/>
-          <a:chOff x="0" y="0"/>
-          <a:chExt cx="0" cy="0"/>
-        </a:xfrm>
-      </p:grpSpPr>
-      <p:sp>
-        <p:nvSpPr>
-          <p:cNvPr id="2" name="标题 1">
-            <a:extLst>
-              <a:ext uri="{FF2B5EF4-FFF2-40B4-BE49-F238E27FC236}">
-                <a16:creationId xmlns:a16="http://schemas.microsoft.com/office/drawing/2014/main" id="{28480FA9-509A-5A0F-D5E1-30B402D89FC0}"/>
-              </a:ext>
-            </a:extLst>
-          </p:cNvPr>
-          <p:cNvSpPr>
-            <a:spLocks noGrp="1"/>
-          </p:cNvSpPr>
-          <p:nvPr>
-            <p:ph type="title"/>
-          </p:nvPr>
-        </p:nvSpPr>
-        <p:spPr/>
-        <p:txBody>
-          <a:bodyPr/>
-          <a:lstStyle/>
-          <a:p>
-            <a:r>
-              <a:rPr lang="zh-CN" altLang="zh-CN" dirty="0"/>
-              <a:t>频域：亚阈值共振的直观对比</a:t>
-            </a:r>
-            <a:endParaRPr lang="zh-CN" altLang="en-US" dirty="0"/>
-          </a:p>
-        </p:txBody>
-      </p:sp>
-      <p:pic>
-        <p:nvPicPr>
-          <p:cNvPr id="5" name="内容占位符 4">
-            <a:extLst>
-              <a:ext uri="{FF2B5EF4-FFF2-40B4-BE49-F238E27FC236}">
-                <a16:creationId xmlns:a16="http://schemas.microsoft.com/office/drawing/2014/main" id="{6C7FE44F-59E5-3E7D-FD70-16EF368C58C0}"/>
-              </a:ext>
-            </a:extLst>
-          </p:cNvPr>
-          <p:cNvPicPr>
-            <a:picLocks noGrp="1" noChangeAspect="1"/>
-          </p:cNvPicPr>
-          <p:nvPr>
-            <p:ph idx="1"/>
-          </p:nvPr>
-        </p:nvPicPr>
-        <p:blipFill>
-          <a:blip r:embed="rId3"/>
-          <a:stretch>
-            <a:fillRect/>
-          </a:stretch>
-        </p:blipFill>
-        <p:spPr>
-          <a:xfrm>
-            <a:off x="758371" y="1542279"/>
-            <a:ext cx="10515600" cy="3962128"/>
-          </a:xfrm>
-          <a:prstGeom prst="rect">
-            <a:avLst/>
-          </a:prstGeom>
-        </p:spPr>
-      </p:pic>
-      <p:sp>
-        <p:nvSpPr>
-          <p:cNvPr id="7" name="文本框 6">
-            <a:extLst>
-              <a:ext uri="{FF2B5EF4-FFF2-40B4-BE49-F238E27FC236}">
-                <a16:creationId xmlns:a16="http://schemas.microsoft.com/office/drawing/2014/main" id="{935BBFE0-80E7-E38E-72A3-978BC732775D}"/>
-              </a:ext>
-            </a:extLst>
-          </p:cNvPr>
-          <p:cNvSpPr txBox="1"/>
-          <p:nvPr/>
-        </p:nvSpPr>
-        <p:spPr>
-          <a:xfrm>
-            <a:off x="1023257" y="5653314"/>
-            <a:ext cx="9209314" cy="369332"/>
-          </a:xfrm>
-          <a:prstGeom prst="rect">
-            <a:avLst/>
-          </a:prstGeom>
-          <a:noFill/>
-        </p:spPr>
-        <p:txBody>
-          <a:bodyPr wrap="square" rtlCol="0">
-            <a:spAutoFit/>
-          </a:bodyPr>
-          <a:lstStyle/>
-          <a:p>
-            <a:r>
-              <a:rPr lang="zh-CN" altLang="en-US" dirty="0"/>
-              <a:t>计算共振显著度采用了</a:t>
-            </a:r>
-            <a:r>
-              <a:rPr lang="zh-CN" altLang="zh-CN" dirty="0"/>
-              <a:t>侧翼均值扣除法</a:t>
-            </a:r>
-            <a:r>
-              <a:rPr lang="zh-CN" altLang="en-US" dirty="0"/>
-              <a:t>，这也是为什么单调减函数也有非零值</a:t>
-            </a:r>
-          </a:p>
-        </p:txBody>
-      </p:sp>
-    </p:spTree>
-    <p:extLst>
-      <p:ext uri="{BB962C8B-B14F-4D97-AF65-F5344CB8AC3E}">
-        <p14:creationId xmlns:p14="http://schemas.microsoft.com/office/powerpoint/2010/main" val="3848546855"/>
-      </p:ext>
-    </p:extLst>
-  </p:cSld>
-  <p:clrMapOvr>
-    <a:masterClrMapping/>
-  </p:clrMapOvr>
-</p:sld>
-</file>
-
-<file path=ppt/slides/slide8.xml><?xml version="1.0" encoding="utf-8"?>
-<p:sld xmlns:a="http://schemas.openxmlformats.org/drawingml/2006/main" xmlns:r="http://schemas.openxmlformats.org/officeDocument/2006/relationships" xmlns:p="http://schemas.openxmlformats.org/presentationml/2006/main">
-  <p:cSld>
-    <p:spTree>
-      <p:nvGrpSpPr>
-        <p:cNvPr id="1" name=""/>
-        <p:cNvGrpSpPr/>
-        <p:nvPr/>
-      </p:nvGrpSpPr>
-      <p:grpSpPr>
-        <a:xfrm>
-          <a:off x="0" y="0"/>
-          <a:ext cx="0" cy="0"/>
-          <a:chOff x="0" y="0"/>
-          <a:chExt cx="0" cy="0"/>
-        </a:xfrm>
-      </p:grpSpPr>
-      <p:sp>
-        <p:nvSpPr>
-          <p:cNvPr id="2" name="标题 1">
-            <a:extLst>
-              <a:ext uri="{FF2B5EF4-FFF2-40B4-BE49-F238E27FC236}">
-                <a16:creationId xmlns:a16="http://schemas.microsoft.com/office/drawing/2014/main" id="{6CD92AD2-A0BA-E1A6-C107-06FD69E33E00}"/>
-              </a:ext>
-            </a:extLst>
-          </p:cNvPr>
-          <p:cNvSpPr>
-            <a:spLocks noGrp="1"/>
-          </p:cNvSpPr>
-          <p:nvPr>
-            <p:ph type="title"/>
-          </p:nvPr>
-        </p:nvSpPr>
-        <p:spPr>
-          <a:xfrm>
-            <a:off x="838200" y="212725"/>
-            <a:ext cx="10515600" cy="1325563"/>
-          </a:xfrm>
-        </p:spPr>
-        <p:txBody>
-          <a:bodyPr/>
-          <a:lstStyle/>
-          <a:p>
-            <a:r>
-              <a:rPr lang="zh-CN" altLang="zh-CN" dirty="0"/>
-              <a:t> 进阶发现：大脑如何切换“调频波段”？</a:t>
-            </a:r>
-            <a:endParaRPr lang="zh-CN" altLang="en-US" dirty="0"/>
-          </a:p>
-        </p:txBody>
-      </p:sp>
-      <p:pic>
-        <p:nvPicPr>
-          <p:cNvPr id="5" name="内容占位符 4">
-            <a:extLst>
-              <a:ext uri="{FF2B5EF4-FFF2-40B4-BE49-F238E27FC236}">
-                <a16:creationId xmlns:a16="http://schemas.microsoft.com/office/drawing/2014/main" id="{3919539E-3846-A60B-54CF-1EDCAAA19A4E}"/>
-              </a:ext>
-            </a:extLst>
-          </p:cNvPr>
-          <p:cNvPicPr>
-            <a:picLocks noGrp="1" noChangeAspect="1"/>
-          </p:cNvPicPr>
-          <p:nvPr>
-            <p:ph idx="1"/>
-          </p:nvPr>
-        </p:nvPicPr>
-        <p:blipFill>
-          <a:blip r:embed="rId3"/>
-          <a:stretch>
-            <a:fillRect/>
-          </a:stretch>
-        </p:blipFill>
-        <p:spPr>
-          <a:xfrm>
-            <a:off x="2884714" y="1702254"/>
-            <a:ext cx="5477024" cy="4351338"/>
-          </a:xfrm>
-          <a:prstGeom prst="rect">
-            <a:avLst/>
-          </a:prstGeom>
-        </p:spPr>
-      </p:pic>
-    </p:spTree>
-    <p:extLst>
-      <p:ext uri="{BB962C8B-B14F-4D97-AF65-F5344CB8AC3E}">
-        <p14:creationId xmlns:p14="http://schemas.microsoft.com/office/powerpoint/2010/main" val="1301971201"/>
-      </p:ext>
-    </p:extLst>
-  </p:cSld>
-  <p:clrMapOvr>
-    <a:masterClrMapping/>
-  </p:clrMapOvr>
+  <mc:AlternateContent xmlns:mc="http://schemas.openxmlformats.org/markup-compatibility/2006">
+    <mc:Choice xmlns:p159="http://schemas.microsoft.com/office/powerpoint/2015/09/main" Requires="p159">
+      <p:transition xmlns:p14="http://schemas.microsoft.com/office/powerpoint/2010/main" spd="slow" p14:dur="2000">
+        <p159:morph option="byObject"/>
+      </p:transition>
+    </mc:Choice>
+    <mc:Fallback>
+      <p:transition spd="slow">
+        <p:fade/>
+      </p:transition>
+    </mc:Fallback>
+  </mc:AlternateContent>
 </p:sld>
 </file>
 
@@ -7683,7 +9875,7 @@
           <p:cNvPr id="2" name="标题 1">
             <a:extLst>
               <a:ext uri="{FF2B5EF4-FFF2-40B4-BE49-F238E27FC236}">
-                <a16:creationId xmlns:a16="http://schemas.microsoft.com/office/drawing/2014/main" id="{34B2A1BD-A1D0-4DBD-B7ED-DD36921F00AE}"/>
+                <a16:creationId xmlns:a16="http://schemas.microsoft.com/office/drawing/2014/main" id="{28480FA9-509A-5A0F-D5E1-30B402D89FC0}"/>
               </a:ext>
             </a:extLst>
           </p:cNvPr>
@@ -7700,18 +9892,19 @@
           <a:lstStyle/>
           <a:p>
             <a:r>
-              <a:rPr lang="zh-CN" altLang="en-US" dirty="0"/>
-              <a:t>可能的原因：钾离子通道</a:t>
-            </a:r>
+              <a:rPr lang="zh-CN" altLang="zh-CN" dirty="0"/>
+              <a:t>频域：亚阈值共振的直观对比</a:t>
+            </a:r>
+            <a:endParaRPr lang="zh-CN" altLang="en-US" dirty="0"/>
           </a:p>
         </p:txBody>
       </p:sp>
       <p:pic>
         <p:nvPicPr>
-          <p:cNvPr id="9" name="内容占位符 8">
-            <a:extLst>
-              <a:ext uri="{FF2B5EF4-FFF2-40B4-BE49-F238E27FC236}">
-                <a16:creationId xmlns:a16="http://schemas.microsoft.com/office/drawing/2014/main" id="{8FAEEC33-4426-F0B6-5FCB-16A9B7BDE212}"/>
+          <p:cNvPr id="5" name="内容占位符 4">
+            <a:extLst>
+              <a:ext uri="{FF2B5EF4-FFF2-40B4-BE49-F238E27FC236}">
+                <a16:creationId xmlns:a16="http://schemas.microsoft.com/office/drawing/2014/main" id="{6C7FE44F-59E5-3E7D-FD70-16EF368C58C0}"/>
               </a:ext>
             </a:extLst>
           </p:cNvPr>
@@ -7730,60 +9923,30 @@
         </p:blipFill>
         <p:spPr>
           <a:xfrm>
-            <a:off x="224680" y="1538513"/>
-            <a:ext cx="4171020" cy="3276147"/>
+            <a:off x="736426" y="1586170"/>
+            <a:ext cx="10515600" cy="3962128"/>
           </a:xfrm>
           <a:prstGeom prst="rect">
             <a:avLst/>
           </a:prstGeom>
         </p:spPr>
       </p:pic>
-      <p:pic>
-        <p:nvPicPr>
-          <p:cNvPr id="11" name="图片 10">
-            <a:extLst>
-              <a:ext uri="{FF2B5EF4-FFF2-40B4-BE49-F238E27FC236}">
-                <a16:creationId xmlns:a16="http://schemas.microsoft.com/office/drawing/2014/main" id="{029ABE1C-80FA-76CB-5197-9E183C758971}"/>
-              </a:ext>
-            </a:extLst>
-          </p:cNvPr>
-          <p:cNvPicPr>
-            <a:picLocks noChangeAspect="1"/>
-          </p:cNvPicPr>
+      <p:sp>
+        <p:nvSpPr>
+          <p:cNvPr id="7" name="文本框 6">
+            <a:extLst>
+              <a:ext uri="{FF2B5EF4-FFF2-40B4-BE49-F238E27FC236}">
+                <a16:creationId xmlns:a16="http://schemas.microsoft.com/office/drawing/2014/main" id="{935BBFE0-80E7-E38E-72A3-978BC732775D}"/>
+              </a:ext>
+            </a:extLst>
+          </p:cNvPr>
+          <p:cNvSpPr txBox="1"/>
           <p:nvPr/>
-        </p:nvPicPr>
-        <p:blipFill>
-          <a:blip r:embed="rId4"/>
-          <a:stretch>
-            <a:fillRect/>
-          </a:stretch>
-        </p:blipFill>
+        </p:nvSpPr>
         <p:spPr>
           <a:xfrm>
-            <a:off x="4673601" y="1690688"/>
-            <a:ext cx="7206635" cy="2801840"/>
-          </a:xfrm>
-          <a:prstGeom prst="rect">
-            <a:avLst/>
-          </a:prstGeom>
-        </p:spPr>
-      </p:pic>
-      <p:sp>
-        <p:nvSpPr>
-          <p:cNvPr id="12" name="文本框 11">
-            <a:extLst>
-              <a:ext uri="{FF2B5EF4-FFF2-40B4-BE49-F238E27FC236}">
-                <a16:creationId xmlns:a16="http://schemas.microsoft.com/office/drawing/2014/main" id="{7C530ABC-BC76-117A-57C2-573B0B19CADC}"/>
-              </a:ext>
-            </a:extLst>
-          </p:cNvPr>
-          <p:cNvSpPr txBox="1"/>
-          <p:nvPr/>
-        </p:nvSpPr>
-        <p:spPr>
-          <a:xfrm>
-            <a:off x="838200" y="5319487"/>
-            <a:ext cx="9699171" cy="984885"/>
+            <a:off x="1023257" y="5653314"/>
+            <a:ext cx="9209314" cy="369332"/>
           </a:xfrm>
           <a:prstGeom prst="rect">
             <a:avLst/>
@@ -7797,43 +9960,42 @@
           <a:lstStyle/>
           <a:p>
             <a:r>
-              <a:rPr lang="zh-CN" altLang="en-US" sz="2000" dirty="0"/>
-              <a:t>入睡</a:t>
-            </a:r>
-            <a:r>
-              <a:rPr lang="zh-CN" altLang="zh-CN" sz="2000" dirty="0"/>
-              <a:t>/静息 (-75mV)：HCN 通道主导，调谐 Theta 波 (4-8 Hz)。</a:t>
-            </a:r>
-          </a:p>
-          <a:p>
-            <a:r>
-              <a:rPr lang="zh-CN" altLang="zh-CN" sz="2000" dirty="0"/>
-              <a:t>警觉/活跃 (-65mV)：HCN </a:t>
-            </a:r>
-            <a:r>
-              <a:rPr lang="zh-CN" altLang="en-US" sz="2000" dirty="0"/>
-              <a:t>几乎关闭</a:t>
-            </a:r>
-            <a:r>
-              <a:rPr lang="zh-CN" altLang="zh-CN" sz="2000" dirty="0"/>
-              <a:t>，钾通道接力，调谐 Beta/Gamma 波 (20-30 Hz)。</a:t>
-            </a:r>
-          </a:p>
-          <a:p>
-            <a:endParaRPr lang="zh-CN" altLang="en-US" dirty="0"/>
+              <a:rPr lang="zh-CN" altLang="en-US" dirty="0"/>
+              <a:t>计算共振显著度采用了</a:t>
+            </a:r>
+            <a:r>
+              <a:rPr lang="zh-CN" altLang="zh-CN" dirty="0"/>
+              <a:t>侧翼均值扣除法</a:t>
+            </a:r>
+            <a:r>
+              <a:rPr lang="zh-CN" altLang="en-US" dirty="0"/>
+              <a:t>，这也是为什么单调减函数也有非零值</a:t>
+            </a:r>
           </a:p>
         </p:txBody>
       </p:sp>
     </p:spTree>
     <p:extLst>
       <p:ext uri="{BB962C8B-B14F-4D97-AF65-F5344CB8AC3E}">
-        <p14:creationId xmlns:p14="http://schemas.microsoft.com/office/powerpoint/2010/main" val="4078803702"/>
+        <p14:creationId xmlns:p14="http://schemas.microsoft.com/office/powerpoint/2010/main" val="3848546855"/>
       </p:ext>
     </p:extLst>
   </p:cSld>
   <p:clrMapOvr>
     <a:masterClrMapping/>
   </p:clrMapOvr>
+  <mc:AlternateContent xmlns:mc="http://schemas.openxmlformats.org/markup-compatibility/2006">
+    <mc:Choice xmlns:p159="http://schemas.microsoft.com/office/powerpoint/2015/09/main" Requires="p159">
+      <p:transition xmlns:p14="http://schemas.microsoft.com/office/powerpoint/2010/main" spd="slow" p14:dur="2000">
+        <p159:morph option="byObject"/>
+      </p:transition>
+    </mc:Choice>
+    <mc:Fallback>
+      <p:transition spd="slow">
+        <p:fade/>
+      </p:transition>
+    </mc:Fallback>
+  </mc:AlternateContent>
 </p:sld>
 </file>
 
